--- a/docs/slides/巨量資料與雲端運算技術_海勤人力資源與作業安全決策系統_黃宇平_傅瀚鋌_曾紹喆_劉家样_李翊丞_林秉賢.pptx
+++ b/docs/slides/巨量資料與雲端運算技術_海勤人力資源與作業安全決策系統_黃宇平_傅瀚鋌_曾紹喆_劉家样_李翊丞_林秉賢.pptx
@@ -55989,8 +55989,8 @@
         </p:nvCxnSpPr>
         <p:spPr>
           <a:xfrm>
-            <a:off x="868680.0" y="3108960"/>
-            <a:ext cx="2966618.3333333335" cy="0"/>
+            <a:off x="868680" y="3108960"/>
+            <a:ext cx="2966618" cy="0"/>
           </a:xfrm>
           <a:prstGeom prst="bentConnector3">
             <a:avLst/>
@@ -56335,8 +56335,8 @@
         </p:nvCxnSpPr>
         <p:spPr>
           <a:xfrm>
-            <a:off x="4612538.333333334" y="3108960"/>
-            <a:ext cx="2966618.333333334" cy="0"/>
+            <a:off x="4612538" y="3108960"/>
+            <a:ext cx="2966618" cy="0"/>
           </a:xfrm>
           <a:prstGeom prst="bentConnector3">
             <a:avLst/>
@@ -56681,8 +56681,8 @@
         </p:nvCxnSpPr>
         <p:spPr>
           <a:xfrm>
-            <a:off x="8356396.666666667" y="3108960"/>
-            <a:ext cx="2966618.333333333" cy="0"/>
+            <a:off x="8356396" y="3108960"/>
+            <a:ext cx="2966618" cy="0"/>
           </a:xfrm>
           <a:prstGeom prst="bentConnector3">
             <a:avLst/>

--- a/docs/slides/巨量資料與雲端運算技術_海勤人力資源與作業安全決策系統_黃宇平_傅瀚鋌_曾紹喆_劉家样_李翊丞_林秉賢.pptx
+++ b/docs/slides/巨量資料與雲端運算技術_海勤人力資源與作業安全決策系統_黃宇平_傅瀚鋌_曾紹喆_劉家样_李翊丞_林秉賢.pptx
@@ -3986,7 +3986,7 @@
               </a:spcAft>
             </a:pPr>
             <a:r>
-              <a:rPr sz="1050" b="0" i="0">
+              <a:rPr sz="1150" b="0" i="0">
                 <a:solidFill>
                   <a:srgbClr val="7C8B97"/>
                 </a:solidFill>
@@ -4214,7 +4214,7 @@
               </a:spcAft>
             </a:pPr>
             <a:r>
-              <a:rPr sz="950" b="0" i="0">
+              <a:rPr sz="1000" b="0" i="0">
                 <a:solidFill>
                   <a:srgbClr val="7C8B97"/>
                 </a:solidFill>
@@ -4258,7 +4258,7 @@
               </a:spcAft>
             </a:pPr>
             <a:r>
-              <a:rPr sz="950" b="0" i="0">
+              <a:rPr sz="1000" b="0" i="0">
                 <a:solidFill>
                   <a:srgbClr val="7C8B97"/>
                 </a:solidFill>
@@ -6365,7 +6365,7 @@
               </a:spcAft>
             </a:pPr>
             <a:r>
-              <a:rPr sz="950" b="0" i="0">
+              <a:rPr sz="1000" b="0" i="0">
                 <a:solidFill>
                   <a:srgbClr val="7C8B97"/>
                 </a:solidFill>
@@ -6409,7 +6409,7 @@
               </a:spcAft>
             </a:pPr>
             <a:r>
-              <a:rPr sz="950" b="0" i="0">
+              <a:rPr sz="1000" b="0" i="0">
                 <a:solidFill>
                   <a:srgbClr val="7C8B97"/>
                 </a:solidFill>
@@ -8023,7 +8023,7 @@
               </a:spcAft>
             </a:pPr>
             <a:r>
-              <a:rPr sz="950" b="0" i="0">
+              <a:rPr sz="1000" b="0" i="0">
                 <a:solidFill>
                   <a:srgbClr val="7C8B97"/>
                 </a:solidFill>
@@ -8067,7 +8067,7 @@
               </a:spcAft>
             </a:pPr>
             <a:r>
-              <a:rPr sz="950" b="0" i="0">
+              <a:rPr sz="1000" b="0" i="0">
                 <a:solidFill>
                   <a:srgbClr val="7C8B97"/>
                 </a:solidFill>
@@ -8861,7 +8861,7 @@
               </a:spcAft>
             </a:pPr>
             <a:r>
-              <a:rPr sz="950" b="0" i="0">
+              <a:rPr sz="1000" b="0" i="0">
                 <a:solidFill>
                   <a:srgbClr val="7C8B97"/>
                 </a:solidFill>
@@ -9089,7 +9089,7 @@
               </a:spcAft>
             </a:pPr>
             <a:r>
-              <a:rPr sz="950" b="0" i="0">
+              <a:rPr sz="1000" b="0" i="0">
                 <a:solidFill>
                   <a:srgbClr val="7C8B97"/>
                 </a:solidFill>
@@ -9133,7 +9133,7 @@
               </a:spcAft>
             </a:pPr>
             <a:r>
-              <a:rPr sz="950" b="0" i="0">
+              <a:rPr sz="1000" b="0" i="0">
                 <a:solidFill>
                   <a:srgbClr val="7C8B97"/>
                 </a:solidFill>
@@ -9355,7 +9355,7 @@
               </a:spcAft>
             </a:pPr>
             <a:r>
-              <a:rPr sz="1000" b="0" i="0">
+              <a:rPr sz="1100" b="0" i="0">
                 <a:solidFill>
                   <a:srgbClr val="7C8B97"/>
                 </a:solidFill>
@@ -9577,7 +9577,7 @@
               </a:spcAft>
             </a:pPr>
             <a:r>
-              <a:rPr sz="1000" b="0" i="0">
+              <a:rPr sz="1100" b="0" i="0">
                 <a:solidFill>
                   <a:srgbClr val="7C8B97"/>
                 </a:solidFill>
@@ -9799,7 +9799,7 @@
               </a:spcAft>
             </a:pPr>
             <a:r>
-              <a:rPr sz="1000" b="0" i="0">
+              <a:rPr sz="1100" b="0" i="0">
                 <a:solidFill>
                   <a:srgbClr val="7C8B97"/>
                 </a:solidFill>
@@ -10021,7 +10021,7 @@
               </a:spcAft>
             </a:pPr>
             <a:r>
-              <a:rPr sz="1000" b="0" i="0">
+              <a:rPr sz="1100" b="0" i="0">
                 <a:solidFill>
                   <a:srgbClr val="7C8B97"/>
                 </a:solidFill>
@@ -10243,7 +10243,7 @@
               </a:spcAft>
             </a:pPr>
             <a:r>
-              <a:rPr sz="1000" b="0" i="0">
+              <a:rPr sz="1100" b="0" i="0">
                 <a:solidFill>
                   <a:srgbClr val="7C8B97"/>
                 </a:solidFill>
@@ -10465,7 +10465,7 @@
               </a:spcAft>
             </a:pPr>
             <a:r>
-              <a:rPr sz="1000" b="0" i="0">
+              <a:rPr sz="1100" b="0" i="0">
                 <a:solidFill>
                   <a:srgbClr val="7C8B97"/>
                 </a:solidFill>
@@ -10687,7 +10687,7 @@
               </a:spcAft>
             </a:pPr>
             <a:r>
-              <a:rPr sz="1000" b="0" i="0">
+              <a:rPr sz="1100" b="0" i="0">
                 <a:solidFill>
                   <a:srgbClr val="7C8B97"/>
                 </a:solidFill>
@@ -10909,7 +10909,7 @@
               </a:spcAft>
             </a:pPr>
             <a:r>
-              <a:rPr sz="1000" b="0" i="0">
+              <a:rPr sz="1100" b="0" i="0">
                 <a:solidFill>
                   <a:srgbClr val="7C8B97"/>
                 </a:solidFill>
@@ -11131,7 +11131,7 @@
               </a:spcAft>
             </a:pPr>
             <a:r>
-              <a:rPr sz="1000" b="0" i="0">
+              <a:rPr sz="1100" b="0" i="0">
                 <a:solidFill>
                   <a:srgbClr val="7C8B97"/>
                 </a:solidFill>
@@ -11353,7 +11353,7 @@
               </a:spcAft>
             </a:pPr>
             <a:r>
-              <a:rPr sz="1000" b="0" i="0">
+              <a:rPr sz="1100" b="0" i="0">
                 <a:solidFill>
                   <a:srgbClr val="7C8B97"/>
                 </a:solidFill>
@@ -11575,7 +11575,7 @@
               </a:spcAft>
             </a:pPr>
             <a:r>
-              <a:rPr sz="1000" b="0" i="0">
+              <a:rPr sz="1100" b="0" i="0">
                 <a:solidFill>
                   <a:srgbClr val="7C8B97"/>
                 </a:solidFill>
@@ -11797,7 +11797,7 @@
               </a:spcAft>
             </a:pPr>
             <a:r>
-              <a:rPr sz="1000" b="0" i="0">
+              <a:rPr sz="1100" b="0" i="0">
                 <a:solidFill>
                   <a:srgbClr val="7C8B97"/>
                 </a:solidFill>
@@ -12025,7 +12025,7 @@
               </a:spcAft>
             </a:pPr>
             <a:r>
-              <a:rPr sz="950" b="0" i="0">
+              <a:rPr sz="1000" b="0" i="0">
                 <a:solidFill>
                   <a:srgbClr val="7C8B97"/>
                 </a:solidFill>
@@ -12069,7 +12069,7 @@
               </a:spcAft>
             </a:pPr>
             <a:r>
-              <a:rPr sz="950" b="0" i="0">
+              <a:rPr sz="1000" b="0" i="0">
                 <a:solidFill>
                   <a:srgbClr val="7C8B97"/>
                 </a:solidFill>
@@ -12098,8 +12098,8 @@
         </p:blipFill>
         <p:spPr>
           <a:xfrm>
-            <a:off x="708660" y="1920240"/>
-            <a:ext cx="5349240" cy="3566160"/>
+            <a:off x="1120140" y="1920240"/>
+            <a:ext cx="4526280" cy="3017520"/>
           </a:xfrm>
           <a:prstGeom prst="rect">
             <a:avLst/>
@@ -12127,8 +12127,8 @@
         </p:blipFill>
         <p:spPr>
           <a:xfrm>
-            <a:off x="6400800" y="1920240"/>
-            <a:ext cx="5486400" cy="3526971"/>
+            <a:off x="6797040" y="1920240"/>
+            <a:ext cx="4693920" cy="3017520"/>
           </a:xfrm>
           <a:prstGeom prst="rect">
             <a:avLst/>
@@ -12148,7 +12148,7 @@
         </p:nvSpPr>
         <p:spPr>
           <a:xfrm>
-            <a:off x="640080" y="5532120"/>
+            <a:off x="640080" y="5029200"/>
             <a:ext cx="5486400" cy="274320"/>
           </a:xfrm>
           <a:prstGeom prst="rect">
@@ -12192,7 +12192,7 @@
         </p:nvSpPr>
         <p:spPr>
           <a:xfrm>
-            <a:off x="6400800" y="5532120"/>
+            <a:off x="6400800" y="5029200"/>
             <a:ext cx="5486400" cy="274320"/>
           </a:xfrm>
           <a:prstGeom prst="rect">
@@ -12619,7 +12619,7 @@
               </a:spcAft>
             </a:pPr>
             <a:r>
-              <a:rPr sz="950" b="0" i="0">
+              <a:rPr sz="1000" b="0" i="0">
                 <a:solidFill>
                   <a:srgbClr val="7C8B97"/>
                 </a:solidFill>
@@ -12663,7 +12663,7 @@
               </a:spcAft>
             </a:pPr>
             <a:r>
-              <a:rPr sz="950" b="0" i="0">
+              <a:rPr sz="1000" b="0" i="0">
                 <a:solidFill>
                   <a:srgbClr val="7C8B97"/>
                 </a:solidFill>
@@ -13671,7 +13671,7 @@
               </a:spcAft>
             </a:pPr>
             <a:r>
-              <a:rPr sz="950" b="0" i="0">
+              <a:rPr sz="1000" b="0" i="0">
                 <a:solidFill>
                   <a:srgbClr val="7C8B97"/>
                 </a:solidFill>
@@ -13899,7 +13899,7 @@
               </a:spcAft>
             </a:pPr>
             <a:r>
-              <a:rPr sz="950" b="0" i="0">
+              <a:rPr sz="1000" b="0" i="0">
                 <a:solidFill>
                   <a:srgbClr val="7C8B97"/>
                 </a:solidFill>
@@ -13943,7 +13943,7 @@
               </a:spcAft>
             </a:pPr>
             <a:r>
-              <a:rPr sz="950" b="0" i="0">
+              <a:rPr sz="1000" b="0" i="0">
                 <a:solidFill>
                   <a:srgbClr val="7C8B97"/>
                 </a:solidFill>
@@ -15059,7 +15059,7 @@
               </a:spcAft>
             </a:pPr>
             <a:r>
-              <a:rPr sz="950" b="0" i="0">
+              <a:rPr sz="1000" b="0" i="0">
                 <a:solidFill>
                   <a:srgbClr val="7C8B97"/>
                 </a:solidFill>
@@ -15103,7 +15103,7 @@
               </a:spcAft>
             </a:pPr>
             <a:r>
-              <a:rPr sz="950" b="0" i="0">
+              <a:rPr sz="1000" b="0" i="0">
                 <a:solidFill>
                   <a:srgbClr val="7C8B97"/>
                 </a:solidFill>
@@ -15287,7 +15287,7 @@
               </a:spcAft>
             </a:pPr>
             <a:r>
-              <a:rPr sz="1100" b="1" i="0">
+              <a:rPr sz="1150" b="1" i="0">
                 <a:solidFill>
                   <a:srgbClr val="C5D2DA"/>
                 </a:solidFill>
@@ -15298,7 +15298,7 @@
               <a:t>–  </a:t>
             </a:r>
             <a:r>
-              <a:rPr sz="1100" b="0" i="0">
+              <a:rPr sz="1150" b="0" i="0">
                 <a:solidFill>
                   <a:srgbClr val="7C8B97"/>
                 </a:solidFill>
@@ -15319,7 +15319,7 @@
               </a:spcAft>
             </a:pPr>
             <a:r>
-              <a:rPr sz="1100" b="1" i="0">
+              <a:rPr sz="1150" b="1" i="0">
                 <a:solidFill>
                   <a:srgbClr val="C5D2DA"/>
                 </a:solidFill>
@@ -15330,7 +15330,7 @@
               <a:t>–  </a:t>
             </a:r>
             <a:r>
-              <a:rPr sz="1100" b="0" i="0">
+              <a:rPr sz="1150" b="0" i="0">
                 <a:solidFill>
                   <a:srgbClr val="7C8B97"/>
                 </a:solidFill>
@@ -15351,7 +15351,7 @@
               </a:spcAft>
             </a:pPr>
             <a:r>
-              <a:rPr sz="1100" b="1" i="0">
+              <a:rPr sz="1150" b="1" i="0">
                 <a:solidFill>
                   <a:srgbClr val="C5D2DA"/>
                 </a:solidFill>
@@ -15362,7 +15362,7 @@
               <a:t>–  </a:t>
             </a:r>
             <a:r>
-              <a:rPr sz="1100" b="0" i="0">
+              <a:rPr sz="1150" b="0" i="0">
                 <a:solidFill>
                   <a:srgbClr val="7C8B97"/>
                 </a:solidFill>
@@ -15415,7 +15415,7 @@
               </a:spcAft>
             </a:pPr>
             <a:r>
-              <a:rPr sz="1100" b="1" i="0">
+              <a:rPr sz="1150" b="1" i="0">
                 <a:solidFill>
                   <a:srgbClr val="C5D2DA"/>
                 </a:solidFill>
@@ -15426,7 +15426,7 @@
               <a:t>–  </a:t>
             </a:r>
             <a:r>
-              <a:rPr sz="1100" b="0" i="0">
+              <a:rPr sz="1150" b="0" i="0">
                 <a:solidFill>
                   <a:srgbClr val="7C8B97"/>
                 </a:solidFill>
@@ -15447,7 +15447,7 @@
               </a:spcAft>
             </a:pPr>
             <a:r>
-              <a:rPr sz="1100" b="1" i="0">
+              <a:rPr sz="1150" b="1" i="0">
                 <a:solidFill>
                   <a:srgbClr val="C5D2DA"/>
                 </a:solidFill>
@@ -15458,7 +15458,7 @@
               <a:t>–  </a:t>
             </a:r>
             <a:r>
-              <a:rPr sz="1100" b="0" i="0">
+              <a:rPr sz="1150" b="0" i="0">
                 <a:solidFill>
                   <a:srgbClr val="7C8B97"/>
                 </a:solidFill>
@@ -15511,7 +15511,7 @@
               </a:spcAft>
             </a:pPr>
             <a:r>
-              <a:rPr sz="1100" b="1" i="0">
+              <a:rPr sz="1150" b="1" i="0">
                 <a:solidFill>
                   <a:srgbClr val="C5D2DA"/>
                 </a:solidFill>
@@ -15522,7 +15522,7 @@
               <a:t>–  </a:t>
             </a:r>
             <a:r>
-              <a:rPr sz="1100" b="0" i="0">
+              <a:rPr sz="1150" b="0" i="0">
                 <a:solidFill>
                   <a:srgbClr val="7C8B97"/>
                 </a:solidFill>
@@ -15750,7 +15750,7 @@
               </a:spcAft>
             </a:pPr>
             <a:r>
-              <a:rPr sz="950" b="0" i="0">
+              <a:rPr sz="1000" b="0" i="0">
                 <a:solidFill>
                   <a:srgbClr val="7C8B97"/>
                 </a:solidFill>
@@ -15794,7 +15794,7 @@
               </a:spcAft>
             </a:pPr>
             <a:r>
-              <a:rPr sz="950" b="0" i="0">
+              <a:rPr sz="1000" b="0" i="0">
                 <a:solidFill>
                   <a:srgbClr val="7C8B97"/>
                 </a:solidFill>
@@ -17141,7 +17141,7 @@
               </a:spcAft>
             </a:pPr>
             <a:r>
-              <a:rPr sz="950" b="0" i="0">
+              <a:rPr sz="1000" b="0" i="0">
                 <a:solidFill>
                   <a:srgbClr val="7C8B97"/>
                 </a:solidFill>
@@ -17185,7 +17185,7 @@
               </a:spcAft>
             </a:pPr>
             <a:r>
-              <a:rPr sz="950" b="0" i="0">
+              <a:rPr sz="1000" b="0" i="0">
                 <a:solidFill>
                   <a:srgbClr val="7C8B97"/>
                 </a:solidFill>
@@ -17618,7 +17618,7 @@
               </a:spcAft>
             </a:pPr>
             <a:r>
-              <a:rPr sz="950" b="0" i="0">
+              <a:rPr sz="1000" b="0" i="0">
                 <a:solidFill>
                   <a:srgbClr val="7C8B97"/>
                 </a:solidFill>
@@ -17662,7 +17662,7 @@
               </a:spcAft>
             </a:pPr>
             <a:r>
-              <a:rPr sz="950" b="0" i="0">
+              <a:rPr sz="1000" b="0" i="0">
                 <a:solidFill>
                   <a:srgbClr val="7C8B97"/>
                 </a:solidFill>
@@ -18785,7 +18785,7 @@
               </a:spcAft>
             </a:pPr>
             <a:r>
-              <a:rPr sz="950" b="0" i="0">
+              <a:rPr sz="1000" b="0" i="0">
                 <a:solidFill>
                   <a:srgbClr val="7C8B97"/>
                 </a:solidFill>
@@ -18829,7 +18829,7 @@
               </a:spcAft>
             </a:pPr>
             <a:r>
-              <a:rPr sz="950" b="0" i="0">
+              <a:rPr sz="1000" b="0" i="0">
                 <a:solidFill>
                   <a:srgbClr val="7C8B97"/>
                 </a:solidFill>
@@ -20281,7 +20281,7 @@
               </a:spcAft>
             </a:pPr>
             <a:r>
-              <a:rPr sz="950" b="0" i="0">
+              <a:rPr sz="1000" b="0" i="0">
                 <a:solidFill>
                   <a:srgbClr val="7C8B97"/>
                 </a:solidFill>
@@ -20325,7 +20325,7 @@
               </a:spcAft>
             </a:pPr>
             <a:r>
-              <a:rPr sz="950" b="0" i="0">
+              <a:rPr sz="1000" b="0" i="0">
                 <a:solidFill>
                   <a:srgbClr val="7C8B97"/>
                 </a:solidFill>
@@ -20465,8 +20465,8 @@
         </p:nvSpPr>
         <p:spPr>
           <a:xfrm>
-            <a:off x="8028432" y="2093975"/>
-            <a:ext cx="3358591" cy="603504"/>
+            <a:off x="8028432" y="1984247"/>
+            <a:ext cx="3358591" cy="365760"/>
           </a:xfrm>
           <a:prstGeom prst="rect">
             <a:avLst/>
@@ -20509,8 +20509,8 @@
         </p:nvSpPr>
         <p:spPr>
           <a:xfrm>
-            <a:off x="8028432" y="2093975"/>
-            <a:ext cx="3358591" cy="274320"/>
+            <a:off x="8028432" y="2368295"/>
+            <a:ext cx="3358591" cy="256032"/>
           </a:xfrm>
           <a:prstGeom prst="rect">
             <a:avLst/>
@@ -20643,8 +20643,8 @@
         </p:nvSpPr>
         <p:spPr>
           <a:xfrm>
-            <a:off x="8028432" y="3008375"/>
-            <a:ext cx="3358591" cy="603504"/>
+            <a:off x="8028432" y="2898647"/>
+            <a:ext cx="3358591" cy="365760"/>
           </a:xfrm>
           <a:prstGeom prst="rect">
             <a:avLst/>
@@ -20687,8 +20687,8 @@
         </p:nvSpPr>
         <p:spPr>
           <a:xfrm>
-            <a:off x="8028432" y="3008375"/>
-            <a:ext cx="3358591" cy="274320"/>
+            <a:off x="8028432" y="3282695"/>
+            <a:ext cx="3358591" cy="256032"/>
           </a:xfrm>
           <a:prstGeom prst="rect">
             <a:avLst/>
@@ -20821,8 +20821,8 @@
         </p:nvSpPr>
         <p:spPr>
           <a:xfrm>
-            <a:off x="8028432" y="3922775"/>
-            <a:ext cx="3358591" cy="603504"/>
+            <a:off x="8028432" y="3813047"/>
+            <a:ext cx="3358591" cy="365760"/>
           </a:xfrm>
           <a:prstGeom prst="rect">
             <a:avLst/>
@@ -20865,8 +20865,8 @@
         </p:nvSpPr>
         <p:spPr>
           <a:xfrm>
-            <a:off x="8028432" y="3922775"/>
-            <a:ext cx="3358591" cy="274320"/>
+            <a:off x="8028432" y="4197095"/>
+            <a:ext cx="3358591" cy="256032"/>
           </a:xfrm>
           <a:prstGeom prst="rect">
             <a:avLst/>
@@ -21228,7 +21228,7 @@
               </a:spcAft>
             </a:pPr>
             <a:r>
-              <a:rPr sz="950" b="0" i="0">
+              <a:rPr sz="1000" b="0" i="0">
                 <a:solidFill>
                   <a:srgbClr val="7C8B97"/>
                 </a:solidFill>
@@ -21272,7 +21272,7 @@
               </a:spcAft>
             </a:pPr>
             <a:r>
-              <a:rPr sz="950" b="0" i="0">
+              <a:rPr sz="1000" b="0" i="0">
                 <a:solidFill>
                   <a:srgbClr val="7C8B97"/>
                 </a:solidFill>
@@ -21383,8 +21383,8 @@
         </p:nvSpPr>
         <p:spPr>
           <a:xfrm>
-            <a:off x="850392" y="2048256"/>
-            <a:ext cx="2215819" cy="603504"/>
+            <a:off x="850392" y="1938528"/>
+            <a:ext cx="2215819" cy="539496"/>
           </a:xfrm>
           <a:prstGeom prst="rect">
             <a:avLst/>
@@ -21427,8 +21427,8 @@
         </p:nvSpPr>
         <p:spPr>
           <a:xfrm>
-            <a:off x="850392" y="2221992"/>
-            <a:ext cx="2215819" cy="274320"/>
+            <a:off x="850392" y="2496312"/>
+            <a:ext cx="2215819" cy="256032"/>
           </a:xfrm>
           <a:prstGeom prst="rect">
             <a:avLst/>
@@ -21561,8 +21561,8 @@
         </p:nvSpPr>
         <p:spPr>
           <a:xfrm>
-            <a:off x="3578275" y="2048256"/>
-            <a:ext cx="2215819" cy="603504"/>
+            <a:off x="3578275" y="1938528"/>
+            <a:ext cx="2215819" cy="539496"/>
           </a:xfrm>
           <a:prstGeom prst="rect">
             <a:avLst/>
@@ -21605,8 +21605,8 @@
         </p:nvSpPr>
         <p:spPr>
           <a:xfrm>
-            <a:off x="3578275" y="2221992"/>
-            <a:ext cx="2215819" cy="274320"/>
+            <a:off x="3578275" y="2496312"/>
+            <a:ext cx="2215819" cy="256032"/>
           </a:xfrm>
           <a:prstGeom prst="rect">
             <a:avLst/>
@@ -21739,8 +21739,8 @@
         </p:nvSpPr>
         <p:spPr>
           <a:xfrm>
-            <a:off x="6306159" y="2048256"/>
-            <a:ext cx="2215819" cy="603504"/>
+            <a:off x="6306159" y="1938528"/>
+            <a:ext cx="2215819" cy="539496"/>
           </a:xfrm>
           <a:prstGeom prst="rect">
             <a:avLst/>
@@ -21783,8 +21783,8 @@
         </p:nvSpPr>
         <p:spPr>
           <a:xfrm>
-            <a:off x="6306159" y="2221992"/>
-            <a:ext cx="2215819" cy="274320"/>
+            <a:off x="6306159" y="2496312"/>
+            <a:ext cx="2215819" cy="256032"/>
           </a:xfrm>
           <a:prstGeom prst="rect">
             <a:avLst/>
@@ -21917,8 +21917,8 @@
         </p:nvSpPr>
         <p:spPr>
           <a:xfrm>
-            <a:off x="9034043" y="2048256"/>
-            <a:ext cx="2215819" cy="603504"/>
+            <a:off x="9034043" y="1938528"/>
+            <a:ext cx="2215819" cy="539496"/>
           </a:xfrm>
           <a:prstGeom prst="rect">
             <a:avLst/>
@@ -21961,8 +21961,8 @@
         </p:nvSpPr>
         <p:spPr>
           <a:xfrm>
-            <a:off x="9034043" y="2221992"/>
-            <a:ext cx="2215819" cy="274320"/>
+            <a:off x="9034043" y="2496312"/>
+            <a:ext cx="2215819" cy="256032"/>
           </a:xfrm>
           <a:prstGeom prst="rect">
             <a:avLst/>
@@ -25156,7 +25156,7 @@
               </a:spcAft>
             </a:pPr>
             <a:r>
-              <a:rPr sz="950" b="0" i="0">
+              <a:rPr sz="1000" b="0" i="0">
                 <a:solidFill>
                   <a:srgbClr val="7C8B97"/>
                 </a:solidFill>
@@ -25384,7 +25384,7 @@
               </a:spcAft>
             </a:pPr>
             <a:r>
-              <a:rPr sz="950" b="0" i="0">
+              <a:rPr sz="1000" b="0" i="0">
                 <a:solidFill>
                   <a:srgbClr val="7C8B97"/>
                 </a:solidFill>
@@ -25428,7 +25428,7 @@
               </a:spcAft>
             </a:pPr>
             <a:r>
-              <a:rPr sz="950" b="0" i="0">
+              <a:rPr sz="1000" b="0" i="0">
                 <a:solidFill>
                   <a:srgbClr val="7C8B97"/>
                 </a:solidFill>
@@ -27350,7 +27350,7 @@
               </a:spcAft>
             </a:pPr>
             <a:r>
-              <a:rPr sz="950" b="0" i="0">
+              <a:rPr sz="1000" b="0" i="0">
                 <a:solidFill>
                   <a:srgbClr val="7C8B97"/>
                 </a:solidFill>
@@ -27394,7 +27394,7 @@
               </a:spcAft>
             </a:pPr>
             <a:r>
-              <a:rPr sz="950" b="0" i="0">
+              <a:rPr sz="1000" b="0" i="0">
                 <a:solidFill>
                   <a:srgbClr val="7C8B97"/>
                 </a:solidFill>
@@ -28059,7 +28059,7 @@
               </a:spcAft>
             </a:pPr>
             <a:r>
-              <a:rPr sz="1100" b="1" i="0">
+              <a:rPr sz="1150" b="1" i="0">
                 <a:solidFill>
                   <a:srgbClr val="C5D2DA"/>
                 </a:solidFill>
@@ -28070,7 +28070,7 @@
               <a:t>–  </a:t>
             </a:r>
             <a:r>
-              <a:rPr sz="1100" b="0" i="0">
+              <a:rPr sz="1150" b="0" i="0">
                 <a:solidFill>
                   <a:srgbClr val="7C8B97"/>
                 </a:solidFill>
@@ -28091,7 +28091,7 @@
               </a:spcAft>
             </a:pPr>
             <a:r>
-              <a:rPr sz="1100" b="1" i="0">
+              <a:rPr sz="1150" b="1" i="0">
                 <a:solidFill>
                   <a:srgbClr val="C5D2DA"/>
                 </a:solidFill>
@@ -28102,7 +28102,7 @@
               <a:t>–  </a:t>
             </a:r>
             <a:r>
-              <a:rPr sz="1100" b="0" i="0">
+              <a:rPr sz="1150" b="0" i="0">
                 <a:solidFill>
                   <a:srgbClr val="7C8B97"/>
                 </a:solidFill>
@@ -28155,7 +28155,7 @@
               </a:spcAft>
             </a:pPr>
             <a:r>
-              <a:rPr sz="1100" b="1" i="0">
+              <a:rPr sz="1150" b="1" i="0">
                 <a:solidFill>
                   <a:srgbClr val="C5D2DA"/>
                 </a:solidFill>
@@ -28166,7 +28166,7 @@
               <a:t>–  </a:t>
             </a:r>
             <a:r>
-              <a:rPr sz="1100" b="0" i="0">
+              <a:rPr sz="1150" b="0" i="0">
                 <a:solidFill>
                   <a:srgbClr val="7C8B97"/>
                 </a:solidFill>
@@ -28187,7 +28187,7 @@
               </a:spcAft>
             </a:pPr>
             <a:r>
-              <a:rPr sz="1100" b="1" i="0">
+              <a:rPr sz="1150" b="1" i="0">
                 <a:solidFill>
                   <a:srgbClr val="C5D2DA"/>
                 </a:solidFill>
@@ -28198,7 +28198,7 @@
               <a:t>–  </a:t>
             </a:r>
             <a:r>
-              <a:rPr sz="1100" b="0" i="0">
+              <a:rPr sz="1150" b="0" i="0">
                 <a:solidFill>
                   <a:srgbClr val="7C8B97"/>
                 </a:solidFill>
@@ -28219,7 +28219,7 @@
               </a:spcAft>
             </a:pPr>
             <a:r>
-              <a:rPr sz="1100" b="1" i="0">
+              <a:rPr sz="1150" b="1" i="0">
                 <a:solidFill>
                   <a:srgbClr val="C5D2DA"/>
                 </a:solidFill>
@@ -28230,7 +28230,7 @@
               <a:t>–  </a:t>
             </a:r>
             <a:r>
-              <a:rPr sz="1100" b="0" i="0">
+              <a:rPr sz="1150" b="0" i="0">
                 <a:solidFill>
                   <a:srgbClr val="7C8B97"/>
                 </a:solidFill>
@@ -28458,7 +28458,7 @@
               </a:spcAft>
             </a:pPr>
             <a:r>
-              <a:rPr sz="950" b="0" i="0">
+              <a:rPr sz="1000" b="0" i="0">
                 <a:solidFill>
                   <a:srgbClr val="7C8B97"/>
                 </a:solidFill>
@@ -28502,7 +28502,7 @@
               </a:spcAft>
             </a:pPr>
             <a:r>
-              <a:rPr sz="950" b="0" i="0">
+              <a:rPr sz="1000" b="0" i="0">
                 <a:solidFill>
                   <a:srgbClr val="7C8B97"/>
                 </a:solidFill>
@@ -29988,7 +29988,7 @@
               </a:spcAft>
             </a:pPr>
             <a:r>
-              <a:rPr sz="1100" b="1" i="0">
+              <a:rPr sz="1150" b="1" i="0">
                 <a:solidFill>
                   <a:srgbClr val="C5D2DA"/>
                 </a:solidFill>
@@ -29999,7 +29999,7 @@
               <a:t>–  </a:t>
             </a:r>
             <a:r>
-              <a:rPr sz="1100" b="0" i="0">
+              <a:rPr sz="1150" b="0" i="0">
                 <a:solidFill>
                   <a:srgbClr val="7C8B97"/>
                 </a:solidFill>
@@ -30435,7 +30435,7 @@
               </a:spcAft>
             </a:pPr>
             <a:r>
-              <a:rPr sz="950" b="0" i="0">
+              <a:rPr sz="1000" b="0" i="0">
                 <a:solidFill>
                   <a:srgbClr val="7C8B97"/>
                 </a:solidFill>
@@ -30479,7 +30479,7 @@
               </a:spcAft>
             </a:pPr>
             <a:r>
-              <a:rPr sz="950" b="0" i="0">
+              <a:rPr sz="1000" b="0" i="0">
                 <a:solidFill>
                   <a:srgbClr val="7C8B97"/>
                 </a:solidFill>
@@ -31640,7 +31640,7 @@
               </a:spcAft>
             </a:pPr>
             <a:r>
-              <a:rPr sz="950" b="0" i="0">
+              <a:rPr sz="1000" b="0" i="0">
                 <a:solidFill>
                   <a:srgbClr val="7C8B97"/>
                 </a:solidFill>
@@ -31684,7 +31684,7 @@
               </a:spcAft>
             </a:pPr>
             <a:r>
-              <a:rPr sz="950" b="0" i="0">
+              <a:rPr sz="1000" b="0" i="0">
                 <a:solidFill>
                   <a:srgbClr val="7C8B97"/>
                 </a:solidFill>
@@ -31863,7 +31863,7 @@
               </a:spcAft>
             </a:pPr>
             <a:r>
-              <a:rPr sz="1050" b="0" i="0">
+              <a:rPr sz="1150" b="0" i="0">
                 <a:solidFill>
                   <a:srgbClr val="7C8B97"/>
                 </a:solidFill>
@@ -32042,7 +32042,7 @@
               </a:spcAft>
             </a:pPr>
             <a:r>
-              <a:rPr sz="1050" b="0" i="0">
+              <a:rPr sz="1150" b="0" i="0">
                 <a:solidFill>
                   <a:srgbClr val="7C8B97"/>
                 </a:solidFill>
@@ -32221,7 +32221,7 @@
               </a:spcAft>
             </a:pPr>
             <a:r>
-              <a:rPr sz="1050" b="0" i="0">
+              <a:rPr sz="1150" b="0" i="0">
                 <a:solidFill>
                   <a:srgbClr val="7C8B97"/>
                 </a:solidFill>
@@ -32400,7 +32400,7 @@
               </a:spcAft>
             </a:pPr>
             <a:r>
-              <a:rPr sz="1050" b="0" i="0">
+              <a:rPr sz="1150" b="0" i="0">
                 <a:solidFill>
                   <a:srgbClr val="7C8B97"/>
                 </a:solidFill>
@@ -32579,7 +32579,7 @@
               </a:spcAft>
             </a:pPr>
             <a:r>
-              <a:rPr sz="1050" b="0" i="0">
+              <a:rPr sz="1150" b="0" i="0">
                 <a:solidFill>
                   <a:srgbClr val="7C8B97"/>
                 </a:solidFill>
@@ -32758,7 +32758,7 @@
               </a:spcAft>
             </a:pPr>
             <a:r>
-              <a:rPr sz="1050" b="0" i="0">
+              <a:rPr sz="1150" b="0" i="0">
                 <a:solidFill>
                   <a:srgbClr val="7C8B97"/>
                 </a:solidFill>
@@ -32937,7 +32937,7 @@
               </a:spcAft>
             </a:pPr>
             <a:r>
-              <a:rPr sz="1050" b="0" i="0">
+              <a:rPr sz="1150" b="0" i="0">
                 <a:solidFill>
                   <a:srgbClr val="7C8B97"/>
                 </a:solidFill>
@@ -33116,7 +33116,7 @@
               </a:spcAft>
             </a:pPr>
             <a:r>
-              <a:rPr sz="1050" b="0" i="0">
+              <a:rPr sz="1150" b="0" i="0">
                 <a:solidFill>
                   <a:srgbClr val="7C8B97"/>
                 </a:solidFill>
@@ -33295,7 +33295,7 @@
               </a:spcAft>
             </a:pPr>
             <a:r>
-              <a:rPr sz="1050" b="0" i="0">
+              <a:rPr sz="1150" b="0" i="0">
                 <a:solidFill>
                   <a:srgbClr val="7C8B97"/>
                 </a:solidFill>
@@ -33916,7 +33916,7 @@
               </a:spcAft>
             </a:pPr>
             <a:r>
-              <a:rPr sz="950" b="0" i="0">
+              <a:rPr sz="1000" b="0" i="0">
                 <a:solidFill>
                   <a:srgbClr val="7C8B97"/>
                 </a:solidFill>
@@ -34144,7 +34144,7 @@
               </a:spcAft>
             </a:pPr>
             <a:r>
-              <a:rPr sz="950" b="0" i="0">
+              <a:rPr sz="1000" b="0" i="0">
                 <a:solidFill>
                   <a:srgbClr val="7C8B97"/>
                 </a:solidFill>
@@ -34188,7 +34188,7 @@
               </a:spcAft>
             </a:pPr>
             <a:r>
-              <a:rPr sz="950" b="0" i="0">
+              <a:rPr sz="1000" b="0" i="0">
                 <a:solidFill>
                   <a:srgbClr val="7C8B97"/>
                 </a:solidFill>
@@ -35460,7 +35460,7 @@
               </a:spcAft>
             </a:pPr>
             <a:r>
-              <a:rPr sz="950" b="0" i="0">
+              <a:rPr sz="1000" b="0" i="0">
                 <a:solidFill>
                   <a:srgbClr val="7C8B97"/>
                 </a:solidFill>
@@ -35504,7 +35504,7 @@
               </a:spcAft>
             </a:pPr>
             <a:r>
-              <a:rPr sz="950" b="0" i="0">
+              <a:rPr sz="1000" b="0" i="0">
                 <a:solidFill>
                   <a:srgbClr val="7C8B97"/>
                 </a:solidFill>
@@ -35752,7 +35752,7 @@
               </a:spcAft>
             </a:pPr>
             <a:r>
-              <a:rPr sz="1100" b="1" i="0">
+              <a:rPr sz="1150" b="1" i="0">
                 <a:solidFill>
                   <a:srgbClr val="C5D2DA"/>
                 </a:solidFill>
@@ -35763,7 +35763,7 @@
               <a:t>–  </a:t>
             </a:r>
             <a:r>
-              <a:rPr sz="1100" b="0" i="0">
+              <a:rPr sz="1150" b="0" i="0">
                 <a:solidFill>
                   <a:srgbClr val="7C8B97"/>
                 </a:solidFill>
@@ -36087,7 +36087,7 @@
               </a:spcAft>
             </a:pPr>
             <a:r>
-              <a:rPr sz="950" b="0" i="0">
+              <a:rPr sz="1000" b="0" i="0">
                 <a:solidFill>
                   <a:srgbClr val="7C8B97"/>
                 </a:solidFill>
@@ -36131,7 +36131,7 @@
               </a:spcAft>
             </a:pPr>
             <a:r>
-              <a:rPr sz="950" b="0" i="0">
+              <a:rPr sz="1000" b="0" i="0">
                 <a:solidFill>
                   <a:srgbClr val="7C8B97"/>
                 </a:solidFill>
@@ -36443,7 +36443,7 @@
               </a:spcAft>
             </a:pPr>
             <a:r>
-              <a:rPr sz="1100" b="1" i="0">
+              <a:rPr sz="1150" b="1" i="0">
                 <a:solidFill>
                   <a:srgbClr val="C5D2DA"/>
                 </a:solidFill>
@@ -36454,7 +36454,7 @@
               <a:t>–  </a:t>
             </a:r>
             <a:r>
-              <a:rPr sz="1100" b="0" i="0">
+              <a:rPr sz="1150" b="0" i="0">
                 <a:solidFill>
                   <a:srgbClr val="7C8B97"/>
                 </a:solidFill>
@@ -36714,7 +36714,7 @@
               </a:spcAft>
             </a:pPr>
             <a:r>
-              <a:rPr sz="950" b="0" i="0">
+              <a:rPr sz="1000" b="0" i="0">
                 <a:solidFill>
                   <a:srgbClr val="7C8B97"/>
                 </a:solidFill>
@@ -36758,7 +36758,7 @@
               </a:spcAft>
             </a:pPr>
             <a:r>
-              <a:rPr sz="950" b="0" i="0">
+              <a:rPr sz="1000" b="0" i="0">
                 <a:solidFill>
                   <a:srgbClr val="7C8B97"/>
                 </a:solidFill>
@@ -37102,7 +37102,7 @@
               </a:spcAft>
             </a:pPr>
             <a:r>
-              <a:rPr sz="1100" b="1" i="0">
+              <a:rPr sz="1150" b="1" i="0">
                 <a:solidFill>
                   <a:srgbClr val="C5D2DA"/>
                 </a:solidFill>
@@ -37113,7 +37113,7 @@
               <a:t>–  </a:t>
             </a:r>
             <a:r>
-              <a:rPr sz="1100" b="0" i="0">
+              <a:rPr sz="1150" b="0" i="0">
                 <a:solidFill>
                   <a:srgbClr val="7C8B97"/>
                 </a:solidFill>
@@ -37341,7 +37341,7 @@
               </a:spcAft>
             </a:pPr>
             <a:r>
-              <a:rPr sz="950" b="0" i="0">
+              <a:rPr sz="1000" b="0" i="0">
                 <a:solidFill>
                   <a:srgbClr val="7C8B97"/>
                 </a:solidFill>
@@ -37385,7 +37385,7 @@
               </a:spcAft>
             </a:pPr>
             <a:r>
-              <a:rPr sz="950" b="0" i="0">
+              <a:rPr sz="1000" b="0" i="0">
                 <a:solidFill>
                   <a:srgbClr val="7C8B97"/>
                 </a:solidFill>
@@ -37729,7 +37729,7 @@
               </a:spcAft>
             </a:pPr>
             <a:r>
-              <a:rPr sz="1100" b="1" i="0">
+              <a:rPr sz="1150" b="1" i="0">
                 <a:solidFill>
                   <a:srgbClr val="C5D2DA"/>
                 </a:solidFill>
@@ -37740,7 +37740,7 @@
               <a:t>–  </a:t>
             </a:r>
             <a:r>
-              <a:rPr sz="1100" b="0" i="0">
+              <a:rPr sz="1150" b="0" i="0">
                 <a:solidFill>
                   <a:srgbClr val="7C8B97"/>
                 </a:solidFill>
@@ -38361,7 +38361,7 @@
               </a:spcAft>
             </a:pPr>
             <a:r>
-              <a:rPr sz="950" b="0" i="0">
+              <a:rPr sz="1000" b="0" i="0">
                 <a:solidFill>
                   <a:srgbClr val="7C8B97"/>
                 </a:solidFill>
@@ -38589,7 +38589,7 @@
               </a:spcAft>
             </a:pPr>
             <a:r>
-              <a:rPr sz="950" b="0" i="0">
+              <a:rPr sz="1000" b="0" i="0">
                 <a:solidFill>
                   <a:srgbClr val="7C8B97"/>
                 </a:solidFill>
@@ -38633,7 +38633,7 @@
               </a:spcAft>
             </a:pPr>
             <a:r>
-              <a:rPr sz="950" b="0" i="0">
+              <a:rPr sz="1000" b="0" i="0">
                 <a:solidFill>
                   <a:srgbClr val="7C8B97"/>
                 </a:solidFill>
@@ -38846,7 +38846,7 @@
               </a:spcAft>
             </a:pPr>
             <a:r>
-              <a:rPr sz="1050" b="1" i="0">
+              <a:rPr sz="1150" b="1" i="0">
                 <a:solidFill>
                   <a:srgbClr val="C5D2DA"/>
                 </a:solidFill>
@@ -38857,7 +38857,7 @@
               <a:t>–  </a:t>
             </a:r>
             <a:r>
-              <a:rPr sz="1050" b="0" i="0">
+              <a:rPr sz="1150" b="0" i="0">
                 <a:solidFill>
                   <a:srgbClr val="7C8B97"/>
                 </a:solidFill>
@@ -38878,7 +38878,7 @@
               </a:spcAft>
             </a:pPr>
             <a:r>
-              <a:rPr sz="1050" b="1" i="0">
+              <a:rPr sz="1150" b="1" i="0">
                 <a:solidFill>
                   <a:srgbClr val="C5D2DA"/>
                 </a:solidFill>
@@ -38889,7 +38889,7 @@
               <a:t>–  </a:t>
             </a:r>
             <a:r>
-              <a:rPr sz="1050" b="0" i="0">
+              <a:rPr sz="1150" b="0" i="0">
                 <a:solidFill>
                   <a:srgbClr val="7C8B97"/>
                 </a:solidFill>
@@ -38942,7 +38942,7 @@
               </a:spcAft>
             </a:pPr>
             <a:r>
-              <a:rPr sz="1050" b="1" i="0">
+              <a:rPr sz="1150" b="1" i="0">
                 <a:solidFill>
                   <a:srgbClr val="C5D2DA"/>
                 </a:solidFill>
@@ -38953,7 +38953,7 @@
               <a:t>–  </a:t>
             </a:r>
             <a:r>
-              <a:rPr sz="1050" b="0" i="0">
+              <a:rPr sz="1150" b="0" i="0">
                 <a:solidFill>
                   <a:srgbClr val="7C8B97"/>
                 </a:solidFill>
@@ -38974,7 +38974,7 @@
               </a:spcAft>
             </a:pPr>
             <a:r>
-              <a:rPr sz="1050" b="1" i="0">
+              <a:rPr sz="1150" b="1" i="0">
                 <a:solidFill>
                   <a:srgbClr val="C5D2DA"/>
                 </a:solidFill>
@@ -38985,7 +38985,7 @@
               <a:t>–  </a:t>
             </a:r>
             <a:r>
-              <a:rPr sz="1050" b="0" i="0">
+              <a:rPr sz="1150" b="0" i="0">
                 <a:solidFill>
                   <a:srgbClr val="7C8B97"/>
                 </a:solidFill>
@@ -39006,7 +39006,7 @@
               </a:spcAft>
             </a:pPr>
             <a:r>
-              <a:rPr sz="1050" b="1" i="0">
+              <a:rPr sz="1150" b="1" i="0">
                 <a:solidFill>
                   <a:srgbClr val="C5D2DA"/>
                 </a:solidFill>
@@ -39017,7 +39017,7 @@
               <a:t>–  </a:t>
             </a:r>
             <a:r>
-              <a:rPr sz="1050" b="0" i="0">
+              <a:rPr sz="1150" b="0" i="0">
                 <a:solidFill>
                   <a:srgbClr val="7C8B97"/>
                 </a:solidFill>
@@ -39070,7 +39070,7 @@
               </a:spcAft>
             </a:pPr>
             <a:r>
-              <a:rPr sz="1050" b="1" i="0">
+              <a:rPr sz="1150" b="1" i="0">
                 <a:solidFill>
                   <a:srgbClr val="C5D2DA"/>
                 </a:solidFill>
@@ -39081,7 +39081,7 @@
               <a:t>–  </a:t>
             </a:r>
             <a:r>
-              <a:rPr sz="1050" b="0" i="0">
+              <a:rPr sz="1150" b="0" i="0">
                 <a:solidFill>
                   <a:srgbClr val="7C8B97"/>
                 </a:solidFill>
@@ -39102,7 +39102,7 @@
               </a:spcAft>
             </a:pPr>
             <a:r>
-              <a:rPr sz="1050" b="1" i="0">
+              <a:rPr sz="1150" b="1" i="0">
                 <a:solidFill>
                   <a:srgbClr val="C5D2DA"/>
                 </a:solidFill>
@@ -39113,7 +39113,7 @@
               <a:t>–  </a:t>
             </a:r>
             <a:r>
-              <a:rPr sz="1050" b="0" i="0">
+              <a:rPr sz="1150" b="0" i="0">
                 <a:solidFill>
                   <a:srgbClr val="7C8B97"/>
                 </a:solidFill>
@@ -39341,7 +39341,7 @@
               </a:spcAft>
             </a:pPr>
             <a:r>
-              <a:rPr sz="950" b="0" i="0">
+              <a:rPr sz="1000" b="0" i="0">
                 <a:solidFill>
                   <a:srgbClr val="7C8B97"/>
                 </a:solidFill>
@@ -39385,7 +39385,7 @@
               </a:spcAft>
             </a:pPr>
             <a:r>
-              <a:rPr sz="950" b="0" i="0">
+              <a:rPr sz="1000" b="0" i="0">
                 <a:solidFill>
                   <a:srgbClr val="7C8B97"/>
                 </a:solidFill>
@@ -39569,7 +39569,7 @@
               </a:spcAft>
             </a:pPr>
             <a:r>
-              <a:rPr sz="1050" b="1" i="0">
+              <a:rPr sz="1150" b="1" i="0">
                 <a:solidFill>
                   <a:srgbClr val="C5D2DA"/>
                 </a:solidFill>
@@ -39580,7 +39580,7 @@
               <a:t>–  </a:t>
             </a:r>
             <a:r>
-              <a:rPr sz="1050" b="0" i="0">
+              <a:rPr sz="1150" b="0" i="0">
                 <a:solidFill>
                   <a:srgbClr val="7C8B97"/>
                 </a:solidFill>
@@ -39601,7 +39601,7 @@
               </a:spcAft>
             </a:pPr>
             <a:r>
-              <a:rPr sz="1050" b="1" i="0">
+              <a:rPr sz="1150" b="1" i="0">
                 <a:solidFill>
                   <a:srgbClr val="C5D2DA"/>
                 </a:solidFill>
@@ -39612,7 +39612,7 @@
               <a:t>–  </a:t>
             </a:r>
             <a:r>
-              <a:rPr sz="1050" b="0" i="0">
+              <a:rPr sz="1150" b="0" i="0">
                 <a:solidFill>
                   <a:srgbClr val="7C8B97"/>
                 </a:solidFill>
@@ -39633,7 +39633,7 @@
               </a:spcAft>
             </a:pPr>
             <a:r>
-              <a:rPr sz="1050" b="1" i="0">
+              <a:rPr sz="1150" b="1" i="0">
                 <a:solidFill>
                   <a:srgbClr val="C5D2DA"/>
                 </a:solidFill>
@@ -39644,7 +39644,7 @@
               <a:t>–  </a:t>
             </a:r>
             <a:r>
-              <a:rPr sz="1050" b="0" i="0">
+              <a:rPr sz="1150" b="0" i="0">
                 <a:solidFill>
                   <a:srgbClr val="7C8B97"/>
                 </a:solidFill>
@@ -39697,7 +39697,7 @@
               </a:spcAft>
             </a:pPr>
             <a:r>
-              <a:rPr sz="1050" b="1" i="0">
+              <a:rPr sz="1150" b="1" i="0">
                 <a:solidFill>
                   <a:srgbClr val="C5D2DA"/>
                 </a:solidFill>
@@ -39708,7 +39708,7 @@
               <a:t>–  </a:t>
             </a:r>
             <a:r>
-              <a:rPr sz="1050" b="0" i="0">
+              <a:rPr sz="1150" b="0" i="0">
                 <a:solidFill>
                   <a:srgbClr val="7C8B97"/>
                 </a:solidFill>
@@ -39729,7 +39729,7 @@
               </a:spcAft>
             </a:pPr>
             <a:r>
-              <a:rPr sz="1050" b="1" i="0">
+              <a:rPr sz="1150" b="1" i="0">
                 <a:solidFill>
                   <a:srgbClr val="C5D2DA"/>
                 </a:solidFill>
@@ -39740,7 +39740,7 @@
               <a:t>–  </a:t>
             </a:r>
             <a:r>
-              <a:rPr sz="1050" b="0" i="0">
+              <a:rPr sz="1150" b="0" i="0">
                 <a:solidFill>
                   <a:srgbClr val="7C8B97"/>
                 </a:solidFill>
@@ -39761,7 +39761,7 @@
               </a:spcAft>
             </a:pPr>
             <a:r>
-              <a:rPr sz="1050" b="1" i="0">
+              <a:rPr sz="1150" b="1" i="0">
                 <a:solidFill>
                   <a:srgbClr val="C5D2DA"/>
                 </a:solidFill>
@@ -39772,7 +39772,7 @@
               <a:t>–  </a:t>
             </a:r>
             <a:r>
-              <a:rPr sz="1050" b="0" i="0">
+              <a:rPr sz="1150" b="0" i="0">
                 <a:solidFill>
                   <a:srgbClr val="7C8B97"/>
                 </a:solidFill>
@@ -39825,7 +39825,7 @@
               </a:spcAft>
             </a:pPr>
             <a:r>
-              <a:rPr sz="1050" b="1" i="0">
+              <a:rPr sz="1150" b="1" i="0">
                 <a:solidFill>
                   <a:srgbClr val="C5D2DA"/>
                 </a:solidFill>
@@ -39836,7 +39836,7 @@
               <a:t>–  </a:t>
             </a:r>
             <a:r>
-              <a:rPr sz="1050" b="0" i="0">
+              <a:rPr sz="1150" b="0" i="0">
                 <a:solidFill>
                   <a:srgbClr val="7C8B97"/>
                 </a:solidFill>
@@ -40064,7 +40064,7 @@
               </a:spcAft>
             </a:pPr>
             <a:r>
-              <a:rPr sz="950" b="0" i="0">
+              <a:rPr sz="1000" b="0" i="0">
                 <a:solidFill>
                   <a:srgbClr val="7C8B97"/>
                 </a:solidFill>
@@ -40108,7 +40108,7 @@
               </a:spcAft>
             </a:pPr>
             <a:r>
-              <a:rPr sz="950" b="0" i="0">
+              <a:rPr sz="1000" b="0" i="0">
                 <a:solidFill>
                   <a:srgbClr val="7C8B97"/>
                 </a:solidFill>
@@ -40902,7 +40902,7 @@
               </a:spcAft>
             </a:pPr>
             <a:r>
-              <a:rPr sz="950" b="0" i="0">
+              <a:rPr sz="1000" b="0" i="0">
                 <a:solidFill>
                   <a:srgbClr val="7C8B97"/>
                 </a:solidFill>
@@ -41130,7 +41130,7 @@
               </a:spcAft>
             </a:pPr>
             <a:r>
-              <a:rPr sz="950" b="0" i="0">
+              <a:rPr sz="1000" b="0" i="0">
                 <a:solidFill>
                   <a:srgbClr val="7C8B97"/>
                 </a:solidFill>
@@ -41174,7 +41174,7 @@
               </a:spcAft>
             </a:pPr>
             <a:r>
-              <a:rPr sz="950" b="0" i="0">
+              <a:rPr sz="1000" b="0" i="0">
                 <a:solidFill>
                   <a:srgbClr val="7C8B97"/>
                 </a:solidFill>
@@ -41358,7 +41358,7 @@
               </a:spcAft>
             </a:pPr>
             <a:r>
-              <a:rPr sz="1050" b="1" i="0">
+              <a:rPr sz="1150" b="1" i="0">
                 <a:solidFill>
                   <a:srgbClr val="C5D2DA"/>
                 </a:solidFill>
@@ -41369,7 +41369,7 @@
               <a:t>–  </a:t>
             </a:r>
             <a:r>
-              <a:rPr sz="1050" b="0" i="0">
+              <a:rPr sz="1150" b="0" i="0">
                 <a:solidFill>
                   <a:srgbClr val="7C8B97"/>
                 </a:solidFill>
@@ -41390,7 +41390,7 @@
               </a:spcAft>
             </a:pPr>
             <a:r>
-              <a:rPr sz="1050" b="1" i="0">
+              <a:rPr sz="1150" b="1" i="0">
                 <a:solidFill>
                   <a:srgbClr val="C5D2DA"/>
                 </a:solidFill>
@@ -41401,7 +41401,7 @@
               <a:t>–  </a:t>
             </a:r>
             <a:r>
-              <a:rPr sz="1050" b="0" i="0">
+              <a:rPr sz="1150" b="0" i="0">
                 <a:solidFill>
                   <a:srgbClr val="7C8B97"/>
                 </a:solidFill>
@@ -41454,7 +41454,7 @@
               </a:spcAft>
             </a:pPr>
             <a:r>
-              <a:rPr sz="1050" b="1" i="0">
+              <a:rPr sz="1150" b="1" i="0">
                 <a:solidFill>
                   <a:srgbClr val="C5D2DA"/>
                 </a:solidFill>
@@ -41465,7 +41465,7 @@
               <a:t>–  </a:t>
             </a:r>
             <a:r>
-              <a:rPr sz="1050" b="0" i="0">
+              <a:rPr sz="1150" b="0" i="0">
                 <a:solidFill>
                   <a:srgbClr val="7C8B97"/>
                 </a:solidFill>
@@ -41486,7 +41486,7 @@
               </a:spcAft>
             </a:pPr>
             <a:r>
-              <a:rPr sz="1200" b="1" i="0">
+              <a:rPr sz="1250" b="1" i="0">
                 <a:solidFill>
                   <a:srgbClr val="C8922E"/>
                 </a:solidFill>
@@ -41497,7 +41497,7 @@
               <a:t>▪  </a:t>
             </a:r>
             <a:r>
-              <a:rPr sz="1200" b="0" i="0">
+              <a:rPr sz="1250" b="0" i="0">
                 <a:solidFill>
                   <a:srgbClr val="3D4D5A"/>
                 </a:solidFill>
@@ -41518,7 +41518,7 @@
               </a:spcAft>
             </a:pPr>
             <a:r>
-              <a:rPr sz="1050" b="1" i="0">
+              <a:rPr sz="1150" b="1" i="0">
                 <a:solidFill>
                   <a:srgbClr val="C5D2DA"/>
                 </a:solidFill>
@@ -41529,7 +41529,7 @@
               <a:t>–  </a:t>
             </a:r>
             <a:r>
-              <a:rPr sz="1050" b="0" i="0">
+              <a:rPr sz="1150" b="0" i="0">
                 <a:solidFill>
                   <a:srgbClr val="7C8B97"/>
                 </a:solidFill>
@@ -41582,7 +41582,7 @@
               </a:spcAft>
             </a:pPr>
             <a:r>
-              <a:rPr sz="1050" b="1" i="0">
+              <a:rPr sz="1150" b="1" i="0">
                 <a:solidFill>
                   <a:srgbClr val="C5D2DA"/>
                 </a:solidFill>
@@ -41593,7 +41593,7 @@
               <a:t>–  </a:t>
             </a:r>
             <a:r>
-              <a:rPr sz="1050" b="0" i="0">
+              <a:rPr sz="1150" b="0" i="0">
                 <a:solidFill>
                   <a:srgbClr val="7C8B97"/>
                 </a:solidFill>
@@ -41614,7 +41614,7 @@
               </a:spcAft>
             </a:pPr>
             <a:r>
-              <a:rPr sz="1050" b="1" i="0">
+              <a:rPr sz="1150" b="1" i="0">
                 <a:solidFill>
                   <a:srgbClr val="C5D2DA"/>
                 </a:solidFill>
@@ -41625,7 +41625,7 @@
               <a:t>–  </a:t>
             </a:r>
             <a:r>
-              <a:rPr sz="1050" b="0" i="0">
+              <a:rPr sz="1150" b="0" i="0">
                 <a:solidFill>
                   <a:srgbClr val="7C8B97"/>
                 </a:solidFill>
@@ -42214,7 +42214,7 @@
               </a:spcAft>
             </a:pPr>
             <a:r>
-              <a:rPr sz="950" b="0" i="0">
+              <a:rPr sz="1000" b="0" i="0">
                 <a:solidFill>
                   <a:srgbClr val="7C8B97"/>
                 </a:solidFill>
@@ -42442,7 +42442,7 @@
               </a:spcAft>
             </a:pPr>
             <a:r>
-              <a:rPr sz="950" b="0" i="0">
+              <a:rPr sz="1000" b="0" i="0">
                 <a:solidFill>
                   <a:srgbClr val="7C8B97"/>
                 </a:solidFill>
@@ -42486,7 +42486,7 @@
               </a:spcAft>
             </a:pPr>
             <a:r>
-              <a:rPr sz="950" b="0" i="0">
+              <a:rPr sz="1000" b="0" i="0">
                 <a:solidFill>
                   <a:srgbClr val="7C8B97"/>
                 </a:solidFill>
@@ -42670,7 +42670,7 @@
               </a:spcAft>
             </a:pPr>
             <a:r>
-              <a:rPr sz="1100" b="1" i="0">
+              <a:rPr sz="1150" b="1" i="0">
                 <a:solidFill>
                   <a:srgbClr val="C5D2DA"/>
                 </a:solidFill>
@@ -42681,7 +42681,7 @@
               <a:t>–  </a:t>
             </a:r>
             <a:r>
-              <a:rPr sz="1100" b="0" i="0">
+              <a:rPr sz="1150" b="0" i="0">
                 <a:solidFill>
                   <a:srgbClr val="7C8B97"/>
                 </a:solidFill>
@@ -42702,7 +42702,7 @@
               </a:spcAft>
             </a:pPr>
             <a:r>
-              <a:rPr sz="1100" b="1" i="0">
+              <a:rPr sz="1150" b="1" i="0">
                 <a:solidFill>
                   <a:srgbClr val="C5D2DA"/>
                 </a:solidFill>
@@ -42713,7 +42713,7 @@
               <a:t>–  </a:t>
             </a:r>
             <a:r>
-              <a:rPr sz="1100" b="0" i="0">
+              <a:rPr sz="1150" b="0" i="0">
                 <a:solidFill>
                   <a:srgbClr val="7C8B97"/>
                 </a:solidFill>
@@ -42734,7 +42734,7 @@
               </a:spcAft>
             </a:pPr>
             <a:r>
-              <a:rPr sz="1100" b="1" i="0">
+              <a:rPr sz="1150" b="1" i="0">
                 <a:solidFill>
                   <a:srgbClr val="C5D2DA"/>
                 </a:solidFill>
@@ -42745,7 +42745,7 @@
               <a:t>–  </a:t>
             </a:r>
             <a:r>
-              <a:rPr sz="1100" b="0" i="0">
+              <a:rPr sz="1150" b="0" i="0">
                 <a:solidFill>
                   <a:srgbClr val="7C8B97"/>
                 </a:solidFill>
@@ -42798,7 +42798,7 @@
               </a:spcAft>
             </a:pPr>
             <a:r>
-              <a:rPr sz="1100" b="1" i="0">
+              <a:rPr sz="1150" b="1" i="0">
                 <a:solidFill>
                   <a:srgbClr val="C5D2DA"/>
                 </a:solidFill>
@@ -42809,7 +42809,7 @@
               <a:t>–  </a:t>
             </a:r>
             <a:r>
-              <a:rPr sz="1100" b="0" i="0">
+              <a:rPr sz="1150" b="0" i="0">
                 <a:solidFill>
                   <a:srgbClr val="7C8B97"/>
                 </a:solidFill>
@@ -42830,7 +42830,7 @@
               </a:spcAft>
             </a:pPr>
             <a:r>
-              <a:rPr sz="1100" b="1" i="0">
+              <a:rPr sz="1150" b="1" i="0">
                 <a:solidFill>
                   <a:srgbClr val="C5D2DA"/>
                 </a:solidFill>
@@ -42841,7 +42841,7 @@
               <a:t>–  </a:t>
             </a:r>
             <a:r>
-              <a:rPr sz="1100" b="0" i="0">
+              <a:rPr sz="1150" b="0" i="0">
                 <a:solidFill>
                   <a:srgbClr val="7C8B97"/>
                 </a:solidFill>
@@ -42862,7 +42862,7 @@
               </a:spcAft>
             </a:pPr>
             <a:r>
-              <a:rPr sz="1100" b="1" i="0">
+              <a:rPr sz="1150" b="1" i="0">
                 <a:solidFill>
                   <a:srgbClr val="C5D2DA"/>
                 </a:solidFill>
@@ -42873,7 +42873,7 @@
               <a:t>–  </a:t>
             </a:r>
             <a:r>
-              <a:rPr sz="1100" b="0" i="0">
+              <a:rPr sz="1150" b="0" i="0">
                 <a:solidFill>
                   <a:srgbClr val="7C8B97"/>
                 </a:solidFill>
@@ -43133,7 +43133,7 @@
               </a:spcAft>
             </a:pPr>
             <a:r>
-              <a:rPr sz="950" b="0" i="0">
+              <a:rPr sz="1000" b="0" i="0">
                 <a:solidFill>
                   <a:srgbClr val="7C8B97"/>
                 </a:solidFill>
@@ -43177,7 +43177,7 @@
               </a:spcAft>
             </a:pPr>
             <a:r>
-              <a:rPr sz="950" b="0" i="0">
+              <a:rPr sz="1000" b="0" i="0">
                 <a:solidFill>
                   <a:srgbClr val="7C8B97"/>
                 </a:solidFill>
@@ -43329,7 +43329,7 @@
               </a:spcAft>
             </a:pPr>
             <a:r>
-              <a:rPr sz="1200" b="1" i="0">
+              <a:rPr sz="1250" b="1" i="0">
                 <a:solidFill>
                   <a:srgbClr val="C8922E"/>
                 </a:solidFill>
@@ -43340,7 +43340,7 @@
               <a:t>▪  </a:t>
             </a:r>
             <a:r>
-              <a:rPr sz="1200" b="0" i="0">
+              <a:rPr sz="1250" b="0" i="0">
                 <a:solidFill>
                   <a:srgbClr val="3D4D5A"/>
                 </a:solidFill>
@@ -43361,7 +43361,7 @@
               </a:spcAft>
             </a:pPr>
             <a:r>
-              <a:rPr sz="1200" b="1" i="0">
+              <a:rPr sz="1250" b="1" i="0">
                 <a:solidFill>
                   <a:srgbClr val="C8922E"/>
                 </a:solidFill>
@@ -43372,7 +43372,7 @@
               <a:t>▪  </a:t>
             </a:r>
             <a:r>
-              <a:rPr sz="1200" b="0" i="0">
+              <a:rPr sz="1250" b="0" i="0">
                 <a:solidFill>
                   <a:srgbClr val="3D4D5A"/>
                 </a:solidFill>
@@ -43393,7 +43393,7 @@
               </a:spcAft>
             </a:pPr>
             <a:r>
-              <a:rPr sz="1200" b="1" i="0">
+              <a:rPr sz="1250" b="1" i="0">
                 <a:solidFill>
                   <a:srgbClr val="C8922E"/>
                 </a:solidFill>
@@ -43404,7 +43404,7 @@
               <a:t>▪  </a:t>
             </a:r>
             <a:r>
-              <a:rPr sz="1200" b="0" i="0">
+              <a:rPr sz="1250" b="0" i="0">
                 <a:solidFill>
                   <a:srgbClr val="3D4D5A"/>
                 </a:solidFill>
@@ -43425,7 +43425,7 @@
               </a:spcAft>
             </a:pPr>
             <a:r>
-              <a:rPr sz="1200" b="1" i="0">
+              <a:rPr sz="1250" b="1" i="0">
                 <a:solidFill>
                   <a:srgbClr val="C8922E"/>
                 </a:solidFill>
@@ -43436,7 +43436,7 @@
               <a:t>▪  </a:t>
             </a:r>
             <a:r>
-              <a:rPr sz="1200" b="0" i="0">
+              <a:rPr sz="1250" b="0" i="0">
                 <a:solidFill>
                   <a:srgbClr val="3D4D5A"/>
                 </a:solidFill>
@@ -43489,7 +43489,7 @@
               </a:spcAft>
             </a:pPr>
             <a:r>
-              <a:rPr sz="1050" b="1" i="0">
+              <a:rPr sz="1150" b="1" i="0">
                 <a:solidFill>
                   <a:srgbClr val="C5D2DA"/>
                 </a:solidFill>
@@ -43500,7 +43500,7 @@
               <a:t>–  </a:t>
             </a:r>
             <a:r>
-              <a:rPr sz="1050" b="0" i="0">
+              <a:rPr sz="1150" b="0" i="0">
                 <a:solidFill>
                   <a:srgbClr val="7C8B97"/>
                 </a:solidFill>
@@ -43521,7 +43521,7 @@
               </a:spcAft>
             </a:pPr>
             <a:r>
-              <a:rPr sz="1050" b="1" i="0">
+              <a:rPr sz="1150" b="1" i="0">
                 <a:solidFill>
                   <a:srgbClr val="C5D2DA"/>
                 </a:solidFill>
@@ -43532,7 +43532,7 @@
               <a:t>–  </a:t>
             </a:r>
             <a:r>
-              <a:rPr sz="1050" b="0" i="0">
+              <a:rPr sz="1150" b="0" i="0">
                 <a:solidFill>
                   <a:srgbClr val="7C8B97"/>
                 </a:solidFill>
@@ -43553,7 +43553,7 @@
               </a:spcAft>
             </a:pPr>
             <a:r>
-              <a:rPr sz="1200" b="1" i="0">
+              <a:rPr sz="1250" b="1" i="0">
                 <a:solidFill>
                   <a:srgbClr val="C8922E"/>
                 </a:solidFill>
@@ -43564,7 +43564,7 @@
               <a:t>▪  </a:t>
             </a:r>
             <a:r>
-              <a:rPr sz="1200" b="0" i="0">
+              <a:rPr sz="1250" b="0" i="0">
                 <a:solidFill>
                   <a:srgbClr val="3D4D5A"/>
                 </a:solidFill>
@@ -43585,7 +43585,7 @@
               </a:spcAft>
             </a:pPr>
             <a:r>
-              <a:rPr sz="1200" b="1" i="0">
+              <a:rPr sz="1250" b="1" i="0">
                 <a:solidFill>
                   <a:srgbClr val="C8922E"/>
                 </a:solidFill>
@@ -43596,7 +43596,7 @@
               <a:t>▪  </a:t>
             </a:r>
             <a:r>
-              <a:rPr sz="1200" b="0" i="0">
+              <a:rPr sz="1250" b="0" i="0">
                 <a:solidFill>
                   <a:srgbClr val="3D4D5A"/>
                 </a:solidFill>
@@ -43824,7 +43824,7 @@
               </a:spcAft>
             </a:pPr>
             <a:r>
-              <a:rPr sz="950" b="0" i="0">
+              <a:rPr sz="1000" b="0" i="0">
                 <a:solidFill>
                   <a:srgbClr val="7C8B97"/>
                 </a:solidFill>
@@ -43868,7 +43868,7 @@
               </a:spcAft>
             </a:pPr>
             <a:r>
-              <a:rPr sz="950" b="0" i="0">
+              <a:rPr sz="1000" b="0" i="0">
                 <a:solidFill>
                   <a:srgbClr val="7C8B97"/>
                 </a:solidFill>
@@ -44419,7 +44419,7 @@
               </a:spcAft>
             </a:pPr>
             <a:r>
-              <a:rPr sz="950" b="0" i="0">
+              <a:rPr sz="1000" b="0" i="0">
                 <a:solidFill>
                   <a:srgbClr val="7C8B97"/>
                 </a:solidFill>
@@ -44463,7 +44463,7 @@
               </a:spcAft>
             </a:pPr>
             <a:r>
-              <a:rPr sz="950" b="0" i="0">
+              <a:rPr sz="1000" b="0" i="0">
                 <a:solidFill>
                   <a:srgbClr val="7C8B97"/>
                 </a:solidFill>
@@ -44615,7 +44615,7 @@
               </a:spcAft>
             </a:pPr>
             <a:r>
-              <a:rPr sz="1200" b="1" i="0">
+              <a:rPr sz="1250" b="1" i="0">
                 <a:solidFill>
                   <a:srgbClr val="C8922E"/>
                 </a:solidFill>
@@ -44626,7 +44626,7 @@
               <a:t>▪  </a:t>
             </a:r>
             <a:r>
-              <a:rPr sz="1200" b="0" i="0">
+              <a:rPr sz="1250" b="0" i="0">
                 <a:solidFill>
                   <a:srgbClr val="3D4D5A"/>
                 </a:solidFill>
@@ -44647,7 +44647,7 @@
               </a:spcAft>
             </a:pPr>
             <a:r>
-              <a:rPr sz="1200" b="1" i="0">
+              <a:rPr sz="1250" b="1" i="0">
                 <a:solidFill>
                   <a:srgbClr val="C8922E"/>
                 </a:solidFill>
@@ -44658,7 +44658,7 @@
               <a:t>▪  </a:t>
             </a:r>
             <a:r>
-              <a:rPr sz="1200" b="0" i="0">
+              <a:rPr sz="1250" b="0" i="0">
                 <a:solidFill>
                   <a:srgbClr val="3D4D5A"/>
                 </a:solidFill>
@@ -44679,7 +44679,7 @@
               </a:spcAft>
             </a:pPr>
             <a:r>
-              <a:rPr sz="1200" b="1" i="0">
+              <a:rPr sz="1250" b="1" i="0">
                 <a:solidFill>
                   <a:srgbClr val="C8922E"/>
                 </a:solidFill>
@@ -44690,7 +44690,7 @@
               <a:t>▪  </a:t>
             </a:r>
             <a:r>
-              <a:rPr sz="1200" b="0" i="0">
+              <a:rPr sz="1250" b="0" i="0">
                 <a:solidFill>
                   <a:srgbClr val="3D4D5A"/>
                 </a:solidFill>
@@ -44743,7 +44743,7 @@
               </a:spcAft>
             </a:pPr>
             <a:r>
-              <a:rPr sz="1050" b="1" i="0">
+              <a:rPr sz="1150" b="1" i="0">
                 <a:solidFill>
                   <a:srgbClr val="C5D2DA"/>
                 </a:solidFill>
@@ -44754,7 +44754,7 @@
               <a:t>–  </a:t>
             </a:r>
             <a:r>
-              <a:rPr sz="1050" b="0" i="0">
+              <a:rPr sz="1150" b="0" i="0">
                 <a:solidFill>
                   <a:srgbClr val="7C8B97"/>
                 </a:solidFill>
@@ -44775,7 +44775,7 @@
               </a:spcAft>
             </a:pPr>
             <a:r>
-              <a:rPr sz="1050" b="1" i="0">
+              <a:rPr sz="1150" b="1" i="0">
                 <a:solidFill>
                   <a:srgbClr val="C5D2DA"/>
                 </a:solidFill>
@@ -44786,7 +44786,7 @@
               <a:t>–  </a:t>
             </a:r>
             <a:r>
-              <a:rPr sz="1050" b="0" i="0">
+              <a:rPr sz="1150" b="0" i="0">
                 <a:solidFill>
                   <a:srgbClr val="7C8B97"/>
                 </a:solidFill>
@@ -44807,7 +44807,7 @@
               </a:spcAft>
             </a:pPr>
             <a:r>
-              <a:rPr sz="1050" b="1" i="0">
+              <a:rPr sz="1150" b="1" i="0">
                 <a:solidFill>
                   <a:srgbClr val="C5D2DA"/>
                 </a:solidFill>
@@ -44818,7 +44818,7 @@
               <a:t>–  </a:t>
             </a:r>
             <a:r>
-              <a:rPr sz="1050" b="0" i="0">
+              <a:rPr sz="1150" b="0" i="0">
                 <a:solidFill>
                   <a:srgbClr val="7C8B97"/>
                 </a:solidFill>
@@ -44839,7 +44839,7 @@
               </a:spcAft>
             </a:pPr>
             <a:r>
-              <a:rPr sz="1200" b="1" i="0">
+              <a:rPr sz="1250" b="1" i="0">
                 <a:solidFill>
                   <a:srgbClr val="C8922E"/>
                 </a:solidFill>
@@ -44850,7 +44850,7 @@
               <a:t>▪  </a:t>
             </a:r>
             <a:r>
-              <a:rPr sz="1200" b="0" i="0">
+              <a:rPr sz="1250" b="0" i="0">
                 <a:solidFill>
                   <a:srgbClr val="3D4D5A"/>
                 </a:solidFill>
@@ -45439,7 +45439,7 @@
               </a:spcAft>
             </a:pPr>
             <a:r>
-              <a:rPr sz="950" b="0" i="0">
+              <a:rPr sz="1000" b="0" i="0">
                 <a:solidFill>
                   <a:srgbClr val="7C8B97"/>
                 </a:solidFill>
@@ -45667,7 +45667,7 @@
               </a:spcAft>
             </a:pPr>
             <a:r>
-              <a:rPr sz="950" b="0" i="0">
+              <a:rPr sz="1000" b="0" i="0">
                 <a:solidFill>
                   <a:srgbClr val="7C8B97"/>
                 </a:solidFill>
@@ -45711,7 +45711,7 @@
               </a:spcAft>
             </a:pPr>
             <a:r>
-              <a:rPr sz="950" b="0" i="0">
+              <a:rPr sz="1000" b="0" i="0">
                 <a:solidFill>
                   <a:srgbClr val="7C8B97"/>
                 </a:solidFill>
@@ -47361,7 +47361,7 @@
               </a:spcAft>
             </a:pPr>
             <a:r>
-              <a:rPr sz="950" b="0" i="0">
+              <a:rPr sz="1000" b="0" i="0">
                 <a:solidFill>
                   <a:srgbClr val="7C8B97"/>
                 </a:solidFill>
@@ -47405,7 +47405,7 @@
               </a:spcAft>
             </a:pPr>
             <a:r>
-              <a:rPr sz="950" b="0" i="0">
+              <a:rPr sz="1000" b="0" i="0">
                 <a:solidFill>
                   <a:srgbClr val="7C8B97"/>
                 </a:solidFill>
@@ -47956,7 +47956,7 @@
               </a:spcAft>
             </a:pPr>
             <a:r>
-              <a:rPr sz="950" b="0" i="0">
+              <a:rPr sz="1000" b="0" i="0">
                 <a:solidFill>
                   <a:srgbClr val="7C8B97"/>
                 </a:solidFill>
@@ -48000,7 +48000,7 @@
               </a:spcAft>
             </a:pPr>
             <a:r>
-              <a:rPr sz="950" b="0" i="0">
+              <a:rPr sz="1000" b="0" i="0">
                 <a:solidFill>
                   <a:srgbClr val="7C8B97"/>
                 </a:solidFill>
@@ -49974,7 +49974,7 @@
               </a:spcAft>
             </a:pPr>
             <a:r>
-              <a:rPr sz="950" b="0" i="0">
+              <a:rPr sz="1000" b="0" i="0">
                 <a:solidFill>
                   <a:srgbClr val="7C8B97"/>
                 </a:solidFill>
@@ -50018,7 +50018,7 @@
               </a:spcAft>
             </a:pPr>
             <a:r>
-              <a:rPr sz="950" b="0" i="0">
+              <a:rPr sz="1000" b="0" i="0">
                 <a:solidFill>
                   <a:srgbClr val="7C8B97"/>
                 </a:solidFill>
@@ -51133,7 +51133,7 @@
               </a:spcAft>
             </a:pPr>
             <a:r>
-              <a:rPr sz="950" b="0" i="0">
+              <a:rPr sz="1000" b="0" i="0">
                 <a:solidFill>
                   <a:srgbClr val="7C8B97"/>
                 </a:solidFill>
@@ -51177,7 +51177,7 @@
               </a:spcAft>
             </a:pPr>
             <a:r>
-              <a:rPr sz="950" b="0" i="0">
+              <a:rPr sz="1000" b="0" i="0">
                 <a:solidFill>
                   <a:srgbClr val="7C8B97"/>
                 </a:solidFill>
@@ -51397,7 +51397,7 @@
         </p:nvSpPr>
         <p:spPr>
           <a:xfrm>
-            <a:off x="1143000" y="2706624"/>
+            <a:off x="1143000" y="2724912"/>
             <a:ext cx="2783738" cy="219456"/>
           </a:xfrm>
           <a:prstGeom prst="rect">
@@ -51420,7 +51420,7 @@
               </a:spcAft>
             </a:pPr>
             <a:r>
-              <a:rPr sz="1000" b="0" i="0">
+              <a:rPr sz="1100" b="0" i="0">
                 <a:solidFill>
                   <a:srgbClr val="7C8B97"/>
                 </a:solidFill>
@@ -51506,7 +51506,7 @@
         </p:nvSpPr>
         <p:spPr>
           <a:xfrm>
-            <a:off x="1143000" y="3163824"/>
+            <a:off x="1143000" y="3182112"/>
             <a:ext cx="2783738" cy="219456"/>
           </a:xfrm>
           <a:prstGeom prst="rect">
@@ -51529,7 +51529,7 @@
               </a:spcAft>
             </a:pPr>
             <a:r>
-              <a:rPr sz="1000" b="0" i="0">
+              <a:rPr sz="1100" b="0" i="0">
                 <a:solidFill>
                   <a:srgbClr val="7C8B97"/>
                 </a:solidFill>
@@ -51615,7 +51615,7 @@
         </p:nvSpPr>
         <p:spPr>
           <a:xfrm>
-            <a:off x="1143000" y="3621024"/>
+            <a:off x="1143000" y="3639312"/>
             <a:ext cx="2783738" cy="219456"/>
           </a:xfrm>
           <a:prstGeom prst="rect">
@@ -51638,7 +51638,7 @@
               </a:spcAft>
             </a:pPr>
             <a:r>
-              <a:rPr sz="1000" b="0" i="0">
+              <a:rPr sz="1100" b="0" i="0">
                 <a:solidFill>
                   <a:srgbClr val="7C8B97"/>
                 </a:solidFill>
@@ -51724,7 +51724,7 @@
         </p:nvSpPr>
         <p:spPr>
           <a:xfrm>
-            <a:off x="1143000" y="4078224"/>
+            <a:off x="1143000" y="4096512"/>
             <a:ext cx="2783738" cy="219456"/>
           </a:xfrm>
           <a:prstGeom prst="rect">
@@ -51747,7 +51747,7 @@
               </a:spcAft>
             </a:pPr>
             <a:r>
-              <a:rPr sz="1000" b="0" i="0">
+              <a:rPr sz="1100" b="0" i="0">
                 <a:solidFill>
                   <a:srgbClr val="7C8B97"/>
                 </a:solidFill>
@@ -51967,7 +51967,7 @@
         </p:nvSpPr>
         <p:spPr>
           <a:xfrm>
-            <a:off x="4886858" y="2706624"/>
+            <a:off x="4886858" y="2724912"/>
             <a:ext cx="2783738" cy="219456"/>
           </a:xfrm>
           <a:prstGeom prst="rect">
@@ -51990,7 +51990,7 @@
               </a:spcAft>
             </a:pPr>
             <a:r>
-              <a:rPr sz="1000" b="0" i="0">
+              <a:rPr sz="1100" b="0" i="0">
                 <a:solidFill>
                   <a:srgbClr val="7C8B97"/>
                 </a:solidFill>
@@ -52076,7 +52076,7 @@
         </p:nvSpPr>
         <p:spPr>
           <a:xfrm>
-            <a:off x="4886858" y="3163824"/>
+            <a:off x="4886858" y="3182112"/>
             <a:ext cx="2783738" cy="219456"/>
           </a:xfrm>
           <a:prstGeom prst="rect">
@@ -52099,7 +52099,7 @@
               </a:spcAft>
             </a:pPr>
             <a:r>
-              <a:rPr sz="1000" b="0" i="0">
+              <a:rPr sz="1100" b="0" i="0">
                 <a:solidFill>
                   <a:srgbClr val="7C8B97"/>
                 </a:solidFill>
@@ -52185,7 +52185,7 @@
         </p:nvSpPr>
         <p:spPr>
           <a:xfrm>
-            <a:off x="4886858" y="3621024"/>
+            <a:off x="4886858" y="3639312"/>
             <a:ext cx="2783738" cy="219456"/>
           </a:xfrm>
           <a:prstGeom prst="rect">
@@ -52208,7 +52208,7 @@
               </a:spcAft>
             </a:pPr>
             <a:r>
-              <a:rPr sz="1000" b="0" i="0">
+              <a:rPr sz="1100" b="0" i="0">
                 <a:solidFill>
                   <a:srgbClr val="7C8B97"/>
                 </a:solidFill>
@@ -52294,7 +52294,7 @@
         </p:nvSpPr>
         <p:spPr>
           <a:xfrm>
-            <a:off x="4886858" y="4078224"/>
+            <a:off x="4886858" y="4096512"/>
             <a:ext cx="2783738" cy="219456"/>
           </a:xfrm>
           <a:prstGeom prst="rect">
@@ -52317,7 +52317,7 @@
               </a:spcAft>
             </a:pPr>
             <a:r>
-              <a:rPr sz="1000" b="0" i="0">
+              <a:rPr sz="1100" b="0" i="0">
                 <a:solidFill>
                   <a:srgbClr val="7C8B97"/>
                 </a:solidFill>
@@ -52403,7 +52403,7 @@
         </p:nvSpPr>
         <p:spPr>
           <a:xfrm>
-            <a:off x="4886858" y="4535424"/>
+            <a:off x="4886858" y="4553712"/>
             <a:ext cx="2783738" cy="219456"/>
           </a:xfrm>
           <a:prstGeom prst="rect">
@@ -52426,7 +52426,7 @@
               </a:spcAft>
             </a:pPr>
             <a:r>
-              <a:rPr sz="1000" b="0" i="0">
+              <a:rPr sz="1100" b="0" i="0">
                 <a:solidFill>
                   <a:srgbClr val="7C8B97"/>
                 </a:solidFill>
@@ -52512,7 +52512,7 @@
         </p:nvSpPr>
         <p:spPr>
           <a:xfrm>
-            <a:off x="4886858" y="4992624"/>
+            <a:off x="4886858" y="5010912"/>
             <a:ext cx="2783738" cy="219456"/>
           </a:xfrm>
           <a:prstGeom prst="rect">
@@ -52535,7 +52535,7 @@
               </a:spcAft>
             </a:pPr>
             <a:r>
-              <a:rPr sz="1000" b="0" i="0">
+              <a:rPr sz="1100" b="0" i="0">
                 <a:solidFill>
                   <a:srgbClr val="7C8B97"/>
                 </a:solidFill>
@@ -52621,7 +52621,7 @@
         </p:nvSpPr>
         <p:spPr>
           <a:xfrm>
-            <a:off x="4886858" y="5449824"/>
+            <a:off x="4886858" y="5468112"/>
             <a:ext cx="2783738" cy="219456"/>
           </a:xfrm>
           <a:prstGeom prst="rect">
@@ -52644,7 +52644,7 @@
               </a:spcAft>
             </a:pPr>
             <a:r>
-              <a:rPr sz="1000" b="0" i="0">
+              <a:rPr sz="1100" b="0" i="0">
                 <a:solidFill>
                   <a:srgbClr val="7C8B97"/>
                 </a:solidFill>
@@ -52864,7 +52864,7 @@
         </p:nvSpPr>
         <p:spPr>
           <a:xfrm>
-            <a:off x="8630716" y="2706624"/>
+            <a:off x="8630716" y="2724912"/>
             <a:ext cx="2783738" cy="219456"/>
           </a:xfrm>
           <a:prstGeom prst="rect">
@@ -52887,7 +52887,7 @@
               </a:spcAft>
             </a:pPr>
             <a:r>
-              <a:rPr sz="1000" b="0" i="0">
+              <a:rPr sz="1100" b="0" i="0">
                 <a:solidFill>
                   <a:srgbClr val="7C8B97"/>
                 </a:solidFill>
@@ -52973,7 +52973,7 @@
         </p:nvSpPr>
         <p:spPr>
           <a:xfrm>
-            <a:off x="8630716" y="3163824"/>
+            <a:off x="8630716" y="3182112"/>
             <a:ext cx="2783738" cy="219456"/>
           </a:xfrm>
           <a:prstGeom prst="rect">
@@ -52996,7 +52996,7 @@
               </a:spcAft>
             </a:pPr>
             <a:r>
-              <a:rPr sz="1000" b="0" i="0">
+              <a:rPr sz="1100" b="0" i="0">
                 <a:solidFill>
                   <a:srgbClr val="7C8B97"/>
                 </a:solidFill>
@@ -53082,7 +53082,7 @@
         </p:nvSpPr>
         <p:spPr>
           <a:xfrm>
-            <a:off x="8630716" y="3621024"/>
+            <a:off x="8630716" y="3639312"/>
             <a:ext cx="2783738" cy="219456"/>
           </a:xfrm>
           <a:prstGeom prst="rect">
@@ -53105,7 +53105,7 @@
               </a:spcAft>
             </a:pPr>
             <a:r>
-              <a:rPr sz="1000" b="0" i="0">
+              <a:rPr sz="1100" b="0" i="0">
                 <a:solidFill>
                   <a:srgbClr val="7C8B97"/>
                 </a:solidFill>
@@ -53191,7 +53191,7 @@
         </p:nvSpPr>
         <p:spPr>
           <a:xfrm>
-            <a:off x="8630716" y="4078224"/>
+            <a:off x="8630716" y="4096512"/>
             <a:ext cx="2783738" cy="219456"/>
           </a:xfrm>
           <a:prstGeom prst="rect">
@@ -53214,7 +53214,7 @@
               </a:spcAft>
             </a:pPr>
             <a:r>
-              <a:rPr sz="1000" b="0" i="0">
+              <a:rPr sz="1100" b="0" i="0">
                 <a:solidFill>
                   <a:srgbClr val="7C8B97"/>
                 </a:solidFill>
@@ -54808,7 +54808,7 @@
               </a:spcAft>
             </a:pPr>
             <a:r>
-              <a:rPr sz="950" b="0" i="0">
+              <a:rPr sz="1000" b="0" i="0">
                 <a:solidFill>
                   <a:srgbClr val="7C8B97"/>
                 </a:solidFill>
@@ -54852,7 +54852,7 @@
               </a:spcAft>
             </a:pPr>
             <a:r>
-              <a:rPr sz="950" b="0" i="0">
+              <a:rPr sz="1000" b="0" i="0">
                 <a:solidFill>
                   <a:srgbClr val="7C8B97"/>
                 </a:solidFill>
@@ -55746,7 +55746,7 @@
               </a:spcAft>
             </a:pPr>
             <a:r>
-              <a:rPr sz="950" b="0" i="0">
+              <a:rPr sz="1000" b="0" i="0">
                 <a:solidFill>
                   <a:srgbClr val="7C8B97"/>
                 </a:solidFill>
@@ -55790,7 +55790,7 @@
               </a:spcAft>
             </a:pPr>
             <a:r>
-              <a:rPr sz="950" b="0" i="0">
+              <a:rPr sz="1000" b="0" i="0">
                 <a:solidFill>
                   <a:srgbClr val="7C8B97"/>
                 </a:solidFill>
@@ -57417,7 +57417,7 @@
               </a:spcAft>
             </a:pPr>
             <a:r>
-              <a:rPr sz="950" b="0" i="0">
+              <a:rPr sz="1000" b="0" i="0">
                 <a:solidFill>
                   <a:srgbClr val="7C8B97"/>
                 </a:solidFill>
@@ -57645,7 +57645,7 @@
               </a:spcAft>
             </a:pPr>
             <a:r>
-              <a:rPr sz="950" b="0" i="0">
+              <a:rPr sz="1000" b="0" i="0">
                 <a:solidFill>
                   <a:srgbClr val="7C8B97"/>
                 </a:solidFill>
@@ -57689,7 +57689,7 @@
               </a:spcAft>
             </a:pPr>
             <a:r>
-              <a:rPr sz="950" b="0" i="0">
+              <a:rPr sz="1000" b="0" i="0">
                 <a:solidFill>
                   <a:srgbClr val="7C8B97"/>
                 </a:solidFill>

--- a/docs/slides/巨量資料與雲端運算技術_海勤人力資源與作業安全決策系統_黃宇平_傅瀚鋌_曾紹喆_劉家样_李翊丞_林秉賢.pptx
+++ b/docs/slides/巨量資料與雲端運算技術_海勤人力資源與作業安全決策系統_黃宇平_傅瀚鋌_曾紹喆_劉家样_李翊丞_林秉賢.pptx
@@ -51332,8 +51332,8 @@
         </p:nvSpPr>
         <p:spPr>
           <a:xfrm>
-            <a:off x="841248" y="2487168"/>
-            <a:ext cx="3058058" cy="274320"/>
+            <a:off x="777240" y="2450592"/>
+            <a:ext cx="3149498" cy="475488"/>
           </a:xfrm>
           <a:prstGeom prst="rect">
             <a:avLst/>
@@ -51348,14 +51348,14 @@
           <a:p>
             <a:pPr algn="l">
               <a:lnSpc>
-                <a:spcPct val="112000"/>
-              </a:lnSpc>
-              <a:spcAft>
-                <a:spcPts val="500"/>
-              </a:spcAft>
-            </a:pPr>
-            <a:r>
-              <a:rPr sz="1200" b="1" i="0">
+                <a:spcPct val="105000"/>
+              </a:lnSpc>
+              <a:spcAft>
+                <a:spcPts val="100"/>
+              </a:spcAft>
+            </a:pPr>
+            <a:r>
+              <a:rPr sz="1250" b="1" i="0">
                 <a:solidFill>
                   <a:srgbClr val="1C3D5A"/>
                 </a:solidFill>
@@ -51363,18 +51363,8 @@
                 <a:ea typeface="Microsoft JhengHei"/>
                 <a:cs typeface="Microsoft JhengHei"/>
               </a:rPr>
-              <a:t>✓ </a:t>
-            </a:r>
-          </a:p>
-          <a:p>
-            <a:pPr algn="l">
-              <a:lnSpc>
-                <a:spcPct val="112000"/>
-              </a:lnSpc>
-              <a:spcAft>
-                <a:spcPts val="500"/>
-              </a:spcAft>
-            </a:pPr>
+              <a:t>✓  </a:t>
+            </a:r>
             <a:r>
               <a:rPr sz="1250" b="1" i="0">
                 <a:solidFill>
@@ -51387,6 +51377,27 @@
               <a:t>Python + Pandas</a:t>
             </a:r>
           </a:p>
+          <a:p>
+            <a:pPr algn="l">
+              <a:lnSpc>
+                <a:spcPct val="105000"/>
+              </a:lnSpc>
+              <a:spcAft>
+                <a:spcPts val="100"/>
+              </a:spcAft>
+            </a:pPr>
+            <a:r>
+              <a:rPr sz="1050" b="0" i="0">
+                <a:solidFill>
+                  <a:srgbClr val="7C8B97"/>
+                </a:solidFill>
+                <a:latin typeface="Microsoft JhengHei"/>
+                <a:ea typeface="Microsoft JhengHei"/>
+                <a:cs typeface="Microsoft JhengHei"/>
+              </a:rPr>
+              <a:t>清洗 / 統計 / 排班</a:t>
+            </a:r>
+          </a:p>
         </p:txBody>
       </p:sp>
       <p:sp>
@@ -51397,8 +51408,8 @@
         </p:nvSpPr>
         <p:spPr>
           <a:xfrm>
-            <a:off x="1143000" y="2724912"/>
-            <a:ext cx="2783738" cy="219456"/>
+            <a:off x="777240" y="2926080"/>
+            <a:ext cx="3149498" cy="475488"/>
           </a:xfrm>
           <a:prstGeom prst="rect">
             <a:avLst/>
@@ -51413,14 +51424,46 @@
           <a:p>
             <a:pPr algn="l">
               <a:lnSpc>
-                <a:spcPct val="112000"/>
-              </a:lnSpc>
-              <a:spcAft>
-                <a:spcPts val="500"/>
-              </a:spcAft>
-            </a:pPr>
-            <a:r>
-              <a:rPr sz="1100" b="0" i="0">
+                <a:spcPct val="105000"/>
+              </a:lnSpc>
+              <a:spcAft>
+                <a:spcPts val="100"/>
+              </a:spcAft>
+            </a:pPr>
+            <a:r>
+              <a:rPr sz="1250" b="1" i="0">
+                <a:solidFill>
+                  <a:srgbClr val="1C3D5A"/>
+                </a:solidFill>
+                <a:latin typeface="Microsoft JhengHei"/>
+                <a:ea typeface="Microsoft JhengHei"/>
+                <a:cs typeface="Microsoft JhengHei"/>
+              </a:rPr>
+              <a:t>✓  </a:t>
+            </a:r>
+            <a:r>
+              <a:rPr sz="1250" b="1" i="0">
+                <a:solidFill>
+                  <a:srgbClr val="1C3D5A"/>
+                </a:solidFill>
+                <a:latin typeface="Microsoft JhengHei"/>
+                <a:ea typeface="Microsoft JhengHei"/>
+                <a:cs typeface="Microsoft JhengHei"/>
+              </a:rPr>
+              <a:t>Matplotlib / Seaborn</a:t>
+            </a:r>
+          </a:p>
+          <a:p>
+            <a:pPr algn="l">
+              <a:lnSpc>
+                <a:spcPct val="105000"/>
+              </a:lnSpc>
+              <a:spcAft>
+                <a:spcPts val="100"/>
+              </a:spcAft>
+            </a:pPr>
+            <a:r>
+              <a:rPr sz="1050" b="0" i="0">
                 <a:solidFill>
                   <a:srgbClr val="7C8B97"/>
                 </a:solidFill>
@@ -51428,7 +51471,7 @@
                 <a:ea typeface="Microsoft JhengHei"/>
                 <a:cs typeface="Microsoft JhengHei"/>
               </a:rPr>
-              <a:t>清洗 / 統計 / 排班</a:t>
+              <a:t>25 張圖表</a:t>
             </a:r>
           </a:p>
         </p:txBody>
@@ -51441,8 +51484,8 @@
         </p:nvSpPr>
         <p:spPr>
           <a:xfrm>
-            <a:off x="841248" y="2944368"/>
-            <a:ext cx="3058058" cy="274320"/>
+            <a:off x="777240" y="3401568"/>
+            <a:ext cx="3149498" cy="475488"/>
           </a:xfrm>
           <a:prstGeom prst="rect">
             <a:avLst/>
@@ -51457,14 +51500,14 @@
           <a:p>
             <a:pPr algn="l">
               <a:lnSpc>
-                <a:spcPct val="112000"/>
-              </a:lnSpc>
-              <a:spcAft>
-                <a:spcPts val="500"/>
-              </a:spcAft>
-            </a:pPr>
-            <a:r>
-              <a:rPr sz="1200" b="1" i="0">
+                <a:spcPct val="105000"/>
+              </a:lnSpc>
+              <a:spcAft>
+                <a:spcPts val="100"/>
+              </a:spcAft>
+            </a:pPr>
+            <a:r>
+              <a:rPr sz="1250" b="1" i="0">
                 <a:solidFill>
                   <a:srgbClr val="1C3D5A"/>
                 </a:solidFill>
@@ -51472,18 +51515,8 @@
                 <a:ea typeface="Microsoft JhengHei"/>
                 <a:cs typeface="Microsoft JhengHei"/>
               </a:rPr>
-              <a:t>✓ </a:t>
-            </a:r>
-          </a:p>
-          <a:p>
-            <a:pPr algn="l">
-              <a:lnSpc>
-                <a:spcPct val="112000"/>
-              </a:lnSpc>
-              <a:spcAft>
-                <a:spcPts val="500"/>
-              </a:spcAft>
-            </a:pPr>
+              <a:t>✓  </a:t>
+            </a:r>
             <a:r>
               <a:rPr sz="1250" b="1" i="0">
                 <a:solidFill>
@@ -51493,7 +51526,28 @@
                 <a:ea typeface="Microsoft JhengHei"/>
                 <a:cs typeface="Microsoft JhengHei"/>
               </a:rPr>
-              <a:t>Matplotlib / Seaborn</a:t>
+              <a:t>Docker Compose</a:t>
+            </a:r>
+          </a:p>
+          <a:p>
+            <a:pPr algn="l">
+              <a:lnSpc>
+                <a:spcPct val="105000"/>
+              </a:lnSpc>
+              <a:spcAft>
+                <a:spcPts val="100"/>
+              </a:spcAft>
+            </a:pPr>
+            <a:r>
+              <a:rPr sz="1050" b="0" i="0">
+                <a:solidFill>
+                  <a:srgbClr val="7C8B97"/>
+                </a:solidFill>
+                <a:latin typeface="Microsoft JhengHei"/>
+                <a:ea typeface="Microsoft JhengHei"/>
+                <a:cs typeface="Microsoft JhengHei"/>
+              </a:rPr>
+              <a:t>三容器一鍵部署</a:t>
             </a:r>
           </a:p>
         </p:txBody>
@@ -51506,8 +51560,8 @@
         </p:nvSpPr>
         <p:spPr>
           <a:xfrm>
-            <a:off x="1143000" y="3182112"/>
-            <a:ext cx="2783738" cy="219456"/>
+            <a:off x="777240" y="3877056"/>
+            <a:ext cx="3149498" cy="475488"/>
           </a:xfrm>
           <a:prstGeom prst="rect">
             <a:avLst/>
@@ -51522,14 +51576,46 @@
           <a:p>
             <a:pPr algn="l">
               <a:lnSpc>
-                <a:spcPct val="112000"/>
-              </a:lnSpc>
-              <a:spcAft>
-                <a:spcPts val="500"/>
-              </a:spcAft>
-            </a:pPr>
-            <a:r>
-              <a:rPr sz="1100" b="0" i="0">
+                <a:spcPct val="105000"/>
+              </a:lnSpc>
+              <a:spcAft>
+                <a:spcPts val="100"/>
+              </a:spcAft>
+            </a:pPr>
+            <a:r>
+              <a:rPr sz="1250" b="1" i="0">
+                <a:solidFill>
+                  <a:srgbClr val="1C3D5A"/>
+                </a:solidFill>
+                <a:latin typeface="Microsoft JhengHei"/>
+                <a:ea typeface="Microsoft JhengHei"/>
+                <a:cs typeface="Microsoft JhengHei"/>
+              </a:rPr>
+              <a:t>✓  </a:t>
+            </a:r>
+            <a:r>
+              <a:rPr sz="1250" b="1" i="0">
+                <a:solidFill>
+                  <a:srgbClr val="1C3D5A"/>
+                </a:solidFill>
+                <a:latin typeface="Microsoft JhengHei"/>
+                <a:ea typeface="Microsoft JhengHei"/>
+                <a:cs typeface="Microsoft JhengHei"/>
+              </a:rPr>
+              <a:t>Git / GitHub</a:t>
+            </a:r>
+          </a:p>
+          <a:p>
+            <a:pPr algn="l">
+              <a:lnSpc>
+                <a:spcPct val="105000"/>
+              </a:lnSpc>
+              <a:spcAft>
+                <a:spcPts val="100"/>
+              </a:spcAft>
+            </a:pPr>
+            <a:r>
+              <a:rPr sz="1050" b="0" i="0">
                 <a:solidFill>
                   <a:srgbClr val="7C8B97"/>
                 </a:solidFill>
@@ -51537,224 +51623,6 @@
                 <a:ea typeface="Microsoft JhengHei"/>
                 <a:cs typeface="Microsoft JhengHei"/>
               </a:rPr>
-              <a:t>25 張圖表</a:t>
-            </a:r>
-          </a:p>
-        </p:txBody>
-      </p:sp>
-      <p:sp>
-        <p:nvSpPr>
-          <p:cNvPr id="15" name="TextBox 14"/>
-          <p:cNvSpPr txBox="1"/>
-          <p:nvPr/>
-        </p:nvSpPr>
-        <p:spPr>
-          <a:xfrm>
-            <a:off x="841248" y="3401568"/>
-            <a:ext cx="3058058" cy="274320"/>
-          </a:xfrm>
-          <a:prstGeom prst="rect">
-            <a:avLst/>
-          </a:prstGeom>
-          <a:noFill/>
-        </p:spPr>
-        <p:txBody>
-          <a:bodyPr wrap="square" anchor="t" lIns="0" rIns="0" tIns="0" bIns="0">
-            <a:spAutoFit/>
-          </a:bodyPr>
-          <a:lstStyle/>
-          <a:p>
-            <a:pPr algn="l">
-              <a:lnSpc>
-                <a:spcPct val="112000"/>
-              </a:lnSpc>
-              <a:spcAft>
-                <a:spcPts val="500"/>
-              </a:spcAft>
-            </a:pPr>
-            <a:r>
-              <a:rPr sz="1200" b="1" i="0">
-                <a:solidFill>
-                  <a:srgbClr val="1C3D5A"/>
-                </a:solidFill>
-                <a:latin typeface="Microsoft JhengHei"/>
-                <a:ea typeface="Microsoft JhengHei"/>
-                <a:cs typeface="Microsoft JhengHei"/>
-              </a:rPr>
-              <a:t>✓ </a:t>
-            </a:r>
-          </a:p>
-          <a:p>
-            <a:pPr algn="l">
-              <a:lnSpc>
-                <a:spcPct val="112000"/>
-              </a:lnSpc>
-              <a:spcAft>
-                <a:spcPts val="500"/>
-              </a:spcAft>
-            </a:pPr>
-            <a:r>
-              <a:rPr sz="1250" b="1" i="0">
-                <a:solidFill>
-                  <a:srgbClr val="1C3D5A"/>
-                </a:solidFill>
-                <a:latin typeface="Microsoft JhengHei"/>
-                <a:ea typeface="Microsoft JhengHei"/>
-                <a:cs typeface="Microsoft JhengHei"/>
-              </a:rPr>
-              <a:t>Docker Compose</a:t>
-            </a:r>
-          </a:p>
-        </p:txBody>
-      </p:sp>
-      <p:sp>
-        <p:nvSpPr>
-          <p:cNvPr id="16" name="TextBox 15"/>
-          <p:cNvSpPr txBox="1"/>
-          <p:nvPr/>
-        </p:nvSpPr>
-        <p:spPr>
-          <a:xfrm>
-            <a:off x="1143000" y="3639312"/>
-            <a:ext cx="2783738" cy="219456"/>
-          </a:xfrm>
-          <a:prstGeom prst="rect">
-            <a:avLst/>
-          </a:prstGeom>
-          <a:noFill/>
-        </p:spPr>
-        <p:txBody>
-          <a:bodyPr wrap="square" anchor="t" lIns="0" rIns="0" tIns="0" bIns="0">
-            <a:spAutoFit/>
-          </a:bodyPr>
-          <a:lstStyle/>
-          <a:p>
-            <a:pPr algn="l">
-              <a:lnSpc>
-                <a:spcPct val="112000"/>
-              </a:lnSpc>
-              <a:spcAft>
-                <a:spcPts val="500"/>
-              </a:spcAft>
-            </a:pPr>
-            <a:r>
-              <a:rPr sz="1100" b="0" i="0">
-                <a:solidFill>
-                  <a:srgbClr val="7C8B97"/>
-                </a:solidFill>
-                <a:latin typeface="Microsoft JhengHei"/>
-                <a:ea typeface="Microsoft JhengHei"/>
-                <a:cs typeface="Microsoft JhengHei"/>
-              </a:rPr>
-              <a:t>三容器一鍵部署</a:t>
-            </a:r>
-          </a:p>
-        </p:txBody>
-      </p:sp>
-      <p:sp>
-        <p:nvSpPr>
-          <p:cNvPr id="17" name="TextBox 16"/>
-          <p:cNvSpPr txBox="1"/>
-          <p:nvPr/>
-        </p:nvSpPr>
-        <p:spPr>
-          <a:xfrm>
-            <a:off x="841248" y="3858768"/>
-            <a:ext cx="3058058" cy="274320"/>
-          </a:xfrm>
-          <a:prstGeom prst="rect">
-            <a:avLst/>
-          </a:prstGeom>
-          <a:noFill/>
-        </p:spPr>
-        <p:txBody>
-          <a:bodyPr wrap="square" anchor="t" lIns="0" rIns="0" tIns="0" bIns="0">
-            <a:spAutoFit/>
-          </a:bodyPr>
-          <a:lstStyle/>
-          <a:p>
-            <a:pPr algn="l">
-              <a:lnSpc>
-                <a:spcPct val="112000"/>
-              </a:lnSpc>
-              <a:spcAft>
-                <a:spcPts val="500"/>
-              </a:spcAft>
-            </a:pPr>
-            <a:r>
-              <a:rPr sz="1200" b="1" i="0">
-                <a:solidFill>
-                  <a:srgbClr val="1C3D5A"/>
-                </a:solidFill>
-                <a:latin typeface="Microsoft JhengHei"/>
-                <a:ea typeface="Microsoft JhengHei"/>
-                <a:cs typeface="Microsoft JhengHei"/>
-              </a:rPr>
-              <a:t>✓ </a:t>
-            </a:r>
-          </a:p>
-          <a:p>
-            <a:pPr algn="l">
-              <a:lnSpc>
-                <a:spcPct val="112000"/>
-              </a:lnSpc>
-              <a:spcAft>
-                <a:spcPts val="500"/>
-              </a:spcAft>
-            </a:pPr>
-            <a:r>
-              <a:rPr sz="1250" b="1" i="0">
-                <a:solidFill>
-                  <a:srgbClr val="1C3D5A"/>
-                </a:solidFill>
-                <a:latin typeface="Microsoft JhengHei"/>
-                <a:ea typeface="Microsoft JhengHei"/>
-                <a:cs typeface="Microsoft JhengHei"/>
-              </a:rPr>
-              <a:t>Git / GitHub</a:t>
-            </a:r>
-          </a:p>
-        </p:txBody>
-      </p:sp>
-      <p:sp>
-        <p:nvSpPr>
-          <p:cNvPr id="18" name="TextBox 17"/>
-          <p:cNvSpPr txBox="1"/>
-          <p:nvPr/>
-        </p:nvSpPr>
-        <p:spPr>
-          <a:xfrm>
-            <a:off x="1143000" y="4096512"/>
-            <a:ext cx="2783738" cy="219456"/>
-          </a:xfrm>
-          <a:prstGeom prst="rect">
-            <a:avLst/>
-          </a:prstGeom>
-          <a:noFill/>
-        </p:spPr>
-        <p:txBody>
-          <a:bodyPr wrap="square" anchor="t" lIns="0" rIns="0" tIns="0" bIns="0">
-            <a:spAutoFit/>
-          </a:bodyPr>
-          <a:lstStyle/>
-          <a:p>
-            <a:pPr algn="l">
-              <a:lnSpc>
-                <a:spcPct val="112000"/>
-              </a:lnSpc>
-              <a:spcAft>
-                <a:spcPts val="500"/>
-              </a:spcAft>
-            </a:pPr>
-            <a:r>
-              <a:rPr sz="1100" b="0" i="0">
-                <a:solidFill>
-                  <a:srgbClr val="7C8B97"/>
-                </a:solidFill>
-                <a:latin typeface="Microsoft JhengHei"/>
-                <a:ea typeface="Microsoft JhengHei"/>
-                <a:cs typeface="Microsoft JhengHei"/>
-              </a:rPr>
               <a:t>CI 45 tests</a:t>
             </a:r>
           </a:p>
@@ -51762,7 +51630,7 @@
       </p:sp>
       <p:sp>
         <p:nvSpPr>
-          <p:cNvPr id="19" name="Rounded Rectangle 18"/>
+          <p:cNvPr id="15" name="Rounded Rectangle 14"/>
           <p:cNvSpPr/>
           <p:nvPr/>
         </p:nvSpPr>
@@ -51809,7 +51677,7 @@
       </p:sp>
       <p:sp>
         <p:nvSpPr>
-          <p:cNvPr id="20" name="Rectangle 19"/>
+          <p:cNvPr id="16" name="Rectangle 15"/>
           <p:cNvSpPr/>
           <p:nvPr/>
         </p:nvSpPr>
@@ -51852,7 +51720,7 @@
       </p:sp>
       <p:sp>
         <p:nvSpPr>
-          <p:cNvPr id="21" name="TextBox 20"/>
+          <p:cNvPr id="17" name="TextBox 16"/>
           <p:cNvSpPr txBox="1"/>
           <p:nvPr/>
         </p:nvSpPr>
@@ -51896,14 +51764,318 @@
       </p:sp>
       <p:sp>
         <p:nvSpPr>
+          <p:cNvPr id="18" name="TextBox 17"/>
+          <p:cNvSpPr txBox="1"/>
+          <p:nvPr/>
+        </p:nvSpPr>
+        <p:spPr>
+          <a:xfrm>
+            <a:off x="4521098" y="2450592"/>
+            <a:ext cx="3149498" cy="475488"/>
+          </a:xfrm>
+          <a:prstGeom prst="rect">
+            <a:avLst/>
+          </a:prstGeom>
+          <a:noFill/>
+        </p:spPr>
+        <p:txBody>
+          <a:bodyPr wrap="square" anchor="t" lIns="0" rIns="0" tIns="0" bIns="0">
+            <a:spAutoFit/>
+          </a:bodyPr>
+          <a:lstStyle/>
+          <a:p>
+            <a:pPr algn="l">
+              <a:lnSpc>
+                <a:spcPct val="105000"/>
+              </a:lnSpc>
+              <a:spcAft>
+                <a:spcPts val="100"/>
+              </a:spcAft>
+            </a:pPr>
+            <a:r>
+              <a:rPr sz="1250" b="1" i="0">
+                <a:solidFill>
+                  <a:srgbClr val="34506A"/>
+                </a:solidFill>
+                <a:latin typeface="Microsoft JhengHei"/>
+                <a:ea typeface="Microsoft JhengHei"/>
+                <a:cs typeface="Microsoft JhengHei"/>
+              </a:rPr>
+              <a:t>✓  </a:t>
+            </a:r>
+            <a:r>
+              <a:rPr sz="1250" b="1" i="0">
+                <a:solidFill>
+                  <a:srgbClr val="1C3D5A"/>
+                </a:solidFill>
+                <a:latin typeface="Microsoft JhengHei"/>
+                <a:ea typeface="Microsoft JhengHei"/>
+                <a:cs typeface="Microsoft JhengHei"/>
+              </a:rPr>
+              <a:t>MySQL 8.0</a:t>
+            </a:r>
+          </a:p>
+          <a:p>
+            <a:pPr algn="l">
+              <a:lnSpc>
+                <a:spcPct val="105000"/>
+              </a:lnSpc>
+              <a:spcAft>
+                <a:spcPts val="100"/>
+              </a:spcAft>
+            </a:pPr>
+            <a:r>
+              <a:rPr sz="1050" b="0" i="0">
+                <a:solidFill>
+                  <a:srgbClr val="7C8B97"/>
+                </a:solidFill>
+                <a:latin typeface="Microsoft JhengHei"/>
+                <a:ea typeface="Microsoft JhengHei"/>
+                <a:cs typeface="Microsoft JhengHei"/>
+              </a:rPr>
+              <a:t>四張資料表</a:t>
+            </a:r>
+          </a:p>
+        </p:txBody>
+      </p:sp>
+      <p:sp>
+        <p:nvSpPr>
+          <p:cNvPr id="19" name="TextBox 18"/>
+          <p:cNvSpPr txBox="1"/>
+          <p:nvPr/>
+        </p:nvSpPr>
+        <p:spPr>
+          <a:xfrm>
+            <a:off x="4521098" y="2926080"/>
+            <a:ext cx="3149498" cy="475488"/>
+          </a:xfrm>
+          <a:prstGeom prst="rect">
+            <a:avLst/>
+          </a:prstGeom>
+          <a:noFill/>
+        </p:spPr>
+        <p:txBody>
+          <a:bodyPr wrap="square" anchor="t" lIns="0" rIns="0" tIns="0" bIns="0">
+            <a:spAutoFit/>
+          </a:bodyPr>
+          <a:lstStyle/>
+          <a:p>
+            <a:pPr algn="l">
+              <a:lnSpc>
+                <a:spcPct val="105000"/>
+              </a:lnSpc>
+              <a:spcAft>
+                <a:spcPts val="100"/>
+              </a:spcAft>
+            </a:pPr>
+            <a:r>
+              <a:rPr sz="1250" b="1" i="0">
+                <a:solidFill>
+                  <a:srgbClr val="34506A"/>
+                </a:solidFill>
+                <a:latin typeface="Microsoft JhengHei"/>
+                <a:ea typeface="Microsoft JhengHei"/>
+                <a:cs typeface="Microsoft JhengHei"/>
+              </a:rPr>
+              <a:t>✓  </a:t>
+            </a:r>
+            <a:r>
+              <a:rPr sz="1250" b="1" i="0">
+                <a:solidFill>
+                  <a:srgbClr val="1C3D5A"/>
+                </a:solidFill>
+                <a:latin typeface="Microsoft JhengHei"/>
+                <a:ea typeface="Microsoft JhengHei"/>
+                <a:cs typeface="Microsoft JhengHei"/>
+              </a:rPr>
+              <a:t>Apache + PHP</a:t>
+            </a:r>
+          </a:p>
+          <a:p>
+            <a:pPr algn="l">
+              <a:lnSpc>
+                <a:spcPct val="105000"/>
+              </a:lnSpc>
+              <a:spcAft>
+                <a:spcPts val="100"/>
+              </a:spcAft>
+            </a:pPr>
+            <a:r>
+              <a:rPr sz="1050" b="0" i="0">
+                <a:solidFill>
+                  <a:srgbClr val="7C8B97"/>
+                </a:solidFill>
+                <a:latin typeface="Microsoft JhengHei"/>
+                <a:ea typeface="Microsoft JhengHei"/>
+                <a:cs typeface="Microsoft JhengHei"/>
+              </a:rPr>
+              <a:t>完整業務系統</a:t>
+            </a:r>
+          </a:p>
+        </p:txBody>
+      </p:sp>
+      <p:sp>
+        <p:nvSpPr>
+          <p:cNvPr id="20" name="TextBox 19"/>
+          <p:cNvSpPr txBox="1"/>
+          <p:nvPr/>
+        </p:nvSpPr>
+        <p:spPr>
+          <a:xfrm>
+            <a:off x="4521098" y="3401568"/>
+            <a:ext cx="3149498" cy="475488"/>
+          </a:xfrm>
+          <a:prstGeom prst="rect">
+            <a:avLst/>
+          </a:prstGeom>
+          <a:noFill/>
+        </p:spPr>
+        <p:txBody>
+          <a:bodyPr wrap="square" anchor="t" lIns="0" rIns="0" tIns="0" bIns="0">
+            <a:spAutoFit/>
+          </a:bodyPr>
+          <a:lstStyle/>
+          <a:p>
+            <a:pPr algn="l">
+              <a:lnSpc>
+                <a:spcPct val="105000"/>
+              </a:lnSpc>
+              <a:spcAft>
+                <a:spcPts val="100"/>
+              </a:spcAft>
+            </a:pPr>
+            <a:r>
+              <a:rPr sz="1250" b="1" i="0">
+                <a:solidFill>
+                  <a:srgbClr val="34506A"/>
+                </a:solidFill>
+                <a:latin typeface="Microsoft JhengHei"/>
+                <a:ea typeface="Microsoft JhengHei"/>
+                <a:cs typeface="Microsoft JhengHei"/>
+              </a:rPr>
+              <a:t>✓  </a:t>
+            </a:r>
+            <a:r>
+              <a:rPr sz="1250" b="1" i="0">
+                <a:solidFill>
+                  <a:srgbClr val="1C3D5A"/>
+                </a:solidFill>
+                <a:latin typeface="Microsoft JhengHei"/>
+                <a:ea typeface="Microsoft JhengHei"/>
+                <a:cs typeface="Microsoft JhengHei"/>
+              </a:rPr>
+              <a:t>scikit-learn</a:t>
+            </a:r>
+          </a:p>
+          <a:p>
+            <a:pPr algn="l">
+              <a:lnSpc>
+                <a:spcPct val="105000"/>
+              </a:lnSpc>
+              <a:spcAft>
+                <a:spcPts val="100"/>
+              </a:spcAft>
+            </a:pPr>
+            <a:r>
+              <a:rPr sz="1050" b="0" i="0">
+                <a:solidFill>
+                  <a:srgbClr val="7C8B97"/>
+                </a:solidFill>
+                <a:latin typeface="Microsoft JhengHei"/>
+                <a:ea typeface="Microsoft JhengHei"/>
+                <a:cs typeface="Microsoft JhengHei"/>
+              </a:rPr>
+              <a:t>RF + IsoForest + GridSearch</a:t>
+            </a:r>
+          </a:p>
+        </p:txBody>
+      </p:sp>
+      <p:sp>
+        <p:nvSpPr>
+          <p:cNvPr id="21" name="TextBox 20"/>
+          <p:cNvSpPr txBox="1"/>
+          <p:nvPr/>
+        </p:nvSpPr>
+        <p:spPr>
+          <a:xfrm>
+            <a:off x="4521098" y="3877056"/>
+            <a:ext cx="3149498" cy="475488"/>
+          </a:xfrm>
+          <a:prstGeom prst="rect">
+            <a:avLst/>
+          </a:prstGeom>
+          <a:noFill/>
+        </p:spPr>
+        <p:txBody>
+          <a:bodyPr wrap="square" anchor="t" lIns="0" rIns="0" tIns="0" bIns="0">
+            <a:spAutoFit/>
+          </a:bodyPr>
+          <a:lstStyle/>
+          <a:p>
+            <a:pPr algn="l">
+              <a:lnSpc>
+                <a:spcPct val="105000"/>
+              </a:lnSpc>
+              <a:spcAft>
+                <a:spcPts val="100"/>
+              </a:spcAft>
+            </a:pPr>
+            <a:r>
+              <a:rPr sz="1250" b="1" i="0">
+                <a:solidFill>
+                  <a:srgbClr val="34506A"/>
+                </a:solidFill>
+                <a:latin typeface="Microsoft JhengHei"/>
+                <a:ea typeface="Microsoft JhengHei"/>
+                <a:cs typeface="Microsoft JhengHei"/>
+              </a:rPr>
+              <a:t>✓  </a:t>
+            </a:r>
+            <a:r>
+              <a:rPr sz="1250" b="1" i="0">
+                <a:solidFill>
+                  <a:srgbClr val="1C3D5A"/>
+                </a:solidFill>
+                <a:latin typeface="Microsoft JhengHei"/>
+                <a:ea typeface="Microsoft JhengHei"/>
+                <a:cs typeface="Microsoft JhengHei"/>
+              </a:rPr>
+              <a:t>Folium</a:t>
+            </a:r>
+          </a:p>
+          <a:p>
+            <a:pPr algn="l">
+              <a:lnSpc>
+                <a:spcPct val="105000"/>
+              </a:lnSpc>
+              <a:spcAft>
+                <a:spcPts val="100"/>
+              </a:spcAft>
+            </a:pPr>
+            <a:r>
+              <a:rPr sz="1050" b="0" i="0">
+                <a:solidFill>
+                  <a:srgbClr val="7C8B97"/>
+                </a:solidFill>
+                <a:latin typeface="Microsoft JhengHei"/>
+                <a:ea typeface="Microsoft JhengHei"/>
+                <a:cs typeface="Microsoft JhengHei"/>
+              </a:rPr>
+              <a:t>互動海域地圖</a:t>
+            </a:r>
+          </a:p>
+        </p:txBody>
+      </p:sp>
+      <p:sp>
+        <p:nvSpPr>
           <p:cNvPr id="22" name="TextBox 21"/>
           <p:cNvSpPr txBox="1"/>
           <p:nvPr/>
         </p:nvSpPr>
         <p:spPr>
           <a:xfrm>
-            <a:off x="4585106" y="2487168"/>
-            <a:ext cx="3058058" cy="274320"/>
+            <a:off x="4521098" y="4352544"/>
+            <a:ext cx="3149498" cy="475488"/>
           </a:xfrm>
           <a:prstGeom prst="rect">
             <a:avLst/>
@@ -51918,14 +52090,14 @@
           <a:p>
             <a:pPr algn="l">
               <a:lnSpc>
-                <a:spcPct val="112000"/>
-              </a:lnSpc>
-              <a:spcAft>
-                <a:spcPts val="500"/>
-              </a:spcAft>
-            </a:pPr>
-            <a:r>
-              <a:rPr sz="1200" b="1" i="0">
+                <a:spcPct val="105000"/>
+              </a:lnSpc>
+              <a:spcAft>
+                <a:spcPts val="100"/>
+              </a:spcAft>
+            </a:pPr>
+            <a:r>
+              <a:rPr sz="1250" b="1" i="0">
                 <a:solidFill>
                   <a:srgbClr val="34506A"/>
                 </a:solidFill>
@@ -51933,18 +52105,8 @@
                 <a:ea typeface="Microsoft JhengHei"/>
                 <a:cs typeface="Microsoft JhengHei"/>
               </a:rPr>
-              <a:t>✓ </a:t>
-            </a:r>
-          </a:p>
-          <a:p>
-            <a:pPr algn="l">
-              <a:lnSpc>
-                <a:spcPct val="112000"/>
-              </a:lnSpc>
-              <a:spcAft>
-                <a:spcPts val="500"/>
-              </a:spcAft>
-            </a:pPr>
+              <a:t>✓  </a:t>
+            </a:r>
             <a:r>
               <a:rPr sz="1250" b="1" i="0">
                 <a:solidFill>
@@ -51954,7 +52116,28 @@
                 <a:ea typeface="Microsoft JhengHei"/>
                 <a:cs typeface="Microsoft JhengHei"/>
               </a:rPr>
-              <a:t>MySQL 8.0</a:t>
+              <a:t>Gradio</a:t>
+            </a:r>
+          </a:p>
+          <a:p>
+            <a:pPr algn="l">
+              <a:lnSpc>
+                <a:spcPct val="105000"/>
+              </a:lnSpc>
+              <a:spcAft>
+                <a:spcPts val="100"/>
+              </a:spcAft>
+            </a:pPr>
+            <a:r>
+              <a:rPr sz="1050" b="0" i="0">
+                <a:solidFill>
+                  <a:srgbClr val="7C8B97"/>
+                </a:solidFill>
+                <a:latin typeface="Microsoft JhengHei"/>
+                <a:ea typeface="Microsoft JhengHei"/>
+                <a:cs typeface="Microsoft JhengHei"/>
+              </a:rPr>
+              <a:t>互動分析</a:t>
             </a:r>
           </a:p>
         </p:txBody>
@@ -51967,8 +52150,8 @@
         </p:nvSpPr>
         <p:spPr>
           <a:xfrm>
-            <a:off x="4886858" y="2724912"/>
-            <a:ext cx="2783738" cy="219456"/>
+            <a:off x="4521098" y="4828032"/>
+            <a:ext cx="3149498" cy="475488"/>
           </a:xfrm>
           <a:prstGeom prst="rect">
             <a:avLst/>
@@ -51983,14 +52166,46 @@
           <a:p>
             <a:pPr algn="l">
               <a:lnSpc>
-                <a:spcPct val="112000"/>
-              </a:lnSpc>
-              <a:spcAft>
-                <a:spcPts val="500"/>
-              </a:spcAft>
-            </a:pPr>
-            <a:r>
-              <a:rPr sz="1100" b="0" i="0">
+                <a:spcPct val="105000"/>
+              </a:lnSpc>
+              <a:spcAft>
+                <a:spcPts val="100"/>
+              </a:spcAft>
+            </a:pPr>
+            <a:r>
+              <a:rPr sz="1250" b="1" i="0">
+                <a:solidFill>
+                  <a:srgbClr val="34506A"/>
+                </a:solidFill>
+                <a:latin typeface="Microsoft JhengHei"/>
+                <a:ea typeface="Microsoft JhengHei"/>
+                <a:cs typeface="Microsoft JhengHei"/>
+              </a:rPr>
+              <a:t>✓  </a:t>
+            </a:r>
+            <a:r>
+              <a:rPr sz="1250" b="1" i="0">
+                <a:solidFill>
+                  <a:srgbClr val="1C3D5A"/>
+                </a:solidFill>
+                <a:latin typeface="Microsoft JhengHei"/>
+                <a:ea typeface="Microsoft JhengHei"/>
+                <a:cs typeface="Microsoft JhengHei"/>
+              </a:rPr>
+              <a:t>CWA 開放資料</a:t>
+            </a:r>
+          </a:p>
+          <a:p>
+            <a:pPr algn="l">
+              <a:lnSpc>
+                <a:spcPct val="105000"/>
+              </a:lnSpc>
+              <a:spcAft>
+                <a:spcPts val="100"/>
+              </a:spcAft>
+            </a:pPr>
+            <a:r>
+              <a:rPr sz="1050" b="0" i="0">
                 <a:solidFill>
                   <a:srgbClr val="7C8B97"/>
                 </a:solidFill>
@@ -51998,7 +52213,7 @@
                 <a:ea typeface="Microsoft JhengHei"/>
                 <a:cs typeface="Microsoft JhengHei"/>
               </a:rPr>
-              <a:t>四張資料表</a:t>
+              <a:t>浮標海象</a:t>
             </a:r>
           </a:p>
         </p:txBody>
@@ -52011,8 +52226,8 @@
         </p:nvSpPr>
         <p:spPr>
           <a:xfrm>
-            <a:off x="4585106" y="2944368"/>
-            <a:ext cx="3058058" cy="274320"/>
+            <a:off x="4521098" y="5303520"/>
+            <a:ext cx="3149498" cy="475488"/>
           </a:xfrm>
           <a:prstGeom prst="rect">
             <a:avLst/>
@@ -52027,14 +52242,14 @@
           <a:p>
             <a:pPr algn="l">
               <a:lnSpc>
-                <a:spcPct val="112000"/>
-              </a:lnSpc>
-              <a:spcAft>
-                <a:spcPts val="500"/>
-              </a:spcAft>
-            </a:pPr>
-            <a:r>
-              <a:rPr sz="1200" b="1" i="0">
+                <a:spcPct val="105000"/>
+              </a:lnSpc>
+              <a:spcAft>
+                <a:spcPts val="100"/>
+              </a:spcAft>
+            </a:pPr>
+            <a:r>
+              <a:rPr sz="1250" b="1" i="0">
                 <a:solidFill>
                   <a:srgbClr val="34506A"/>
                 </a:solidFill>
@@ -52042,18 +52257,8 @@
                 <a:ea typeface="Microsoft JhengHei"/>
                 <a:cs typeface="Microsoft JhengHei"/>
               </a:rPr>
-              <a:t>✓ </a:t>
-            </a:r>
-          </a:p>
-          <a:p>
-            <a:pPr algn="l">
-              <a:lnSpc>
-                <a:spcPct val="112000"/>
-              </a:lnSpc>
-              <a:spcAft>
-                <a:spcPts val="500"/>
-              </a:spcAft>
-            </a:pPr>
+              <a:t>✓  </a:t>
+            </a:r>
             <a:r>
               <a:rPr sz="1250" b="1" i="0">
                 <a:solidFill>
@@ -52063,43 +52268,20 @@
                 <a:ea typeface="Microsoft JhengHei"/>
                 <a:cs typeface="Microsoft JhengHei"/>
               </a:rPr>
-              <a:t>Apache + PHP</a:t>
-            </a:r>
-          </a:p>
-        </p:txBody>
-      </p:sp>
-      <p:sp>
-        <p:nvSpPr>
-          <p:cNvPr id="25" name="TextBox 24"/>
-          <p:cNvSpPr txBox="1"/>
-          <p:nvPr/>
-        </p:nvSpPr>
-        <p:spPr>
-          <a:xfrm>
-            <a:off x="4886858" y="3182112"/>
-            <a:ext cx="2783738" cy="219456"/>
-          </a:xfrm>
-          <a:prstGeom prst="rect">
-            <a:avLst/>
-          </a:prstGeom>
-          <a:noFill/>
-        </p:spPr>
-        <p:txBody>
-          <a:bodyPr wrap="square" anchor="t" lIns="0" rIns="0" tIns="0" bIns="0">
-            <a:spAutoFit/>
-          </a:bodyPr>
-          <a:lstStyle/>
-          <a:p>
-            <a:pPr algn="l">
-              <a:lnSpc>
-                <a:spcPct val="112000"/>
-              </a:lnSpc>
-              <a:spcAft>
-                <a:spcPts val="500"/>
-              </a:spcAft>
-            </a:pPr>
-            <a:r>
-              <a:rPr sz="1100" b="0" i="0">
+              <a:t>Jupyter</a:t>
+            </a:r>
+          </a:p>
+          <a:p>
+            <a:pPr algn="l">
+              <a:lnSpc>
+                <a:spcPct val="105000"/>
+              </a:lnSpc>
+              <a:spcAft>
+                <a:spcPts val="100"/>
+              </a:spcAft>
+            </a:pPr>
+            <a:r>
+              <a:rPr sz="1050" b="0" i="0">
                 <a:solidFill>
                   <a:srgbClr val="7C8B97"/>
                 </a:solidFill>
@@ -52107,551 +52289,6 @@
                 <a:ea typeface="Microsoft JhengHei"/>
                 <a:cs typeface="Microsoft JhengHei"/>
               </a:rPr>
-              <a:t>完整業務系統</a:t>
-            </a:r>
-          </a:p>
-        </p:txBody>
-      </p:sp>
-      <p:sp>
-        <p:nvSpPr>
-          <p:cNvPr id="26" name="TextBox 25"/>
-          <p:cNvSpPr txBox="1"/>
-          <p:nvPr/>
-        </p:nvSpPr>
-        <p:spPr>
-          <a:xfrm>
-            <a:off x="4585106" y="3401568"/>
-            <a:ext cx="3058058" cy="274320"/>
-          </a:xfrm>
-          <a:prstGeom prst="rect">
-            <a:avLst/>
-          </a:prstGeom>
-          <a:noFill/>
-        </p:spPr>
-        <p:txBody>
-          <a:bodyPr wrap="square" anchor="t" lIns="0" rIns="0" tIns="0" bIns="0">
-            <a:spAutoFit/>
-          </a:bodyPr>
-          <a:lstStyle/>
-          <a:p>
-            <a:pPr algn="l">
-              <a:lnSpc>
-                <a:spcPct val="112000"/>
-              </a:lnSpc>
-              <a:spcAft>
-                <a:spcPts val="500"/>
-              </a:spcAft>
-            </a:pPr>
-            <a:r>
-              <a:rPr sz="1200" b="1" i="0">
-                <a:solidFill>
-                  <a:srgbClr val="34506A"/>
-                </a:solidFill>
-                <a:latin typeface="Microsoft JhengHei"/>
-                <a:ea typeface="Microsoft JhengHei"/>
-                <a:cs typeface="Microsoft JhengHei"/>
-              </a:rPr>
-              <a:t>✓ </a:t>
-            </a:r>
-          </a:p>
-          <a:p>
-            <a:pPr algn="l">
-              <a:lnSpc>
-                <a:spcPct val="112000"/>
-              </a:lnSpc>
-              <a:spcAft>
-                <a:spcPts val="500"/>
-              </a:spcAft>
-            </a:pPr>
-            <a:r>
-              <a:rPr sz="1250" b="1" i="0">
-                <a:solidFill>
-                  <a:srgbClr val="1C3D5A"/>
-                </a:solidFill>
-                <a:latin typeface="Microsoft JhengHei"/>
-                <a:ea typeface="Microsoft JhengHei"/>
-                <a:cs typeface="Microsoft JhengHei"/>
-              </a:rPr>
-              <a:t>scikit-learn</a:t>
-            </a:r>
-          </a:p>
-        </p:txBody>
-      </p:sp>
-      <p:sp>
-        <p:nvSpPr>
-          <p:cNvPr id="27" name="TextBox 26"/>
-          <p:cNvSpPr txBox="1"/>
-          <p:nvPr/>
-        </p:nvSpPr>
-        <p:spPr>
-          <a:xfrm>
-            <a:off x="4886858" y="3639312"/>
-            <a:ext cx="2783738" cy="219456"/>
-          </a:xfrm>
-          <a:prstGeom prst="rect">
-            <a:avLst/>
-          </a:prstGeom>
-          <a:noFill/>
-        </p:spPr>
-        <p:txBody>
-          <a:bodyPr wrap="square" anchor="t" lIns="0" rIns="0" tIns="0" bIns="0">
-            <a:spAutoFit/>
-          </a:bodyPr>
-          <a:lstStyle/>
-          <a:p>
-            <a:pPr algn="l">
-              <a:lnSpc>
-                <a:spcPct val="112000"/>
-              </a:lnSpc>
-              <a:spcAft>
-                <a:spcPts val="500"/>
-              </a:spcAft>
-            </a:pPr>
-            <a:r>
-              <a:rPr sz="1100" b="0" i="0">
-                <a:solidFill>
-                  <a:srgbClr val="7C8B97"/>
-                </a:solidFill>
-                <a:latin typeface="Microsoft JhengHei"/>
-                <a:ea typeface="Microsoft JhengHei"/>
-                <a:cs typeface="Microsoft JhengHei"/>
-              </a:rPr>
-              <a:t>RF + IsoForest + GridSearch</a:t>
-            </a:r>
-          </a:p>
-        </p:txBody>
-      </p:sp>
-      <p:sp>
-        <p:nvSpPr>
-          <p:cNvPr id="28" name="TextBox 27"/>
-          <p:cNvSpPr txBox="1"/>
-          <p:nvPr/>
-        </p:nvSpPr>
-        <p:spPr>
-          <a:xfrm>
-            <a:off x="4585106" y="3858768"/>
-            <a:ext cx="3058058" cy="274320"/>
-          </a:xfrm>
-          <a:prstGeom prst="rect">
-            <a:avLst/>
-          </a:prstGeom>
-          <a:noFill/>
-        </p:spPr>
-        <p:txBody>
-          <a:bodyPr wrap="square" anchor="t" lIns="0" rIns="0" tIns="0" bIns="0">
-            <a:spAutoFit/>
-          </a:bodyPr>
-          <a:lstStyle/>
-          <a:p>
-            <a:pPr algn="l">
-              <a:lnSpc>
-                <a:spcPct val="112000"/>
-              </a:lnSpc>
-              <a:spcAft>
-                <a:spcPts val="500"/>
-              </a:spcAft>
-            </a:pPr>
-            <a:r>
-              <a:rPr sz="1200" b="1" i="0">
-                <a:solidFill>
-                  <a:srgbClr val="34506A"/>
-                </a:solidFill>
-                <a:latin typeface="Microsoft JhengHei"/>
-                <a:ea typeface="Microsoft JhengHei"/>
-                <a:cs typeface="Microsoft JhengHei"/>
-              </a:rPr>
-              <a:t>✓ </a:t>
-            </a:r>
-          </a:p>
-          <a:p>
-            <a:pPr algn="l">
-              <a:lnSpc>
-                <a:spcPct val="112000"/>
-              </a:lnSpc>
-              <a:spcAft>
-                <a:spcPts val="500"/>
-              </a:spcAft>
-            </a:pPr>
-            <a:r>
-              <a:rPr sz="1250" b="1" i="0">
-                <a:solidFill>
-                  <a:srgbClr val="1C3D5A"/>
-                </a:solidFill>
-                <a:latin typeface="Microsoft JhengHei"/>
-                <a:ea typeface="Microsoft JhengHei"/>
-                <a:cs typeface="Microsoft JhengHei"/>
-              </a:rPr>
-              <a:t>Folium</a:t>
-            </a:r>
-          </a:p>
-        </p:txBody>
-      </p:sp>
-      <p:sp>
-        <p:nvSpPr>
-          <p:cNvPr id="29" name="TextBox 28"/>
-          <p:cNvSpPr txBox="1"/>
-          <p:nvPr/>
-        </p:nvSpPr>
-        <p:spPr>
-          <a:xfrm>
-            <a:off x="4886858" y="4096512"/>
-            <a:ext cx="2783738" cy="219456"/>
-          </a:xfrm>
-          <a:prstGeom prst="rect">
-            <a:avLst/>
-          </a:prstGeom>
-          <a:noFill/>
-        </p:spPr>
-        <p:txBody>
-          <a:bodyPr wrap="square" anchor="t" lIns="0" rIns="0" tIns="0" bIns="0">
-            <a:spAutoFit/>
-          </a:bodyPr>
-          <a:lstStyle/>
-          <a:p>
-            <a:pPr algn="l">
-              <a:lnSpc>
-                <a:spcPct val="112000"/>
-              </a:lnSpc>
-              <a:spcAft>
-                <a:spcPts val="500"/>
-              </a:spcAft>
-            </a:pPr>
-            <a:r>
-              <a:rPr sz="1100" b="0" i="0">
-                <a:solidFill>
-                  <a:srgbClr val="7C8B97"/>
-                </a:solidFill>
-                <a:latin typeface="Microsoft JhengHei"/>
-                <a:ea typeface="Microsoft JhengHei"/>
-                <a:cs typeface="Microsoft JhengHei"/>
-              </a:rPr>
-              <a:t>互動海域地圖</a:t>
-            </a:r>
-          </a:p>
-        </p:txBody>
-      </p:sp>
-      <p:sp>
-        <p:nvSpPr>
-          <p:cNvPr id="30" name="TextBox 29"/>
-          <p:cNvSpPr txBox="1"/>
-          <p:nvPr/>
-        </p:nvSpPr>
-        <p:spPr>
-          <a:xfrm>
-            <a:off x="4585106" y="4315968"/>
-            <a:ext cx="3058058" cy="274320"/>
-          </a:xfrm>
-          <a:prstGeom prst="rect">
-            <a:avLst/>
-          </a:prstGeom>
-          <a:noFill/>
-        </p:spPr>
-        <p:txBody>
-          <a:bodyPr wrap="square" anchor="t" lIns="0" rIns="0" tIns="0" bIns="0">
-            <a:spAutoFit/>
-          </a:bodyPr>
-          <a:lstStyle/>
-          <a:p>
-            <a:pPr algn="l">
-              <a:lnSpc>
-                <a:spcPct val="112000"/>
-              </a:lnSpc>
-              <a:spcAft>
-                <a:spcPts val="500"/>
-              </a:spcAft>
-            </a:pPr>
-            <a:r>
-              <a:rPr sz="1200" b="1" i="0">
-                <a:solidFill>
-                  <a:srgbClr val="34506A"/>
-                </a:solidFill>
-                <a:latin typeface="Microsoft JhengHei"/>
-                <a:ea typeface="Microsoft JhengHei"/>
-                <a:cs typeface="Microsoft JhengHei"/>
-              </a:rPr>
-              <a:t>✓ </a:t>
-            </a:r>
-          </a:p>
-          <a:p>
-            <a:pPr algn="l">
-              <a:lnSpc>
-                <a:spcPct val="112000"/>
-              </a:lnSpc>
-              <a:spcAft>
-                <a:spcPts val="500"/>
-              </a:spcAft>
-            </a:pPr>
-            <a:r>
-              <a:rPr sz="1250" b="1" i="0">
-                <a:solidFill>
-                  <a:srgbClr val="1C3D5A"/>
-                </a:solidFill>
-                <a:latin typeface="Microsoft JhengHei"/>
-                <a:ea typeface="Microsoft JhengHei"/>
-                <a:cs typeface="Microsoft JhengHei"/>
-              </a:rPr>
-              <a:t>Gradio</a:t>
-            </a:r>
-          </a:p>
-        </p:txBody>
-      </p:sp>
-      <p:sp>
-        <p:nvSpPr>
-          <p:cNvPr id="31" name="TextBox 30"/>
-          <p:cNvSpPr txBox="1"/>
-          <p:nvPr/>
-        </p:nvSpPr>
-        <p:spPr>
-          <a:xfrm>
-            <a:off x="4886858" y="4553712"/>
-            <a:ext cx="2783738" cy="219456"/>
-          </a:xfrm>
-          <a:prstGeom prst="rect">
-            <a:avLst/>
-          </a:prstGeom>
-          <a:noFill/>
-        </p:spPr>
-        <p:txBody>
-          <a:bodyPr wrap="square" anchor="t" lIns="0" rIns="0" tIns="0" bIns="0">
-            <a:spAutoFit/>
-          </a:bodyPr>
-          <a:lstStyle/>
-          <a:p>
-            <a:pPr algn="l">
-              <a:lnSpc>
-                <a:spcPct val="112000"/>
-              </a:lnSpc>
-              <a:spcAft>
-                <a:spcPts val="500"/>
-              </a:spcAft>
-            </a:pPr>
-            <a:r>
-              <a:rPr sz="1100" b="0" i="0">
-                <a:solidFill>
-                  <a:srgbClr val="7C8B97"/>
-                </a:solidFill>
-                <a:latin typeface="Microsoft JhengHei"/>
-                <a:ea typeface="Microsoft JhengHei"/>
-                <a:cs typeface="Microsoft JhengHei"/>
-              </a:rPr>
-              <a:t>互動分析</a:t>
-            </a:r>
-          </a:p>
-        </p:txBody>
-      </p:sp>
-      <p:sp>
-        <p:nvSpPr>
-          <p:cNvPr id="32" name="TextBox 31"/>
-          <p:cNvSpPr txBox="1"/>
-          <p:nvPr/>
-        </p:nvSpPr>
-        <p:spPr>
-          <a:xfrm>
-            <a:off x="4585106" y="4773168"/>
-            <a:ext cx="3058058" cy="274320"/>
-          </a:xfrm>
-          <a:prstGeom prst="rect">
-            <a:avLst/>
-          </a:prstGeom>
-          <a:noFill/>
-        </p:spPr>
-        <p:txBody>
-          <a:bodyPr wrap="square" anchor="t" lIns="0" rIns="0" tIns="0" bIns="0">
-            <a:spAutoFit/>
-          </a:bodyPr>
-          <a:lstStyle/>
-          <a:p>
-            <a:pPr algn="l">
-              <a:lnSpc>
-                <a:spcPct val="112000"/>
-              </a:lnSpc>
-              <a:spcAft>
-                <a:spcPts val="500"/>
-              </a:spcAft>
-            </a:pPr>
-            <a:r>
-              <a:rPr sz="1200" b="1" i="0">
-                <a:solidFill>
-                  <a:srgbClr val="34506A"/>
-                </a:solidFill>
-                <a:latin typeface="Microsoft JhengHei"/>
-                <a:ea typeface="Microsoft JhengHei"/>
-                <a:cs typeface="Microsoft JhengHei"/>
-              </a:rPr>
-              <a:t>✓ </a:t>
-            </a:r>
-          </a:p>
-          <a:p>
-            <a:pPr algn="l">
-              <a:lnSpc>
-                <a:spcPct val="112000"/>
-              </a:lnSpc>
-              <a:spcAft>
-                <a:spcPts val="500"/>
-              </a:spcAft>
-            </a:pPr>
-            <a:r>
-              <a:rPr sz="1250" b="1" i="0">
-                <a:solidFill>
-                  <a:srgbClr val="1C3D5A"/>
-                </a:solidFill>
-                <a:latin typeface="Microsoft JhengHei"/>
-                <a:ea typeface="Microsoft JhengHei"/>
-                <a:cs typeface="Microsoft JhengHei"/>
-              </a:rPr>
-              <a:t>CWA 開放資料</a:t>
-            </a:r>
-          </a:p>
-        </p:txBody>
-      </p:sp>
-      <p:sp>
-        <p:nvSpPr>
-          <p:cNvPr id="33" name="TextBox 32"/>
-          <p:cNvSpPr txBox="1"/>
-          <p:nvPr/>
-        </p:nvSpPr>
-        <p:spPr>
-          <a:xfrm>
-            <a:off x="4886858" y="5010912"/>
-            <a:ext cx="2783738" cy="219456"/>
-          </a:xfrm>
-          <a:prstGeom prst="rect">
-            <a:avLst/>
-          </a:prstGeom>
-          <a:noFill/>
-        </p:spPr>
-        <p:txBody>
-          <a:bodyPr wrap="square" anchor="t" lIns="0" rIns="0" tIns="0" bIns="0">
-            <a:spAutoFit/>
-          </a:bodyPr>
-          <a:lstStyle/>
-          <a:p>
-            <a:pPr algn="l">
-              <a:lnSpc>
-                <a:spcPct val="112000"/>
-              </a:lnSpc>
-              <a:spcAft>
-                <a:spcPts val="500"/>
-              </a:spcAft>
-            </a:pPr>
-            <a:r>
-              <a:rPr sz="1100" b="0" i="0">
-                <a:solidFill>
-                  <a:srgbClr val="7C8B97"/>
-                </a:solidFill>
-                <a:latin typeface="Microsoft JhengHei"/>
-                <a:ea typeface="Microsoft JhengHei"/>
-                <a:cs typeface="Microsoft JhengHei"/>
-              </a:rPr>
-              <a:t>浮標海象</a:t>
-            </a:r>
-          </a:p>
-        </p:txBody>
-      </p:sp>
-      <p:sp>
-        <p:nvSpPr>
-          <p:cNvPr id="34" name="TextBox 33"/>
-          <p:cNvSpPr txBox="1"/>
-          <p:nvPr/>
-        </p:nvSpPr>
-        <p:spPr>
-          <a:xfrm>
-            <a:off x="4585106" y="5230368"/>
-            <a:ext cx="3058058" cy="274320"/>
-          </a:xfrm>
-          <a:prstGeom prst="rect">
-            <a:avLst/>
-          </a:prstGeom>
-          <a:noFill/>
-        </p:spPr>
-        <p:txBody>
-          <a:bodyPr wrap="square" anchor="t" lIns="0" rIns="0" tIns="0" bIns="0">
-            <a:spAutoFit/>
-          </a:bodyPr>
-          <a:lstStyle/>
-          <a:p>
-            <a:pPr algn="l">
-              <a:lnSpc>
-                <a:spcPct val="112000"/>
-              </a:lnSpc>
-              <a:spcAft>
-                <a:spcPts val="500"/>
-              </a:spcAft>
-            </a:pPr>
-            <a:r>
-              <a:rPr sz="1200" b="1" i="0">
-                <a:solidFill>
-                  <a:srgbClr val="34506A"/>
-                </a:solidFill>
-                <a:latin typeface="Microsoft JhengHei"/>
-                <a:ea typeface="Microsoft JhengHei"/>
-                <a:cs typeface="Microsoft JhengHei"/>
-              </a:rPr>
-              <a:t>✓ </a:t>
-            </a:r>
-          </a:p>
-          <a:p>
-            <a:pPr algn="l">
-              <a:lnSpc>
-                <a:spcPct val="112000"/>
-              </a:lnSpc>
-              <a:spcAft>
-                <a:spcPts val="500"/>
-              </a:spcAft>
-            </a:pPr>
-            <a:r>
-              <a:rPr sz="1250" b="1" i="0">
-                <a:solidFill>
-                  <a:srgbClr val="1C3D5A"/>
-                </a:solidFill>
-                <a:latin typeface="Microsoft JhengHei"/>
-                <a:ea typeface="Microsoft JhengHei"/>
-                <a:cs typeface="Microsoft JhengHei"/>
-              </a:rPr>
-              <a:t>Jupyter</a:t>
-            </a:r>
-          </a:p>
-        </p:txBody>
-      </p:sp>
-      <p:sp>
-        <p:nvSpPr>
-          <p:cNvPr id="35" name="TextBox 34"/>
-          <p:cNvSpPr txBox="1"/>
-          <p:nvPr/>
-        </p:nvSpPr>
-        <p:spPr>
-          <a:xfrm>
-            <a:off x="4886858" y="5468112"/>
-            <a:ext cx="2783738" cy="219456"/>
-          </a:xfrm>
-          <a:prstGeom prst="rect">
-            <a:avLst/>
-          </a:prstGeom>
-          <a:noFill/>
-        </p:spPr>
-        <p:txBody>
-          <a:bodyPr wrap="square" anchor="t" lIns="0" rIns="0" tIns="0" bIns="0">
-            <a:spAutoFit/>
-          </a:bodyPr>
-          <a:lstStyle/>
-          <a:p>
-            <a:pPr algn="l">
-              <a:lnSpc>
-                <a:spcPct val="112000"/>
-              </a:lnSpc>
-              <a:spcAft>
-                <a:spcPts val="500"/>
-              </a:spcAft>
-            </a:pPr>
-            <a:r>
-              <a:rPr sz="1100" b="0" i="0">
-                <a:solidFill>
-                  <a:srgbClr val="7C8B97"/>
-                </a:solidFill>
-                <a:latin typeface="Microsoft JhengHei"/>
-                <a:ea typeface="Microsoft JhengHei"/>
-                <a:cs typeface="Microsoft JhengHei"/>
-              </a:rPr>
               <a:t>EDA 紀錄</a:t>
             </a:r>
           </a:p>
@@ -52659,7 +52296,7 @@
       </p:sp>
       <p:sp>
         <p:nvSpPr>
-          <p:cNvPr id="36" name="Rounded Rectangle 35"/>
+          <p:cNvPr id="25" name="Rounded Rectangle 24"/>
           <p:cNvSpPr/>
           <p:nvPr/>
         </p:nvSpPr>
@@ -52706,7 +52343,7 @@
       </p:sp>
       <p:sp>
         <p:nvSpPr>
-          <p:cNvPr id="37" name="Rectangle 36"/>
+          <p:cNvPr id="26" name="Rectangle 25"/>
           <p:cNvSpPr/>
           <p:nvPr/>
         </p:nvSpPr>
@@ -52749,7 +52386,7 @@
       </p:sp>
       <p:sp>
         <p:nvSpPr>
-          <p:cNvPr id="38" name="TextBox 37"/>
+          <p:cNvPr id="27" name="TextBox 26"/>
           <p:cNvSpPr txBox="1"/>
           <p:nvPr/>
         </p:nvSpPr>
@@ -52793,14 +52430,14 @@
       </p:sp>
       <p:sp>
         <p:nvSpPr>
-          <p:cNvPr id="39" name="TextBox 38"/>
-          <p:cNvSpPr txBox="1"/>
-          <p:nvPr/>
-        </p:nvSpPr>
-        <p:spPr>
-          <a:xfrm>
-            <a:off x="8328964" y="2487168"/>
-            <a:ext cx="3058058" cy="274320"/>
+          <p:cNvPr id="28" name="TextBox 27"/>
+          <p:cNvSpPr txBox="1"/>
+          <p:nvPr/>
+        </p:nvSpPr>
+        <p:spPr>
+          <a:xfrm>
+            <a:off x="8264956" y="2450592"/>
+            <a:ext cx="3149498" cy="475488"/>
           </a:xfrm>
           <a:prstGeom prst="rect">
             <a:avLst/>
@@ -52815,14 +52452,14 @@
           <a:p>
             <a:pPr algn="l">
               <a:lnSpc>
-                <a:spcPct val="112000"/>
-              </a:lnSpc>
-              <a:spcAft>
-                <a:spcPts val="500"/>
-              </a:spcAft>
-            </a:pPr>
-            <a:r>
-              <a:rPr sz="1200" b="1" i="0">
+                <a:spcPct val="105000"/>
+              </a:lnSpc>
+              <a:spcAft>
+                <a:spcPts val="100"/>
+              </a:spcAft>
+            </a:pPr>
+            <a:r>
+              <a:rPr sz="1250" b="1" i="0">
                 <a:solidFill>
                   <a:srgbClr val="C8922E"/>
                 </a:solidFill>
@@ -52830,18 +52467,8 @@
                 <a:ea typeface="Microsoft JhengHei"/>
                 <a:cs typeface="Microsoft JhengHei"/>
               </a:rPr>
-              <a:t>✓ </a:t>
-            </a:r>
-          </a:p>
-          <a:p>
-            <a:pPr algn="l">
-              <a:lnSpc>
-                <a:spcPct val="112000"/>
-              </a:lnSpc>
-              <a:spcAft>
-                <a:spcPts val="500"/>
-              </a:spcAft>
-            </a:pPr>
+              <a:t>✓  </a:t>
+            </a:r>
             <a:r>
               <a:rPr sz="1250" b="1" i="0">
                 <a:solidFill>
@@ -52854,18 +52481,39 @@
               <a:t>MILP (HiGHS)</a:t>
             </a:r>
           </a:p>
-        </p:txBody>
-      </p:sp>
-      <p:sp>
-        <p:nvSpPr>
-          <p:cNvPr id="40" name="TextBox 39"/>
-          <p:cNvSpPr txBox="1"/>
-          <p:nvPr/>
-        </p:nvSpPr>
-        <p:spPr>
-          <a:xfrm>
-            <a:off x="8630716" y="2724912"/>
-            <a:ext cx="2783738" cy="219456"/>
+          <a:p>
+            <a:pPr algn="l">
+              <a:lnSpc>
+                <a:spcPct val="105000"/>
+              </a:lnSpc>
+              <a:spcAft>
+                <a:spcPts val="100"/>
+              </a:spcAft>
+            </a:pPr>
+            <a:r>
+              <a:rPr sz="1050" b="0" i="0">
+                <a:solidFill>
+                  <a:srgbClr val="7C8B97"/>
+                </a:solidFill>
+                <a:latin typeface="Microsoft JhengHei"/>
+                <a:ea typeface="Microsoft JhengHei"/>
+                <a:cs typeface="Microsoft JhengHei"/>
+              </a:rPr>
+              <a:t>排班全域最佳化</a:t>
+            </a:r>
+          </a:p>
+        </p:txBody>
+      </p:sp>
+      <p:sp>
+        <p:nvSpPr>
+          <p:cNvPr id="29" name="TextBox 28"/>
+          <p:cNvSpPr txBox="1"/>
+          <p:nvPr/>
+        </p:nvSpPr>
+        <p:spPr>
+          <a:xfrm>
+            <a:off x="8264956" y="2926080"/>
+            <a:ext cx="3149498" cy="475488"/>
           </a:xfrm>
           <a:prstGeom prst="rect">
             <a:avLst/>
@@ -52880,14 +52528,46 @@
           <a:p>
             <a:pPr algn="l">
               <a:lnSpc>
-                <a:spcPct val="112000"/>
-              </a:lnSpc>
-              <a:spcAft>
-                <a:spcPts val="500"/>
-              </a:spcAft>
-            </a:pPr>
-            <a:r>
-              <a:rPr sz="1100" b="0" i="0">
+                <a:spcPct val="105000"/>
+              </a:lnSpc>
+              <a:spcAft>
+                <a:spcPts val="100"/>
+              </a:spcAft>
+            </a:pPr>
+            <a:r>
+              <a:rPr sz="1250" b="1" i="0">
+                <a:solidFill>
+                  <a:srgbClr val="C8922E"/>
+                </a:solidFill>
+                <a:latin typeface="Microsoft JhengHei"/>
+                <a:ea typeface="Microsoft JhengHei"/>
+                <a:cs typeface="Microsoft JhengHei"/>
+              </a:rPr>
+              <a:t>✓  </a:t>
+            </a:r>
+            <a:r>
+              <a:rPr sz="1250" b="1" i="0">
+                <a:solidFill>
+                  <a:srgbClr val="1C3D5A"/>
+                </a:solidFill>
+                <a:latin typeface="Microsoft JhengHei"/>
+                <a:ea typeface="Microsoft JhengHei"/>
+                <a:cs typeface="Microsoft JhengHei"/>
+              </a:rPr>
+              <a:t>Isolation Forest</a:t>
+            </a:r>
+          </a:p>
+          <a:p>
+            <a:pPr algn="l">
+              <a:lnSpc>
+                <a:spcPct val="105000"/>
+              </a:lnSpc>
+              <a:spcAft>
+                <a:spcPts val="100"/>
+              </a:spcAft>
+            </a:pPr>
+            <a:r>
+              <a:rPr sz="1050" b="0" i="0">
                 <a:solidFill>
                   <a:srgbClr val="7C8B97"/>
                 </a:solidFill>
@@ -52895,21 +52575,21 @@
                 <a:ea typeface="Microsoft JhengHei"/>
                 <a:cs typeface="Microsoft JhengHei"/>
               </a:rPr>
-              <a:t>排班全域最佳化</a:t>
-            </a:r>
-          </a:p>
-        </p:txBody>
-      </p:sp>
-      <p:sp>
-        <p:nvSpPr>
-          <p:cNvPr id="41" name="TextBox 40"/>
-          <p:cNvSpPr txBox="1"/>
-          <p:nvPr/>
-        </p:nvSpPr>
-        <p:spPr>
-          <a:xfrm>
-            <a:off x="8328964" y="2944368"/>
-            <a:ext cx="3058058" cy="274320"/>
+              <a:t>5 維異常偵測</a:t>
+            </a:r>
+          </a:p>
+        </p:txBody>
+      </p:sp>
+      <p:sp>
+        <p:nvSpPr>
+          <p:cNvPr id="30" name="TextBox 29"/>
+          <p:cNvSpPr txBox="1"/>
+          <p:nvPr/>
+        </p:nvSpPr>
+        <p:spPr>
+          <a:xfrm>
+            <a:off x="8264956" y="3401568"/>
+            <a:ext cx="3149498" cy="475488"/>
           </a:xfrm>
           <a:prstGeom prst="rect">
             <a:avLst/>
@@ -52924,14 +52604,14 @@
           <a:p>
             <a:pPr algn="l">
               <a:lnSpc>
-                <a:spcPct val="112000"/>
-              </a:lnSpc>
-              <a:spcAft>
-                <a:spcPts val="500"/>
-              </a:spcAft>
-            </a:pPr>
-            <a:r>
-              <a:rPr sz="1200" b="1" i="0">
+                <a:spcPct val="105000"/>
+              </a:lnSpc>
+              <a:spcAft>
+                <a:spcPts val="100"/>
+              </a:spcAft>
+            </a:pPr>
+            <a:r>
+              <a:rPr sz="1250" b="1" i="0">
                 <a:solidFill>
                   <a:srgbClr val="C8922E"/>
                 </a:solidFill>
@@ -52939,18 +52619,8 @@
                 <a:ea typeface="Microsoft JhengHei"/>
                 <a:cs typeface="Microsoft JhengHei"/>
               </a:rPr>
-              <a:t>✓ </a:t>
-            </a:r>
-          </a:p>
-          <a:p>
-            <a:pPr algn="l">
-              <a:lnSpc>
-                <a:spcPct val="112000"/>
-              </a:lnSpc>
-              <a:spcAft>
-                <a:spcPts val="500"/>
-              </a:spcAft>
-            </a:pPr>
+              <a:t>✓  </a:t>
+            </a:r>
             <a:r>
               <a:rPr sz="1250" b="1" i="0">
                 <a:solidFill>
@@ -52960,21 +52630,42 @@
                 <a:ea typeface="Microsoft JhengHei"/>
                 <a:cs typeface="Microsoft JhengHei"/>
               </a:rPr>
-              <a:t>Isolation Forest</a:t>
-            </a:r>
-          </a:p>
-        </p:txBody>
-      </p:sp>
-      <p:sp>
-        <p:nvSpPr>
-          <p:cNvPr id="42" name="TextBox 41"/>
-          <p:cNvSpPr txBox="1"/>
-          <p:nvPr/>
-        </p:nvSpPr>
-        <p:spPr>
-          <a:xfrm>
-            <a:off x="8630716" y="3182112"/>
-            <a:ext cx="2783738" cy="219456"/>
+              <a:t>Holt 平滑</a:t>
+            </a:r>
+          </a:p>
+          <a:p>
+            <a:pPr algn="l">
+              <a:lnSpc>
+                <a:spcPct val="105000"/>
+              </a:lnSpc>
+              <a:spcAft>
+                <a:spcPts val="100"/>
+              </a:spcAft>
+            </a:pPr>
+            <a:r>
+              <a:rPr sz="1050" b="0" i="0">
+                <a:solidFill>
+                  <a:srgbClr val="7C8B97"/>
+                </a:solidFill>
+                <a:latin typeface="Microsoft JhengHei"/>
+                <a:ea typeface="Microsoft JhengHei"/>
+                <a:cs typeface="Microsoft JhengHei"/>
+              </a:rPr>
+              <a:t>純 NumPy 趨勢預測</a:t>
+            </a:r>
+          </a:p>
+        </p:txBody>
+      </p:sp>
+      <p:sp>
+        <p:nvSpPr>
+          <p:cNvPr id="31" name="TextBox 30"/>
+          <p:cNvSpPr txBox="1"/>
+          <p:nvPr/>
+        </p:nvSpPr>
+        <p:spPr>
+          <a:xfrm>
+            <a:off x="8264956" y="3877056"/>
+            <a:ext cx="3149498" cy="475488"/>
           </a:xfrm>
           <a:prstGeom prst="rect">
             <a:avLst/>
@@ -52989,58 +52680,14 @@
           <a:p>
             <a:pPr algn="l">
               <a:lnSpc>
-                <a:spcPct val="112000"/>
-              </a:lnSpc>
-              <a:spcAft>
-                <a:spcPts val="500"/>
-              </a:spcAft>
-            </a:pPr>
-            <a:r>
-              <a:rPr sz="1100" b="0" i="0">
-                <a:solidFill>
-                  <a:srgbClr val="7C8B97"/>
-                </a:solidFill>
-                <a:latin typeface="Microsoft JhengHei"/>
-                <a:ea typeface="Microsoft JhengHei"/>
-                <a:cs typeface="Microsoft JhengHei"/>
-              </a:rPr>
-              <a:t>5 維異常偵測</a:t>
-            </a:r>
-          </a:p>
-        </p:txBody>
-      </p:sp>
-      <p:sp>
-        <p:nvSpPr>
-          <p:cNvPr id="43" name="TextBox 42"/>
-          <p:cNvSpPr txBox="1"/>
-          <p:nvPr/>
-        </p:nvSpPr>
-        <p:spPr>
-          <a:xfrm>
-            <a:off x="8328964" y="3401568"/>
-            <a:ext cx="3058058" cy="274320"/>
-          </a:xfrm>
-          <a:prstGeom prst="rect">
-            <a:avLst/>
-          </a:prstGeom>
-          <a:noFill/>
-        </p:spPr>
-        <p:txBody>
-          <a:bodyPr wrap="square" anchor="t" lIns="0" rIns="0" tIns="0" bIns="0">
-            <a:spAutoFit/>
-          </a:bodyPr>
-          <a:lstStyle/>
-          <a:p>
-            <a:pPr algn="l">
-              <a:lnSpc>
-                <a:spcPct val="112000"/>
-              </a:lnSpc>
-              <a:spcAft>
-                <a:spcPts val="500"/>
-              </a:spcAft>
-            </a:pPr>
-            <a:r>
-              <a:rPr sz="1200" b="1" i="0">
+                <a:spcPct val="105000"/>
+              </a:lnSpc>
+              <a:spcAft>
+                <a:spcPts val="100"/>
+              </a:spcAft>
+            </a:pPr>
+            <a:r>
+              <a:rPr sz="1250" b="1" i="0">
                 <a:solidFill>
                   <a:srgbClr val="C8922E"/>
                 </a:solidFill>
@@ -53048,18 +52695,8 @@
                 <a:ea typeface="Microsoft JhengHei"/>
                 <a:cs typeface="Microsoft JhengHei"/>
               </a:rPr>
-              <a:t>✓ </a:t>
-            </a:r>
-          </a:p>
-          <a:p>
-            <a:pPr algn="l">
-              <a:lnSpc>
-                <a:spcPct val="112000"/>
-              </a:lnSpc>
-              <a:spcAft>
-                <a:spcPts val="500"/>
-              </a:spcAft>
-            </a:pPr>
+              <a:t>✓  </a:t>
+            </a:r>
             <a:r>
               <a:rPr sz="1250" b="1" i="0">
                 <a:solidFill>
@@ -53069,152 +52706,20 @@
                 <a:ea typeface="Microsoft JhengHei"/>
                 <a:cs typeface="Microsoft JhengHei"/>
               </a:rPr>
-              <a:t>Holt 平滑</a:t>
-            </a:r>
-          </a:p>
-        </p:txBody>
-      </p:sp>
-      <p:sp>
-        <p:nvSpPr>
-          <p:cNvPr id="44" name="TextBox 43"/>
-          <p:cNvSpPr txBox="1"/>
-          <p:nvPr/>
-        </p:nvSpPr>
-        <p:spPr>
-          <a:xfrm>
-            <a:off x="8630716" y="3639312"/>
-            <a:ext cx="2783738" cy="219456"/>
-          </a:xfrm>
-          <a:prstGeom prst="rect">
-            <a:avLst/>
-          </a:prstGeom>
-          <a:noFill/>
-        </p:spPr>
-        <p:txBody>
-          <a:bodyPr wrap="square" anchor="t" lIns="0" rIns="0" tIns="0" bIns="0">
-            <a:spAutoFit/>
-          </a:bodyPr>
-          <a:lstStyle/>
-          <a:p>
-            <a:pPr algn="l">
-              <a:lnSpc>
-                <a:spcPct val="112000"/>
-              </a:lnSpc>
-              <a:spcAft>
-                <a:spcPts val="500"/>
-              </a:spcAft>
-            </a:pPr>
-            <a:r>
-              <a:rPr sz="1100" b="0" i="0">
-                <a:solidFill>
-                  <a:srgbClr val="7C8B97"/>
-                </a:solidFill>
-                <a:latin typeface="Microsoft JhengHei"/>
-                <a:ea typeface="Microsoft JhengHei"/>
-                <a:cs typeface="Microsoft JhengHei"/>
-              </a:rPr>
-              <a:t>純 NumPy 趨勢預測</a:t>
-            </a:r>
-          </a:p>
-        </p:txBody>
-      </p:sp>
-      <p:sp>
-        <p:nvSpPr>
-          <p:cNvPr id="45" name="TextBox 44"/>
-          <p:cNvSpPr txBox="1"/>
-          <p:nvPr/>
-        </p:nvSpPr>
-        <p:spPr>
-          <a:xfrm>
-            <a:off x="8328964" y="3858768"/>
-            <a:ext cx="3058058" cy="274320"/>
-          </a:xfrm>
-          <a:prstGeom prst="rect">
-            <a:avLst/>
-          </a:prstGeom>
-          <a:noFill/>
-        </p:spPr>
-        <p:txBody>
-          <a:bodyPr wrap="square" anchor="t" lIns="0" rIns="0" tIns="0" bIns="0">
-            <a:spAutoFit/>
-          </a:bodyPr>
-          <a:lstStyle/>
-          <a:p>
-            <a:pPr algn="l">
-              <a:lnSpc>
-                <a:spcPct val="112000"/>
-              </a:lnSpc>
-              <a:spcAft>
-                <a:spcPts val="500"/>
-              </a:spcAft>
-            </a:pPr>
-            <a:r>
-              <a:rPr sz="1200" b="1" i="0">
-                <a:solidFill>
-                  <a:srgbClr val="C8922E"/>
-                </a:solidFill>
-                <a:latin typeface="Microsoft JhengHei"/>
-                <a:ea typeface="Microsoft JhengHei"/>
-                <a:cs typeface="Microsoft JhengHei"/>
-              </a:rPr>
-              <a:t>✓ </a:t>
-            </a:r>
-          </a:p>
-          <a:p>
-            <a:pPr algn="l">
-              <a:lnSpc>
-                <a:spcPct val="112000"/>
-              </a:lnSpc>
-              <a:spcAft>
-                <a:spcPts val="500"/>
-              </a:spcAft>
-            </a:pPr>
-            <a:r>
-              <a:rPr sz="1250" b="1" i="0">
-                <a:solidFill>
-                  <a:srgbClr val="1C3D5A"/>
-                </a:solidFill>
-                <a:latin typeface="Microsoft JhengHei"/>
-                <a:ea typeface="Microsoft JhengHei"/>
-                <a:cs typeface="Microsoft JhengHei"/>
-              </a:rPr>
               <a:t>人員雷達圖</a:t>
             </a:r>
           </a:p>
-        </p:txBody>
-      </p:sp>
-      <p:sp>
-        <p:nvSpPr>
-          <p:cNvPr id="46" name="TextBox 45"/>
-          <p:cNvSpPr txBox="1"/>
-          <p:nvPr/>
-        </p:nvSpPr>
-        <p:spPr>
-          <a:xfrm>
-            <a:off x="8630716" y="4096512"/>
-            <a:ext cx="2783738" cy="219456"/>
-          </a:xfrm>
-          <a:prstGeom prst="rect">
-            <a:avLst/>
-          </a:prstGeom>
-          <a:noFill/>
-        </p:spPr>
-        <p:txBody>
-          <a:bodyPr wrap="square" anchor="t" lIns="0" rIns="0" tIns="0" bIns="0">
-            <a:spAutoFit/>
-          </a:bodyPr>
-          <a:lstStyle/>
-          <a:p>
-            <a:pPr algn="l">
-              <a:lnSpc>
-                <a:spcPct val="112000"/>
-              </a:lnSpc>
-              <a:spcAft>
-                <a:spcPts val="500"/>
-              </a:spcAft>
-            </a:pPr>
-            <a:r>
-              <a:rPr sz="1100" b="0" i="0">
+          <a:p>
+            <a:pPr algn="l">
+              <a:lnSpc>
+                <a:spcPct val="105000"/>
+              </a:lnSpc>
+              <a:spcAft>
+                <a:spcPts val="100"/>
+              </a:spcAft>
+            </a:pPr>
+            <a:r>
+              <a:rPr sz="1050" b="0" i="0">
                 <a:solidFill>
                   <a:srgbClr val="7C8B97"/>
                 </a:solidFill>

--- a/docs/slides/巨量資料與雲端運算技術_海勤人力資源與作業安全決策系統_黃宇平_傅瀚鋌_曾紹喆_劉家样_李翊丞_林秉賢.pptx
+++ b/docs/slides/巨量資料與雲端運算技術_海勤人力資源與作業安全決策系統_黃宇平_傅瀚鋌_曾紹喆_劉家样_李翊丞_林秉賢.pptx
@@ -56,6 +56,7 @@
     <p:sldId id="304" r:id="rId55"/>
     <p:sldId id="305" r:id="rId56"/>
     <p:sldId id="306" r:id="rId57"/>
+    <p:sldId id="307" r:id="rId58"/>
   </p:sldIdLst>
   <p:sldSz cx="12191695" cy="6858000" type="screen4x3"/>
   <p:notesSz cx="6858000" cy="9144000"/>
@@ -3748,7 +3749,7 @@
                 <a:ea typeface="Microsoft JhengHei"/>
                 <a:cs typeface="Consolas"/>
               </a:rPr>
-              <a:t>0.811</a:t>
+              <a:t>0.703</a:t>
             </a:r>
           </a:p>
         </p:txBody>
@@ -6691,16 +6692,16 @@
         </p:nvSpPr>
         <p:spPr>
           <a:xfrm>
-            <a:off x="914400" y="2441447"/>
-            <a:ext cx="6400800" cy="274320"/>
-          </a:xfrm>
-          <a:prstGeom prst="rect">
-            <a:avLst/>
-          </a:prstGeom>
-          <a:noFill/>
-        </p:spPr>
-        <p:txBody>
-          <a:bodyPr wrap="none" anchor="t" lIns="0" rIns="0" tIns="0" bIns="0">
+            <a:off x="1051560" y="2441447"/>
+            <a:ext cx="6217920" cy="274320"/>
+          </a:xfrm>
+          <a:prstGeom prst="rect">
+            <a:avLst/>
+          </a:prstGeom>
+          <a:noFill/>
+        </p:spPr>
+        <p:txBody>
+          <a:bodyPr wrap="square" anchor="t" lIns="0" rIns="0" tIns="0" bIns="0">
             <a:spAutoFit/>
           </a:bodyPr>
           <a:lstStyle/>
@@ -6724,16 +6725,6 @@
               </a:rPr>
               <a:t>$ </a:t>
             </a:r>
-          </a:p>
-          <a:p>
-            <a:pPr algn="l">
-              <a:lnSpc>
-                <a:spcPct val="112000"/>
-              </a:lnSpc>
-              <a:spcAft>
-                <a:spcPts val="500"/>
-              </a:spcAft>
-            </a:pPr>
             <a:r>
               <a:rPr sz="1200" b="0" i="0">
                 <a:solidFill>
@@ -6756,16 +6747,16 @@
         </p:nvSpPr>
         <p:spPr>
           <a:xfrm>
-            <a:off x="914400" y="2766059"/>
-            <a:ext cx="6400800" cy="274320"/>
-          </a:xfrm>
-          <a:prstGeom prst="rect">
-            <a:avLst/>
-          </a:prstGeom>
-          <a:noFill/>
-        </p:spPr>
-        <p:txBody>
-          <a:bodyPr wrap="none" anchor="t" lIns="0" rIns="0" tIns="0" bIns="0">
+            <a:off x="1051560" y="2766059"/>
+            <a:ext cx="6217920" cy="274320"/>
+          </a:xfrm>
+          <a:prstGeom prst="rect">
+            <a:avLst/>
+          </a:prstGeom>
+          <a:noFill/>
+        </p:spPr>
+        <p:txBody>
+          <a:bodyPr wrap="square" anchor="t" lIns="0" rIns="0" tIns="0" bIns="0">
             <a:spAutoFit/>
           </a:bodyPr>
           <a:lstStyle/>
@@ -6789,16 +6780,6 @@
               </a:rPr>
               <a:t>$ </a:t>
             </a:r>
-          </a:p>
-          <a:p>
-            <a:pPr algn="l">
-              <a:lnSpc>
-                <a:spcPct val="112000"/>
-              </a:lnSpc>
-              <a:spcAft>
-                <a:spcPts val="500"/>
-              </a:spcAft>
-            </a:pPr>
             <a:r>
               <a:rPr sz="1200" b="0" i="0">
                 <a:solidFill>
@@ -6821,16 +6802,16 @@
         </p:nvSpPr>
         <p:spPr>
           <a:xfrm>
-            <a:off x="914400" y="3255263"/>
-            <a:ext cx="6400800" cy="274320"/>
-          </a:xfrm>
-          <a:prstGeom prst="rect">
-            <a:avLst/>
-          </a:prstGeom>
-          <a:noFill/>
-        </p:spPr>
-        <p:txBody>
-          <a:bodyPr wrap="none" anchor="t" lIns="0" rIns="0" tIns="0" bIns="0">
+            <a:off x="1051560" y="3255263"/>
+            <a:ext cx="6217920" cy="274320"/>
+          </a:xfrm>
+          <a:prstGeom prst="rect">
+            <a:avLst/>
+          </a:prstGeom>
+          <a:noFill/>
+        </p:spPr>
+        <p:txBody>
+          <a:bodyPr wrap="square" anchor="t" lIns="0" rIns="0" tIns="0" bIns="0">
             <a:spAutoFit/>
           </a:bodyPr>
           <a:lstStyle/>
@@ -6854,16 +6835,6 @@
               </a:rPr>
               <a:t>✓ </a:t>
             </a:r>
-          </a:p>
-          <a:p>
-            <a:pPr algn="l">
-              <a:lnSpc>
-                <a:spcPct val="112000"/>
-              </a:lnSpc>
-              <a:spcAft>
-                <a:spcPts val="500"/>
-              </a:spcAft>
-            </a:pPr>
             <a:r>
               <a:rPr sz="1200" b="0" i="0">
                 <a:solidFill>
@@ -6886,16 +6857,16 @@
         </p:nvSpPr>
         <p:spPr>
           <a:xfrm>
-            <a:off x="914400" y="3579875"/>
-            <a:ext cx="6400800" cy="274320"/>
-          </a:xfrm>
-          <a:prstGeom prst="rect">
-            <a:avLst/>
-          </a:prstGeom>
-          <a:noFill/>
-        </p:spPr>
-        <p:txBody>
-          <a:bodyPr wrap="none" anchor="t" lIns="0" rIns="0" tIns="0" bIns="0">
+            <a:off x="1051560" y="3579875"/>
+            <a:ext cx="6217920" cy="274320"/>
+          </a:xfrm>
+          <a:prstGeom prst="rect">
+            <a:avLst/>
+          </a:prstGeom>
+          <a:noFill/>
+        </p:spPr>
+        <p:txBody>
+          <a:bodyPr wrap="square" anchor="t" lIns="0" rIns="0" tIns="0" bIns="0">
             <a:spAutoFit/>
           </a:bodyPr>
           <a:lstStyle/>
@@ -6919,16 +6890,6 @@
               </a:rPr>
               <a:t>✓ </a:t>
             </a:r>
-          </a:p>
-          <a:p>
-            <a:pPr algn="l">
-              <a:lnSpc>
-                <a:spcPct val="112000"/>
-              </a:lnSpc>
-              <a:spcAft>
-                <a:spcPts val="500"/>
-              </a:spcAft>
-            </a:pPr>
             <a:r>
               <a:rPr sz="1200" b="0" i="0">
                 <a:solidFill>
@@ -6951,16 +6912,16 @@
         </p:nvSpPr>
         <p:spPr>
           <a:xfrm>
-            <a:off x="914400" y="3904487"/>
-            <a:ext cx="6400800" cy="274320"/>
-          </a:xfrm>
-          <a:prstGeom prst="rect">
-            <a:avLst/>
-          </a:prstGeom>
-          <a:noFill/>
-        </p:spPr>
-        <p:txBody>
-          <a:bodyPr wrap="none" anchor="t" lIns="0" rIns="0" tIns="0" bIns="0">
+            <a:off x="1051560" y="3904487"/>
+            <a:ext cx="6217920" cy="274320"/>
+          </a:xfrm>
+          <a:prstGeom prst="rect">
+            <a:avLst/>
+          </a:prstGeom>
+          <a:noFill/>
+        </p:spPr>
+        <p:txBody>
+          <a:bodyPr wrap="square" anchor="t" lIns="0" rIns="0" tIns="0" bIns="0">
             <a:spAutoFit/>
           </a:bodyPr>
           <a:lstStyle/>
@@ -6984,16 +6945,6 @@
               </a:rPr>
               <a:t>✓ </a:t>
             </a:r>
-          </a:p>
-          <a:p>
-            <a:pPr algn="l">
-              <a:lnSpc>
-                <a:spcPct val="112000"/>
-              </a:lnSpc>
-              <a:spcAft>
-                <a:spcPts val="500"/>
-              </a:spcAft>
-            </a:pPr>
             <a:r>
               <a:rPr sz="1200" b="0" i="0">
                 <a:solidFill>
@@ -7016,16 +6967,16 @@
         </p:nvSpPr>
         <p:spPr>
           <a:xfrm>
-            <a:off x="914400" y="4229099"/>
-            <a:ext cx="6400800" cy="274320"/>
-          </a:xfrm>
-          <a:prstGeom prst="rect">
-            <a:avLst/>
-          </a:prstGeom>
-          <a:noFill/>
-        </p:spPr>
-        <p:txBody>
-          <a:bodyPr wrap="none" anchor="t" lIns="0" rIns="0" tIns="0" bIns="0">
+            <a:off x="1051560" y="4229099"/>
+            <a:ext cx="6217920" cy="274320"/>
+          </a:xfrm>
+          <a:prstGeom prst="rect">
+            <a:avLst/>
+          </a:prstGeom>
+          <a:noFill/>
+        </p:spPr>
+        <p:txBody>
+          <a:bodyPr wrap="square" anchor="t" lIns="0" rIns="0" tIns="0" bIns="0">
             <a:spAutoFit/>
           </a:bodyPr>
           <a:lstStyle/>
@@ -7049,16 +7000,6 @@
               </a:rPr>
               <a:t>✓ </a:t>
             </a:r>
-          </a:p>
-          <a:p>
-            <a:pPr algn="l">
-              <a:lnSpc>
-                <a:spcPct val="112000"/>
-              </a:lnSpc>
-              <a:spcAft>
-                <a:spcPts val="500"/>
-              </a:spcAft>
-            </a:pPr>
             <a:r>
               <a:rPr sz="1200" b="0" i="0">
                 <a:solidFill>
@@ -7081,16 +7022,16 @@
         </p:nvSpPr>
         <p:spPr>
           <a:xfrm>
-            <a:off x="914400" y="4553711"/>
-            <a:ext cx="6400800" cy="274320"/>
-          </a:xfrm>
-          <a:prstGeom prst="rect">
-            <a:avLst/>
-          </a:prstGeom>
-          <a:noFill/>
-        </p:spPr>
-        <p:txBody>
-          <a:bodyPr wrap="none" anchor="t" lIns="0" rIns="0" tIns="0" bIns="0">
+            <a:off x="1051560" y="4553711"/>
+            <a:ext cx="6217920" cy="274320"/>
+          </a:xfrm>
+          <a:prstGeom prst="rect">
+            <a:avLst/>
+          </a:prstGeom>
+          <a:noFill/>
+        </p:spPr>
+        <p:txBody>
+          <a:bodyPr wrap="square" anchor="t" lIns="0" rIns="0" tIns="0" bIns="0">
             <a:spAutoFit/>
           </a:bodyPr>
           <a:lstStyle/>
@@ -7114,16 +7055,6 @@
               </a:rPr>
               <a:t>✓ </a:t>
             </a:r>
-          </a:p>
-          <a:p>
-            <a:pPr algn="l">
-              <a:lnSpc>
-                <a:spcPct val="112000"/>
-              </a:lnSpc>
-              <a:spcAft>
-                <a:spcPts val="500"/>
-              </a:spcAft>
-            </a:pPr>
             <a:r>
               <a:rPr sz="1200" b="0" i="0">
                 <a:solidFill>
@@ -7146,16 +7077,16 @@
         </p:nvSpPr>
         <p:spPr>
           <a:xfrm>
-            <a:off x="914400" y="5042915"/>
-            <a:ext cx="6400800" cy="274320"/>
-          </a:xfrm>
-          <a:prstGeom prst="rect">
-            <a:avLst/>
-          </a:prstGeom>
-          <a:noFill/>
-        </p:spPr>
-        <p:txBody>
-          <a:bodyPr wrap="none" anchor="t" lIns="0" rIns="0" tIns="0" bIns="0">
+            <a:off x="1051560" y="5042915"/>
+            <a:ext cx="6217920" cy="274320"/>
+          </a:xfrm>
+          <a:prstGeom prst="rect">
+            <a:avLst/>
+          </a:prstGeom>
+          <a:noFill/>
+        </p:spPr>
+        <p:txBody>
+          <a:bodyPr wrap="square" anchor="t" lIns="0" rIns="0" tIns="0" bIns="0">
             <a:spAutoFit/>
           </a:bodyPr>
           <a:lstStyle/>
@@ -7179,16 +7110,6 @@
               </a:rPr>
               <a:t>➜ </a:t>
             </a:r>
-          </a:p>
-          <a:p>
-            <a:pPr algn="l">
-              <a:lnSpc>
-                <a:spcPct val="112000"/>
-              </a:lnSpc>
-              <a:spcAft>
-                <a:spcPts val="500"/>
-              </a:spcAft>
-            </a:pPr>
             <a:r>
               <a:rPr sz="1200" b="0" i="0">
                 <a:solidFill>
@@ -7211,16 +7132,16 @@
         </p:nvSpPr>
         <p:spPr>
           <a:xfrm>
-            <a:off x="914400" y="5367527"/>
-            <a:ext cx="6400800" cy="274320"/>
-          </a:xfrm>
-          <a:prstGeom prst="rect">
-            <a:avLst/>
-          </a:prstGeom>
-          <a:noFill/>
-        </p:spPr>
-        <p:txBody>
-          <a:bodyPr wrap="none" anchor="t" lIns="0" rIns="0" tIns="0" bIns="0">
+            <a:off x="1051560" y="5367527"/>
+            <a:ext cx="6217920" cy="274320"/>
+          </a:xfrm>
+          <a:prstGeom prst="rect">
+            <a:avLst/>
+          </a:prstGeom>
+          <a:noFill/>
+        </p:spPr>
+        <p:txBody>
+          <a:bodyPr wrap="square" anchor="t" lIns="0" rIns="0" tIns="0" bIns="0">
             <a:spAutoFit/>
           </a:bodyPr>
           <a:lstStyle/>
@@ -7244,16 +7165,6 @@
               </a:rPr>
               <a:t>➜ </a:t>
             </a:r>
-          </a:p>
-          <a:p>
-            <a:pPr algn="l">
-              <a:lnSpc>
-                <a:spcPct val="112000"/>
-              </a:lnSpc>
-              <a:spcAft>
-                <a:spcPts val="500"/>
-              </a:spcAft>
-            </a:pPr>
             <a:r>
               <a:rPr sz="1200" b="0" i="0">
                 <a:solidFill>
@@ -8096,8 +8007,8 @@
         </p:blipFill>
         <p:spPr>
           <a:xfrm>
-            <a:off x="1982341" y="2011680"/>
-            <a:ext cx="8227012" cy="3108960"/>
+            <a:off x="1989673" y="2011680"/>
+            <a:ext cx="8212347" cy="3108960"/>
           </a:xfrm>
           <a:prstGeom prst="rect">
             <a:avLst/>
@@ -13965,7 +13876,7 @@
         <p:spPr>
           <a:xfrm>
             <a:off x="640080" y="1920240"/>
-            <a:ext cx="5669280" cy="1371600"/>
+            <a:ext cx="5318607" cy="1371600"/>
           </a:xfrm>
           <a:prstGeom prst="roundRect">
             <a:avLst>
@@ -14055,7 +13966,7 @@
         <p:spPr>
           <a:xfrm>
             <a:off x="896112" y="2084832"/>
-            <a:ext cx="5212080" cy="347472"/>
+            <a:ext cx="4861407" cy="347472"/>
           </a:xfrm>
           <a:prstGeom prst="rect">
             <a:avLst/>
@@ -14099,7 +14010,7 @@
         <p:spPr>
           <a:xfrm>
             <a:off x="896112" y="2487168"/>
-            <a:ext cx="5212080" cy="731520"/>
+            <a:ext cx="4861407" cy="731520"/>
           </a:xfrm>
           <a:prstGeom prst="rect">
             <a:avLst/>
@@ -14142,8 +14053,8 @@
         </p:nvSpPr>
         <p:spPr>
           <a:xfrm>
-            <a:off x="6583680" y="1920240"/>
-            <a:ext cx="5669280" cy="1371600"/>
+            <a:off x="6233007" y="1920240"/>
+            <a:ext cx="5318607" cy="1371600"/>
           </a:xfrm>
           <a:prstGeom prst="roundRect">
             <a:avLst>
@@ -14189,7 +14100,7 @@
         </p:nvSpPr>
         <p:spPr>
           <a:xfrm>
-            <a:off x="6583680" y="1920240"/>
+            <a:off x="6233007" y="1920240"/>
             <a:ext cx="73152" cy="1371600"/>
           </a:xfrm>
           <a:prstGeom prst="rect">
@@ -14232,8 +14143,8 @@
         </p:nvSpPr>
         <p:spPr>
           <a:xfrm>
-            <a:off x="6839712" y="2084832"/>
-            <a:ext cx="5212080" cy="347472"/>
+            <a:off x="6489039" y="2084832"/>
+            <a:ext cx="4861407" cy="347472"/>
           </a:xfrm>
           <a:prstGeom prst="rect">
             <a:avLst/>
@@ -14276,8 +14187,8 @@
         </p:nvSpPr>
         <p:spPr>
           <a:xfrm>
-            <a:off x="6839712" y="2487168"/>
-            <a:ext cx="5212080" cy="731520"/>
+            <a:off x="6489039" y="2487168"/>
+            <a:ext cx="4861407" cy="731520"/>
           </a:xfrm>
           <a:prstGeom prst="rect">
             <a:avLst/>
@@ -14321,7 +14232,7 @@
         <p:spPr>
           <a:xfrm>
             <a:off x="640080" y="3474720"/>
-            <a:ext cx="5669280" cy="1371600"/>
+            <a:ext cx="5318607" cy="1371600"/>
           </a:xfrm>
           <a:prstGeom prst="roundRect">
             <a:avLst>
@@ -14411,7 +14322,7 @@
         <p:spPr>
           <a:xfrm>
             <a:off x="896112" y="3639312"/>
-            <a:ext cx="5212080" cy="347472"/>
+            <a:ext cx="4861407" cy="347472"/>
           </a:xfrm>
           <a:prstGeom prst="rect">
             <a:avLst/>
@@ -14455,7 +14366,7 @@
         <p:spPr>
           <a:xfrm>
             <a:off x="896112" y="4041648"/>
-            <a:ext cx="5212080" cy="731520"/>
+            <a:ext cx="4861407" cy="731520"/>
           </a:xfrm>
           <a:prstGeom prst="rect">
             <a:avLst/>
@@ -14485,7 +14396,7 @@
                 <a:ea typeface="Microsoft JhengHei"/>
                 <a:cs typeface="Microsoft JhengHei"/>
               </a:rPr>
-              <a:t>Lorenz 曲線量化人員工時分配均等度，Gini = 0.042，確保排班公平可追溯。</a:t>
+              <a:t>Lorenz 曲線量化人員工時分配均等度，Gini = 0.031，確保排班公平可追溯。</a:t>
             </a:r>
           </a:p>
         </p:txBody>
@@ -14498,8 +14409,8 @@
         </p:nvSpPr>
         <p:spPr>
           <a:xfrm>
-            <a:off x="6583680" y="3474720"/>
-            <a:ext cx="5669280" cy="1371600"/>
+            <a:off x="6233007" y="3474720"/>
+            <a:ext cx="5318607" cy="1371600"/>
           </a:xfrm>
           <a:prstGeom prst="roundRect">
             <a:avLst>
@@ -14545,7 +14456,7 @@
         </p:nvSpPr>
         <p:spPr>
           <a:xfrm>
-            <a:off x="6583680" y="3474720"/>
+            <a:off x="6233007" y="3474720"/>
             <a:ext cx="73152" cy="1371600"/>
           </a:xfrm>
           <a:prstGeom prst="rect">
@@ -14588,8 +14499,8 @@
         </p:nvSpPr>
         <p:spPr>
           <a:xfrm>
-            <a:off x="6839712" y="3639312"/>
-            <a:ext cx="5212080" cy="347472"/>
+            <a:off x="6489039" y="3639312"/>
+            <a:ext cx="4861407" cy="347472"/>
           </a:xfrm>
           <a:prstGeom prst="rect">
             <a:avLst/>
@@ -14632,8 +14543,8 @@
         </p:nvSpPr>
         <p:spPr>
           <a:xfrm>
-            <a:off x="6839712" y="4041648"/>
-            <a:ext cx="5212080" cy="731520"/>
+            <a:off x="6489039" y="4041648"/>
+            <a:ext cx="4861407" cy="731520"/>
           </a:xfrm>
           <a:prstGeom prst="rect">
             <a:avLst/>
@@ -14663,7 +14574,7 @@
                 <a:ea typeface="Microsoft JhengHei"/>
                 <a:cs typeface="Microsoft JhengHei"/>
               </a:rPr>
-              <a:t>依累計趟次推估維護需求，可用度 &lt; 30% 自動排除於排班候選池。</a:t>
+              <a:t>依累計趟次推估維護需求，可用度 ≤ 15% 自動排除於排班候選池。</a:t>
             </a:r>
           </a:p>
         </p:txBody>
@@ -17684,7 +17595,7 @@
         <p:spPr>
           <a:xfrm>
             <a:off x="640080" y="1920240"/>
-            <a:ext cx="5669280" cy="1115568"/>
+            <a:ext cx="5318607" cy="1115568"/>
           </a:xfrm>
           <a:prstGeom prst="roundRect">
             <a:avLst>
@@ -17775,7 +17686,7 @@
         <p:spPr>
           <a:xfrm>
             <a:off x="1645920" y="2048256"/>
-            <a:ext cx="4480560" cy="320040"/>
+            <a:ext cx="4129887" cy="320040"/>
           </a:xfrm>
           <a:prstGeom prst="rect">
             <a:avLst/>
@@ -17819,7 +17730,7 @@
         <p:spPr>
           <a:xfrm>
             <a:off x="1645920" y="2414016"/>
-            <a:ext cx="4480560" cy="548640"/>
+            <a:ext cx="4129887" cy="548640"/>
           </a:xfrm>
           <a:prstGeom prst="rect">
             <a:avLst/>
@@ -17862,8 +17773,8 @@
         </p:nvSpPr>
         <p:spPr>
           <a:xfrm>
-            <a:off x="6583680" y="1920240"/>
-            <a:ext cx="5669280" cy="1115568"/>
+            <a:off x="6233007" y="1920240"/>
+            <a:ext cx="5318607" cy="1115568"/>
           </a:xfrm>
           <a:prstGeom prst="roundRect">
             <a:avLst>
@@ -17909,7 +17820,7 @@
         </p:nvSpPr>
         <p:spPr>
           <a:xfrm>
-            <a:off x="6766560" y="2029968"/>
+            <a:off x="6415887" y="2029968"/>
             <a:ext cx="822960" cy="548640"/>
           </a:xfrm>
           <a:prstGeom prst="rect">
@@ -17953,8 +17864,8 @@
         </p:nvSpPr>
         <p:spPr>
           <a:xfrm>
-            <a:off x="7589520" y="2048256"/>
-            <a:ext cx="4480560" cy="320040"/>
+            <a:off x="7238847" y="2048256"/>
+            <a:ext cx="4129887" cy="320040"/>
           </a:xfrm>
           <a:prstGeom prst="rect">
             <a:avLst/>
@@ -17997,8 +17908,8 @@
         </p:nvSpPr>
         <p:spPr>
           <a:xfrm>
-            <a:off x="7589520" y="2414016"/>
-            <a:ext cx="4480560" cy="548640"/>
+            <a:off x="7238847" y="2414016"/>
+            <a:ext cx="4129887" cy="548640"/>
           </a:xfrm>
           <a:prstGeom prst="rect">
             <a:avLst/>
@@ -18042,7 +17953,7 @@
         <p:spPr>
           <a:xfrm>
             <a:off x="640080" y="3200400"/>
-            <a:ext cx="5669280" cy="1115568"/>
+            <a:ext cx="5318607" cy="1115568"/>
           </a:xfrm>
           <a:prstGeom prst="roundRect">
             <a:avLst>
@@ -18133,7 +18044,7 @@
         <p:spPr>
           <a:xfrm>
             <a:off x="1645920" y="3328416"/>
-            <a:ext cx="4480560" cy="320040"/>
+            <a:ext cx="4129887" cy="320040"/>
           </a:xfrm>
           <a:prstGeom prst="rect">
             <a:avLst/>
@@ -18177,7 +18088,7 @@
         <p:spPr>
           <a:xfrm>
             <a:off x="1645920" y="3694176"/>
-            <a:ext cx="4480560" cy="548640"/>
+            <a:ext cx="4129887" cy="548640"/>
           </a:xfrm>
           <a:prstGeom prst="rect">
             <a:avLst/>
@@ -18220,8 +18131,8 @@
         </p:nvSpPr>
         <p:spPr>
           <a:xfrm>
-            <a:off x="6583680" y="3200400"/>
-            <a:ext cx="5669280" cy="1115568"/>
+            <a:off x="6233007" y="3200400"/>
+            <a:ext cx="5318607" cy="1115568"/>
           </a:xfrm>
           <a:prstGeom prst="roundRect">
             <a:avLst>
@@ -18267,7 +18178,7 @@
         </p:nvSpPr>
         <p:spPr>
           <a:xfrm>
-            <a:off x="6766560" y="3310128"/>
+            <a:off x="6415887" y="3310128"/>
             <a:ext cx="822960" cy="548640"/>
           </a:xfrm>
           <a:prstGeom prst="rect">
@@ -18311,8 +18222,8 @@
         </p:nvSpPr>
         <p:spPr>
           <a:xfrm>
-            <a:off x="7589520" y="3328416"/>
-            <a:ext cx="4480560" cy="320040"/>
+            <a:off x="7238847" y="3328416"/>
+            <a:ext cx="4129887" cy="320040"/>
           </a:xfrm>
           <a:prstGeom prst="rect">
             <a:avLst/>
@@ -18355,8 +18266,8 @@
         </p:nvSpPr>
         <p:spPr>
           <a:xfrm>
-            <a:off x="7589520" y="3694176"/>
-            <a:ext cx="4480560" cy="548640"/>
+            <a:off x="7238847" y="3694176"/>
+            <a:ext cx="4129887" cy="548640"/>
           </a:xfrm>
           <a:prstGeom prst="rect">
             <a:avLst/>
@@ -18386,7 +18297,7 @@
                 <a:ea typeface="Microsoft JhengHei"/>
                 <a:cs typeface="Microsoft JhengHei"/>
               </a:rPr>
-              <a:t>可用度 &lt; 30% 標記需維護，不進入候選池；每艦僅一組人員。</a:t>
+              <a:t>可用度 ≤ 15% 標記需維護，不進入候選池；每艦僅一組人員。</a:t>
             </a:r>
           </a:p>
         </p:txBody>
@@ -21078,7 +20989,7 @@
                 <a:ea typeface="Microsoft JhengHei"/>
                 <a:cs typeface="Microsoft JhengHei"/>
               </a:rPr>
-              <a:t>排班引擎 · 實機輸出</a:t>
+              <a:t>排班引擎 · 實機輸出 · 2026-06-07</a:t>
             </a:r>
           </a:p>
         </p:txBody>
@@ -21122,7 +21033,7 @@
                 <a:ea typeface="Microsoft JhengHei"/>
                 <a:cs typeface="Microsoft JhengHei"/>
               </a:rPr>
-              <a:t>今日實際執行：明日（2026-06-16）惡劣海況 59.2% → 外海縮減至 1 人</a:t>
+              <a:t>明日惡劣海況 38.5%，引擎自動配置外海 2 人</a:t>
             </a:r>
           </a:p>
         </p:txBody>
@@ -21770,7 +21681,7 @@
                 <a:ea typeface="Microsoft JhengHei"/>
                 <a:cs typeface="Consolas"/>
               </a:rPr>
-              <a:t>59.2%</a:t>
+              <a:t>38.5%</a:t>
             </a:r>
           </a:p>
         </p:txBody>
@@ -21948,7 +21859,7 @@
                 <a:ea typeface="Microsoft JhengHei"/>
                 <a:cs typeface="Consolas"/>
               </a:rPr>
-              <a:t>1</a:t>
+              <a:t>2</a:t>
             </a:r>
           </a:p>
         </p:txBody>
@@ -22005,8 +21916,8 @@
         </p:nvSpPr>
         <p:spPr>
           <a:xfrm>
-            <a:off x="640080" y="3017520"/>
-            <a:ext cx="1188720" cy="420624"/>
+            <a:off x="640080" y="2907792"/>
+            <a:ext cx="1188720" cy="384048"/>
           </a:xfrm>
           <a:prstGeom prst="rect">
             <a:avLst/>
@@ -22048,8 +21959,8 @@
         </p:nvSpPr>
         <p:spPr>
           <a:xfrm>
-            <a:off x="749808" y="3017520"/>
-            <a:ext cx="1005840" cy="420624"/>
+            <a:off x="749808" y="2907792"/>
+            <a:ext cx="1005840" cy="384048"/>
           </a:xfrm>
           <a:prstGeom prst="rect">
             <a:avLst/>
@@ -22092,8 +22003,8 @@
         </p:nvSpPr>
         <p:spPr>
           <a:xfrm>
-            <a:off x="1828800" y="3017520"/>
-            <a:ext cx="1828800" cy="420624"/>
+            <a:off x="1828800" y="2907792"/>
+            <a:ext cx="1828800" cy="384048"/>
           </a:xfrm>
           <a:prstGeom prst="rect">
             <a:avLst/>
@@ -22135,8 +22046,8 @@
         </p:nvSpPr>
         <p:spPr>
           <a:xfrm>
-            <a:off x="1938528" y="3017520"/>
-            <a:ext cx="1645920" cy="420624"/>
+            <a:off x="1938528" y="2907792"/>
+            <a:ext cx="1645920" cy="384048"/>
           </a:xfrm>
           <a:prstGeom prst="rect">
             <a:avLst/>
@@ -22179,8 +22090,8 @@
         </p:nvSpPr>
         <p:spPr>
           <a:xfrm>
-            <a:off x="3657600" y="3017520"/>
-            <a:ext cx="1828800" cy="420624"/>
+            <a:off x="3657600" y="2907792"/>
+            <a:ext cx="1828800" cy="384048"/>
           </a:xfrm>
           <a:prstGeom prst="rect">
             <a:avLst/>
@@ -22222,8 +22133,8 @@
         </p:nvSpPr>
         <p:spPr>
           <a:xfrm>
-            <a:off x="3767328" y="3017520"/>
-            <a:ext cx="1645920" cy="420624"/>
+            <a:off x="3767328" y="2907792"/>
+            <a:ext cx="1645920" cy="384048"/>
           </a:xfrm>
           <a:prstGeom prst="rect">
             <a:avLst/>
@@ -22266,8 +22177,8 @@
         </p:nvSpPr>
         <p:spPr>
           <a:xfrm>
-            <a:off x="5486400" y="3017520"/>
-            <a:ext cx="1188720" cy="420624"/>
+            <a:off x="5486400" y="2907792"/>
+            <a:ext cx="1188720" cy="384048"/>
           </a:xfrm>
           <a:prstGeom prst="rect">
             <a:avLst/>
@@ -22309,8 +22220,8 @@
         </p:nvSpPr>
         <p:spPr>
           <a:xfrm>
-            <a:off x="5596128" y="3017520"/>
-            <a:ext cx="1005840" cy="420624"/>
+            <a:off x="5596128" y="2907792"/>
+            <a:ext cx="1005840" cy="384048"/>
           </a:xfrm>
           <a:prstGeom prst="rect">
             <a:avLst/>
@@ -22353,8 +22264,8 @@
         </p:nvSpPr>
         <p:spPr>
           <a:xfrm>
-            <a:off x="6675120" y="3017520"/>
-            <a:ext cx="1554480" cy="420624"/>
+            <a:off x="6675120" y="2907792"/>
+            <a:ext cx="1554480" cy="384048"/>
           </a:xfrm>
           <a:prstGeom prst="rect">
             <a:avLst/>
@@ -22396,8 +22307,8 @@
         </p:nvSpPr>
         <p:spPr>
           <a:xfrm>
-            <a:off x="6784848" y="3017520"/>
-            <a:ext cx="1371600" cy="420624"/>
+            <a:off x="6784848" y="2907792"/>
+            <a:ext cx="1371600" cy="384048"/>
           </a:xfrm>
           <a:prstGeom prst="rect">
             <a:avLst/>
@@ -22440,8 +22351,8 @@
         </p:nvSpPr>
         <p:spPr>
           <a:xfrm>
-            <a:off x="8229600" y="3017520"/>
-            <a:ext cx="3322015" cy="420624"/>
+            <a:off x="8229600" y="2907792"/>
+            <a:ext cx="3322015" cy="384048"/>
           </a:xfrm>
           <a:prstGeom prst="rect">
             <a:avLst/>
@@ -22483,8 +22394,8 @@
         </p:nvSpPr>
         <p:spPr>
           <a:xfrm>
-            <a:off x="8339328" y="3017520"/>
-            <a:ext cx="3139135" cy="420624"/>
+            <a:off x="8339328" y="2907792"/>
+            <a:ext cx="3139135" cy="384048"/>
           </a:xfrm>
           <a:prstGeom prst="rect">
             <a:avLst/>
@@ -22527,8 +22438,8 @@
         </p:nvSpPr>
         <p:spPr>
           <a:xfrm>
-            <a:off x="640080" y="3438144"/>
-            <a:ext cx="10911535" cy="365760"/>
+            <a:off x="640080" y="3291840"/>
+            <a:ext cx="10911535" cy="301752"/>
           </a:xfrm>
           <a:prstGeom prst="rect">
             <a:avLst/>
@@ -22570,8 +22481,8 @@
         </p:nvSpPr>
         <p:spPr>
           <a:xfrm>
-            <a:off x="749808" y="3438144"/>
-            <a:ext cx="1005840" cy="365760"/>
+            <a:off x="749808" y="3291840"/>
+            <a:ext cx="1005840" cy="301752"/>
           </a:xfrm>
           <a:prstGeom prst="rect">
             <a:avLst/>
@@ -22614,8 +22525,8 @@
         </p:nvSpPr>
         <p:spPr>
           <a:xfrm>
-            <a:off x="1938528" y="3438144"/>
-            <a:ext cx="1645920" cy="365760"/>
+            <a:off x="1938528" y="3291840"/>
+            <a:ext cx="1645920" cy="301752"/>
           </a:xfrm>
           <a:prstGeom prst="rect">
             <a:avLst/>
@@ -22645,7 +22556,7 @@
                 <a:ea typeface="Microsoft JhengHei"/>
                 <a:cs typeface="Microsoft JhengHei"/>
               </a:rPr>
-              <a:t>Employee</a:t>
+              <a:t>林佳</a:t>
             </a:r>
           </a:p>
         </p:txBody>
@@ -22658,8 +22569,8 @@
         </p:nvSpPr>
         <p:spPr>
           <a:xfrm>
-            <a:off x="3767328" y="3438144"/>
-            <a:ext cx="1645920" cy="365760"/>
+            <a:off x="3767328" y="3291840"/>
+            <a:ext cx="1645920" cy="301752"/>
           </a:xfrm>
           <a:prstGeom prst="rect">
             <a:avLst/>
@@ -22689,7 +22600,7 @@
                 <a:ea typeface="Microsoft JhengHei"/>
                 <a:cs typeface="Consolas"/>
               </a:rPr>
-              <a:t>MAR-008</a:t>
+              <a:t>MAR-006</a:t>
             </a:r>
           </a:p>
         </p:txBody>
@@ -22702,8 +22613,8 @@
         </p:nvSpPr>
         <p:spPr>
           <a:xfrm>
-            <a:off x="5596128" y="3438144"/>
-            <a:ext cx="1005840" cy="365760"/>
+            <a:off x="5596128" y="3291840"/>
+            <a:ext cx="1005840" cy="301752"/>
           </a:xfrm>
           <a:prstGeom prst="rect">
             <a:avLst/>
@@ -22746,8 +22657,8 @@
         </p:nvSpPr>
         <p:spPr>
           <a:xfrm>
-            <a:off x="6784848" y="3438144"/>
-            <a:ext cx="1371600" cy="365760"/>
+            <a:off x="6784848" y="3291840"/>
+            <a:ext cx="1371600" cy="301752"/>
           </a:xfrm>
           <a:prstGeom prst="rect">
             <a:avLst/>
@@ -22777,7 +22688,7 @@
                 <a:ea typeface="Microsoft JhengHei"/>
                 <a:cs typeface="Microsoft JhengHei"/>
               </a:rPr>
-              <a:t>11.1%</a:t>
+              <a:t>8.3%</a:t>
             </a:r>
           </a:p>
         </p:txBody>
@@ -22790,8 +22701,8 @@
         </p:nvSpPr>
         <p:spPr>
           <a:xfrm>
-            <a:off x="8339328" y="3438144"/>
-            <a:ext cx="3139135" cy="365760"/>
+            <a:off x="8339328" y="3291840"/>
+            <a:ext cx="3139135" cy="301752"/>
           </a:xfrm>
           <a:prstGeom prst="rect">
             <a:avLst/>
@@ -22834,8 +22745,8 @@
         </p:nvSpPr>
         <p:spPr>
           <a:xfrm>
-            <a:off x="640080" y="3803904"/>
-            <a:ext cx="10911535" cy="365760"/>
+            <a:off x="640080" y="3593592"/>
+            <a:ext cx="10911535" cy="301752"/>
           </a:xfrm>
           <a:prstGeom prst="rect">
             <a:avLst/>
@@ -22877,8 +22788,8 @@
         </p:nvSpPr>
         <p:spPr>
           <a:xfrm>
-            <a:off x="749808" y="3803904"/>
-            <a:ext cx="1005840" cy="365760"/>
+            <a:off x="749808" y="3593592"/>
+            <a:ext cx="1005840" cy="301752"/>
           </a:xfrm>
           <a:prstGeom prst="rect">
             <a:avLst/>
@@ -22902,13 +22813,13 @@
             <a:r>
               <a:rPr sz="1150" b="1" i="0">
                 <a:solidFill>
-                  <a:srgbClr val="34506A"/>
-                </a:solidFill>
-                <a:latin typeface="Microsoft JhengHei"/>
-                <a:ea typeface="Microsoft JhengHei"/>
-                <a:cs typeface="Microsoft JhengHei"/>
-              </a:rPr>
-              <a:t>近海</a:t>
+                  <a:srgbClr val="BC5B41"/>
+                </a:solidFill>
+                <a:latin typeface="Microsoft JhengHei"/>
+                <a:ea typeface="Microsoft JhengHei"/>
+                <a:cs typeface="Microsoft JhengHei"/>
+              </a:rPr>
+              <a:t>外海</a:t>
             </a:r>
           </a:p>
         </p:txBody>
@@ -22921,8 +22832,8 @@
         </p:nvSpPr>
         <p:spPr>
           <a:xfrm>
-            <a:off x="1938528" y="3803904"/>
-            <a:ext cx="1645920" cy="365760"/>
+            <a:off x="1938528" y="3593592"/>
+            <a:ext cx="1645920" cy="301752"/>
           </a:xfrm>
           <a:prstGeom prst="rect">
             <a:avLst/>
@@ -22952,7 +22863,7 @@
                 <a:ea typeface="Microsoft JhengHei"/>
                 <a:cs typeface="Microsoft JhengHei"/>
               </a:rPr>
-              <a:t>林佳</a:t>
+              <a:t>劉燕</a:t>
             </a:r>
           </a:p>
         </p:txBody>
@@ -22965,8 +22876,8 @@
         </p:nvSpPr>
         <p:spPr>
           <a:xfrm>
-            <a:off x="3767328" y="3803904"/>
-            <a:ext cx="1645920" cy="365760"/>
+            <a:off x="3767328" y="3593592"/>
+            <a:ext cx="1645920" cy="301752"/>
           </a:xfrm>
           <a:prstGeom prst="rect">
             <a:avLst/>
@@ -22996,7 +22907,7 @@
                 <a:ea typeface="Microsoft JhengHei"/>
                 <a:cs typeface="Consolas"/>
               </a:rPr>
-              <a:t>MAR-003</a:t>
+              <a:t>MAR-007</a:t>
             </a:r>
           </a:p>
         </p:txBody>
@@ -23009,8 +22920,8 @@
         </p:nvSpPr>
         <p:spPr>
           <a:xfrm>
-            <a:off x="5596128" y="3803904"/>
-            <a:ext cx="1005840" cy="365760"/>
+            <a:off x="5596128" y="3593592"/>
+            <a:ext cx="1005840" cy="301752"/>
           </a:xfrm>
           <a:prstGeom prst="rect">
             <a:avLst/>
@@ -23040,7 +22951,7 @@
                 <a:ea typeface="Microsoft JhengHei"/>
                 <a:cs typeface="Microsoft JhengHei"/>
               </a:rPr>
-              <a:t>17</a:t>
+              <a:t>21</a:t>
             </a:r>
           </a:p>
         </p:txBody>
@@ -23053,8 +22964,8 @@
         </p:nvSpPr>
         <p:spPr>
           <a:xfrm>
-            <a:off x="6784848" y="3803904"/>
-            <a:ext cx="1371600" cy="365760"/>
+            <a:off x="6784848" y="3593592"/>
+            <a:ext cx="1371600" cy="301752"/>
           </a:xfrm>
           <a:prstGeom prst="rect">
             <a:avLst/>
@@ -23084,7 +22995,7 @@
                 <a:ea typeface="Microsoft JhengHei"/>
                 <a:cs typeface="Microsoft JhengHei"/>
               </a:rPr>
-              <a:t>29.4%</a:t>
+              <a:t>7.7%</a:t>
             </a:r>
           </a:p>
         </p:txBody>
@@ -23097,8 +23008,8 @@
         </p:nvSpPr>
         <p:spPr>
           <a:xfrm>
-            <a:off x="8339328" y="3803904"/>
-            <a:ext cx="3139135" cy="365760"/>
+            <a:off x="8339328" y="3593592"/>
+            <a:ext cx="3139135" cy="301752"/>
           </a:xfrm>
           <a:prstGeom prst="rect">
             <a:avLst/>
@@ -23128,7 +23039,7 @@
                 <a:ea typeface="Microsoft JhengHei"/>
                 <a:cs typeface="Microsoft JhengHei"/>
               </a:rPr>
-              <a:t>疲勞適中，配置近海任務</a:t>
+              <a:t>低疲勞且外海暴露低，適合輪派外海</a:t>
             </a:r>
           </a:p>
         </p:txBody>
@@ -23141,8 +23052,8 @@
         </p:nvSpPr>
         <p:spPr>
           <a:xfrm>
-            <a:off x="640080" y="4169664"/>
-            <a:ext cx="10911535" cy="365760"/>
+            <a:off x="640080" y="3895344"/>
+            <a:ext cx="10911535" cy="301752"/>
           </a:xfrm>
           <a:prstGeom prst="rect">
             <a:avLst/>
@@ -23184,8 +23095,8 @@
         </p:nvSpPr>
         <p:spPr>
           <a:xfrm>
-            <a:off x="749808" y="4169664"/>
-            <a:ext cx="1005840" cy="365760"/>
+            <a:off x="749808" y="3895344"/>
+            <a:ext cx="1005840" cy="301752"/>
           </a:xfrm>
           <a:prstGeom prst="rect">
             <a:avLst/>
@@ -23228,8 +23139,8 @@
         </p:nvSpPr>
         <p:spPr>
           <a:xfrm>
-            <a:off x="1938528" y="4169664"/>
-            <a:ext cx="1645920" cy="365760"/>
+            <a:off x="1938528" y="3895344"/>
+            <a:ext cx="1645920" cy="301752"/>
           </a:xfrm>
           <a:prstGeom prst="rect">
             <a:avLst/>
@@ -23259,7 +23170,7 @@
                 <a:ea typeface="Microsoft JhengHei"/>
                 <a:cs typeface="Microsoft JhengHei"/>
               </a:rPr>
-              <a:t>黃峻</a:t>
+              <a:t>鄭宇</a:t>
             </a:r>
           </a:p>
         </p:txBody>
@@ -23272,8 +23183,8 @@
         </p:nvSpPr>
         <p:spPr>
           <a:xfrm>
-            <a:off x="3767328" y="4169664"/>
-            <a:ext cx="1645920" cy="365760"/>
+            <a:off x="3767328" y="3895344"/>
+            <a:ext cx="1645920" cy="301752"/>
           </a:xfrm>
           <a:prstGeom prst="rect">
             <a:avLst/>
@@ -23303,7 +23214,7 @@
                 <a:ea typeface="Microsoft JhengHei"/>
                 <a:cs typeface="Consolas"/>
               </a:rPr>
-              <a:t>MAR-004</a:t>
+              <a:t>MAR-003</a:t>
             </a:r>
           </a:p>
         </p:txBody>
@@ -23316,8 +23227,8 @@
         </p:nvSpPr>
         <p:spPr>
           <a:xfrm>
-            <a:off x="5596128" y="4169664"/>
-            <a:ext cx="1005840" cy="365760"/>
+            <a:off x="5596128" y="3895344"/>
+            <a:ext cx="1005840" cy="301752"/>
           </a:xfrm>
           <a:prstGeom prst="rect">
             <a:avLst/>
@@ -23360,8 +23271,8 @@
         </p:nvSpPr>
         <p:spPr>
           <a:xfrm>
-            <a:off x="6784848" y="4169664"/>
-            <a:ext cx="1371600" cy="365760"/>
+            <a:off x="6784848" y="3895344"/>
+            <a:ext cx="1371600" cy="301752"/>
           </a:xfrm>
           <a:prstGeom prst="rect">
             <a:avLst/>
@@ -23391,7 +23302,7 @@
                 <a:ea typeface="Microsoft JhengHei"/>
                 <a:cs typeface="Microsoft JhengHei"/>
               </a:rPr>
-              <a:t>35.3%</a:t>
+              <a:t>20.0%</a:t>
             </a:r>
           </a:p>
         </p:txBody>
@@ -23404,8 +23315,8 @@
         </p:nvSpPr>
         <p:spPr>
           <a:xfrm>
-            <a:off x="8339328" y="4169664"/>
-            <a:ext cx="3139135" cy="365760"/>
+            <a:off x="8339328" y="3895344"/>
+            <a:ext cx="3139135" cy="301752"/>
           </a:xfrm>
           <a:prstGeom prst="rect">
             <a:avLst/>
@@ -23448,8 +23359,8 @@
         </p:nvSpPr>
         <p:spPr>
           <a:xfrm>
-            <a:off x="640080" y="4535424"/>
-            <a:ext cx="10911535" cy="365760"/>
+            <a:off x="640080" y="4197096"/>
+            <a:ext cx="10911535" cy="301752"/>
           </a:xfrm>
           <a:prstGeom prst="rect">
             <a:avLst/>
@@ -23491,8 +23402,8 @@
         </p:nvSpPr>
         <p:spPr>
           <a:xfrm>
-            <a:off x="749808" y="4535424"/>
-            <a:ext cx="1005840" cy="365760"/>
+            <a:off x="749808" y="4197096"/>
+            <a:ext cx="1005840" cy="301752"/>
           </a:xfrm>
           <a:prstGeom prst="rect">
             <a:avLst/>
@@ -23535,8 +23446,8 @@
         </p:nvSpPr>
         <p:spPr>
           <a:xfrm>
-            <a:off x="1938528" y="4535424"/>
-            <a:ext cx="1645920" cy="365760"/>
+            <a:off x="1938528" y="4197096"/>
+            <a:ext cx="1645920" cy="301752"/>
           </a:xfrm>
           <a:prstGeom prst="rect">
             <a:avLst/>
@@ -23566,7 +23477,7 @@
                 <a:ea typeface="Microsoft JhengHei"/>
                 <a:cs typeface="Microsoft JhengHei"/>
               </a:rPr>
-              <a:t>Admin</a:t>
+              <a:t>孫芳</a:t>
             </a:r>
           </a:p>
         </p:txBody>
@@ -23579,8 +23490,8 @@
         </p:nvSpPr>
         <p:spPr>
           <a:xfrm>
-            <a:off x="3767328" y="4535424"/>
-            <a:ext cx="1645920" cy="365760"/>
+            <a:off x="3767328" y="4197096"/>
+            <a:ext cx="1645920" cy="301752"/>
           </a:xfrm>
           <a:prstGeom prst="rect">
             <a:avLst/>
@@ -23610,7 +23521,7 @@
                 <a:ea typeface="Microsoft JhengHei"/>
                 <a:cs typeface="Consolas"/>
               </a:rPr>
-              <a:t>MAR-005</a:t>
+              <a:t>MAR-004</a:t>
             </a:r>
           </a:p>
         </p:txBody>
@@ -23623,8 +23534,8 @@
         </p:nvSpPr>
         <p:spPr>
           <a:xfrm>
-            <a:off x="5596128" y="4535424"/>
-            <a:ext cx="1005840" cy="365760"/>
+            <a:off x="5596128" y="4197096"/>
+            <a:ext cx="1005840" cy="301752"/>
           </a:xfrm>
           <a:prstGeom prst="rect">
             <a:avLst/>
@@ -23654,7 +23565,7 @@
                 <a:ea typeface="Microsoft JhengHei"/>
                 <a:cs typeface="Microsoft JhengHei"/>
               </a:rPr>
-              <a:t>20</a:t>
+              <a:t>18</a:t>
             </a:r>
           </a:p>
         </p:txBody>
@@ -23667,8 +23578,8 @@
         </p:nvSpPr>
         <p:spPr>
           <a:xfrm>
-            <a:off x="6784848" y="4535424"/>
-            <a:ext cx="1371600" cy="365760"/>
+            <a:off x="6784848" y="4197096"/>
+            <a:ext cx="1371600" cy="301752"/>
           </a:xfrm>
           <a:prstGeom prst="rect">
             <a:avLst/>
@@ -23698,7 +23609,7 @@
                 <a:ea typeface="Microsoft JhengHei"/>
                 <a:cs typeface="Microsoft JhengHei"/>
               </a:rPr>
-              <a:t>30.0%</a:t>
+              <a:t>33.3%</a:t>
             </a:r>
           </a:p>
         </p:txBody>
@@ -23711,8 +23622,8 @@
         </p:nvSpPr>
         <p:spPr>
           <a:xfrm>
-            <a:off x="8339328" y="4535424"/>
-            <a:ext cx="3139135" cy="365760"/>
+            <a:off x="8339328" y="4197096"/>
+            <a:ext cx="3139135" cy="301752"/>
           </a:xfrm>
           <a:prstGeom prst="rect">
             <a:avLst/>
@@ -23755,8 +23666,8 @@
         </p:nvSpPr>
         <p:spPr>
           <a:xfrm>
-            <a:off x="640080" y="4901184"/>
-            <a:ext cx="10911535" cy="365760"/>
+            <a:off x="640080" y="4498848"/>
+            <a:ext cx="10911535" cy="301752"/>
           </a:xfrm>
           <a:prstGeom prst="rect">
             <a:avLst/>
@@ -23798,8 +23709,8 @@
         </p:nvSpPr>
         <p:spPr>
           <a:xfrm>
-            <a:off x="749808" y="4901184"/>
-            <a:ext cx="1005840" cy="365760"/>
+            <a:off x="749808" y="4498848"/>
+            <a:ext cx="1005840" cy="301752"/>
           </a:xfrm>
           <a:prstGeom prst="rect">
             <a:avLst/>
@@ -23823,13 +23734,13 @@
             <a:r>
               <a:rPr sz="1150" b="1" i="0">
                 <a:solidFill>
-                  <a:srgbClr val="4E8C8A"/>
-                </a:solidFill>
-                <a:latin typeface="Microsoft JhengHei"/>
-                <a:ea typeface="Microsoft JhengHei"/>
-                <a:cs typeface="Microsoft JhengHei"/>
-              </a:rPr>
-              <a:t>港口</a:t>
+                  <a:srgbClr val="34506A"/>
+                </a:solidFill>
+                <a:latin typeface="Microsoft JhengHei"/>
+                <a:ea typeface="Microsoft JhengHei"/>
+                <a:cs typeface="Microsoft JhengHei"/>
+              </a:rPr>
+              <a:t>近海</a:t>
             </a:r>
           </a:p>
         </p:txBody>
@@ -23842,8 +23753,8 @@
         </p:nvSpPr>
         <p:spPr>
           <a:xfrm>
-            <a:off x="1938528" y="4901184"/>
-            <a:ext cx="1645920" cy="365760"/>
+            <a:off x="1938528" y="4498848"/>
+            <a:ext cx="1645920" cy="301752"/>
           </a:xfrm>
           <a:prstGeom prst="rect">
             <a:avLst/>
@@ -23873,7 +23784,7 @@
                 <a:ea typeface="Microsoft JhengHei"/>
                 <a:cs typeface="Microsoft JhengHei"/>
               </a:rPr>
-              <a:t>陳偉</a:t>
+              <a:t>吳超</a:t>
             </a:r>
           </a:p>
         </p:txBody>
@@ -23886,8 +23797,8 @@
         </p:nvSpPr>
         <p:spPr>
           <a:xfrm>
-            <a:off x="3767328" y="4901184"/>
-            <a:ext cx="1645920" cy="365760"/>
+            <a:off x="3767328" y="4498848"/>
+            <a:ext cx="1645920" cy="301752"/>
           </a:xfrm>
           <a:prstGeom prst="rect">
             <a:avLst/>
@@ -23917,7 +23828,7 @@
                 <a:ea typeface="Microsoft JhengHei"/>
                 <a:cs typeface="Consolas"/>
               </a:rPr>
-              <a:t>MAR-001</a:t>
+              <a:t>MAR-005</a:t>
             </a:r>
           </a:p>
         </p:txBody>
@@ -23930,8 +23841,8 @@
         </p:nvSpPr>
         <p:spPr>
           <a:xfrm>
-            <a:off x="5596128" y="4901184"/>
-            <a:ext cx="1005840" cy="365760"/>
+            <a:off x="5596128" y="4498848"/>
+            <a:ext cx="1005840" cy="301752"/>
           </a:xfrm>
           <a:prstGeom prst="rect">
             <a:avLst/>
@@ -23961,7 +23872,7 @@
                 <a:ea typeface="Microsoft JhengHei"/>
                 <a:cs typeface="Microsoft JhengHei"/>
               </a:rPr>
-              <a:t>26</a:t>
+              <a:t>16</a:t>
             </a:r>
           </a:p>
         </p:txBody>
@@ -23974,8 +23885,8 @@
         </p:nvSpPr>
         <p:spPr>
           <a:xfrm>
-            <a:off x="6784848" y="4901184"/>
-            <a:ext cx="1371600" cy="365760"/>
+            <a:off x="6784848" y="4498848"/>
+            <a:ext cx="1371600" cy="301752"/>
           </a:xfrm>
           <a:prstGeom prst="rect">
             <a:avLst/>
@@ -24005,7 +23916,7 @@
                 <a:ea typeface="Microsoft JhengHei"/>
                 <a:cs typeface="Microsoft JhengHei"/>
               </a:rPr>
-              <a:t>11.1%</a:t>
+              <a:t>25.0%</a:t>
             </a:r>
           </a:p>
         </p:txBody>
@@ -24018,8 +23929,8 @@
         </p:nvSpPr>
         <p:spPr>
           <a:xfrm>
-            <a:off x="8339328" y="4901184"/>
-            <a:ext cx="3139135" cy="365760"/>
+            <a:off x="8339328" y="4498848"/>
+            <a:ext cx="3139135" cy="301752"/>
           </a:xfrm>
           <a:prstGeom prst="rect">
             <a:avLst/>
@@ -24049,7 +23960,7 @@
                 <a:ea typeface="Microsoft JhengHei"/>
                 <a:cs typeface="Microsoft JhengHei"/>
               </a:rPr>
-              <a:t>配置港口值守</a:t>
+              <a:t>疲勞適中，配置近海任務</a:t>
             </a:r>
           </a:p>
         </p:txBody>
@@ -24062,8 +23973,8 @@
         </p:nvSpPr>
         <p:spPr>
           <a:xfrm>
-            <a:off x="640080" y="5266944"/>
-            <a:ext cx="10911535" cy="365760"/>
+            <a:off x="640080" y="4800600"/>
+            <a:ext cx="10911535" cy="301752"/>
           </a:xfrm>
           <a:prstGeom prst="rect">
             <a:avLst/>
@@ -24105,8 +24016,8 @@
         </p:nvSpPr>
         <p:spPr>
           <a:xfrm>
-            <a:off x="749808" y="5266944"/>
-            <a:ext cx="1005840" cy="365760"/>
+            <a:off x="749808" y="4800600"/>
+            <a:ext cx="1005840" cy="301752"/>
           </a:xfrm>
           <a:prstGeom prst="rect">
             <a:avLst/>
@@ -24149,8 +24060,8 @@
         </p:nvSpPr>
         <p:spPr>
           <a:xfrm>
-            <a:off x="1938528" y="5266944"/>
-            <a:ext cx="1645920" cy="365760"/>
+            <a:off x="1938528" y="4800600"/>
+            <a:ext cx="1645920" cy="301752"/>
           </a:xfrm>
           <a:prstGeom prst="rect">
             <a:avLst/>
@@ -24180,7 +24091,7 @@
                 <a:ea typeface="Microsoft JhengHei"/>
                 <a:cs typeface="Microsoft JhengHei"/>
               </a:rPr>
-              <a:t>孫芳</a:t>
+              <a:t>陳偉</a:t>
             </a:r>
           </a:p>
         </p:txBody>
@@ -24193,8 +24104,8 @@
         </p:nvSpPr>
         <p:spPr>
           <a:xfrm>
-            <a:off x="3767328" y="5266944"/>
-            <a:ext cx="1645920" cy="365760"/>
+            <a:off x="3767328" y="4800600"/>
+            <a:ext cx="1645920" cy="301752"/>
           </a:xfrm>
           <a:prstGeom prst="rect">
             <a:avLst/>
@@ -24224,7 +24135,7 @@
                 <a:ea typeface="Microsoft JhengHei"/>
                 <a:cs typeface="Consolas"/>
               </a:rPr>
-              <a:t>MAR-002</a:t>
+              <a:t>MAR-001</a:t>
             </a:r>
           </a:p>
         </p:txBody>
@@ -24237,8 +24148,8 @@
         </p:nvSpPr>
         <p:spPr>
           <a:xfrm>
-            <a:off x="5596128" y="5266944"/>
-            <a:ext cx="1005840" cy="365760"/>
+            <a:off x="5596128" y="4800600"/>
+            <a:ext cx="1005840" cy="301752"/>
           </a:xfrm>
           <a:prstGeom prst="rect">
             <a:avLst/>
@@ -24268,7 +24179,7 @@
                 <a:ea typeface="Microsoft JhengHei"/>
                 <a:cs typeface="Microsoft JhengHei"/>
               </a:rPr>
-              <a:t>27</a:t>
+              <a:t>53</a:t>
             </a:r>
           </a:p>
         </p:txBody>
@@ -24281,8 +24192,8 @@
         </p:nvSpPr>
         <p:spPr>
           <a:xfrm>
-            <a:off x="6784848" y="5266944"/>
-            <a:ext cx="1371600" cy="365760"/>
+            <a:off x="6784848" y="4800600"/>
+            <a:ext cx="1371600" cy="301752"/>
           </a:xfrm>
           <a:prstGeom prst="rect">
             <a:avLst/>
@@ -24312,7 +24223,7 @@
                 <a:ea typeface="Microsoft JhengHei"/>
                 <a:cs typeface="Microsoft JhengHei"/>
               </a:rPr>
-              <a:t>30.8%</a:t>
+              <a:t>26.7%</a:t>
             </a:r>
           </a:p>
         </p:txBody>
@@ -24325,8 +24236,8 @@
         </p:nvSpPr>
         <p:spPr>
           <a:xfrm>
-            <a:off x="8339328" y="5266944"/>
-            <a:ext cx="3139135" cy="365760"/>
+            <a:off x="8339328" y="4800600"/>
+            <a:ext cx="3139135" cy="301752"/>
           </a:xfrm>
           <a:prstGeom prst="rect">
             <a:avLst/>
@@ -24356,7 +24267,7 @@
                 <a:ea typeface="Microsoft JhengHei"/>
                 <a:cs typeface="Microsoft JhengHei"/>
               </a:rPr>
-              <a:t>配置港口值守</a:t>
+              <a:t>疲勞偏高，配置港口輕負荷</a:t>
             </a:r>
           </a:p>
         </p:txBody>
@@ -24369,8 +24280,315 @@
         </p:nvSpPr>
         <p:spPr>
           <a:xfrm>
-            <a:off x="640080" y="3017520"/>
-            <a:ext cx="10911535" cy="2615184"/>
+            <a:off x="640080" y="5102352"/>
+            <a:ext cx="10911535" cy="301752"/>
+          </a:xfrm>
+          <a:prstGeom prst="rect">
+            <a:avLst/>
+          </a:prstGeom>
+          <a:solidFill>
+            <a:srgbClr val="FFFFFF"/>
+          </a:solidFill>
+          <a:ln>
+            <a:noFill/>
+          </a:ln>
+        </p:spPr>
+        <p:style>
+          <a:lnRef idx="1">
+            <a:schemeClr val="accent1"/>
+          </a:lnRef>
+          <a:fillRef idx="3">
+            <a:schemeClr val="accent1"/>
+          </a:fillRef>
+          <a:effectRef idx="2">
+            <a:schemeClr val="accent1"/>
+          </a:effectRef>
+          <a:fontRef idx="minor">
+            <a:schemeClr val="lt1"/>
+          </a:fontRef>
+        </p:style>
+        <p:txBody>
+          <a:bodyPr rtlCol="0" anchor="ctr"/>
+          <a:lstStyle/>
+          <a:p>
+            <a:pPr algn="ctr"/>
+          </a:p>
+        </p:txBody>
+      </p:sp>
+      <p:sp>
+        <p:nvSpPr>
+          <p:cNvPr id="79" name="TextBox 78"/>
+          <p:cNvSpPr txBox="1"/>
+          <p:nvPr/>
+        </p:nvSpPr>
+        <p:spPr>
+          <a:xfrm>
+            <a:off x="749808" y="5102352"/>
+            <a:ext cx="1005840" cy="301752"/>
+          </a:xfrm>
+          <a:prstGeom prst="rect">
+            <a:avLst/>
+          </a:prstGeom>
+          <a:noFill/>
+        </p:spPr>
+        <p:txBody>
+          <a:bodyPr wrap="square" anchor="ctr" lIns="0" rIns="0" tIns="0" bIns="0">
+            <a:spAutoFit/>
+          </a:bodyPr>
+          <a:lstStyle/>
+          <a:p>
+            <a:pPr algn="l">
+              <a:lnSpc>
+                <a:spcPct val="112000"/>
+              </a:lnSpc>
+              <a:spcAft>
+                <a:spcPts val="500"/>
+              </a:spcAft>
+            </a:pPr>
+            <a:r>
+              <a:rPr sz="1150" b="1" i="0">
+                <a:solidFill>
+                  <a:srgbClr val="4E8C8A"/>
+                </a:solidFill>
+                <a:latin typeface="Microsoft JhengHei"/>
+                <a:ea typeface="Microsoft JhengHei"/>
+                <a:cs typeface="Microsoft JhengHei"/>
+              </a:rPr>
+              <a:t>港口</a:t>
+            </a:r>
+          </a:p>
+        </p:txBody>
+      </p:sp>
+      <p:sp>
+        <p:nvSpPr>
+          <p:cNvPr id="80" name="TextBox 79"/>
+          <p:cNvSpPr txBox="1"/>
+          <p:nvPr/>
+        </p:nvSpPr>
+        <p:spPr>
+          <a:xfrm>
+            <a:off x="1938528" y="5102352"/>
+            <a:ext cx="1645920" cy="301752"/>
+          </a:xfrm>
+          <a:prstGeom prst="rect">
+            <a:avLst/>
+          </a:prstGeom>
+          <a:noFill/>
+        </p:spPr>
+        <p:txBody>
+          <a:bodyPr wrap="square" anchor="ctr" lIns="0" rIns="0" tIns="0" bIns="0">
+            <a:spAutoFit/>
+          </a:bodyPr>
+          <a:lstStyle/>
+          <a:p>
+            <a:pPr algn="l">
+              <a:lnSpc>
+                <a:spcPct val="112000"/>
+              </a:lnSpc>
+              <a:spcAft>
+                <a:spcPts val="500"/>
+              </a:spcAft>
+            </a:pPr>
+            <a:r>
+              <a:rPr sz="1150" b="0" i="0">
+                <a:solidFill>
+                  <a:srgbClr val="3D4D5A"/>
+                </a:solidFill>
+                <a:latin typeface="Microsoft JhengHei"/>
+                <a:ea typeface="Microsoft JhengHei"/>
+                <a:cs typeface="Microsoft JhengHei"/>
+              </a:rPr>
+              <a:t>黃峻</a:t>
+            </a:r>
+          </a:p>
+        </p:txBody>
+      </p:sp>
+      <p:sp>
+        <p:nvSpPr>
+          <p:cNvPr id="81" name="TextBox 80"/>
+          <p:cNvSpPr txBox="1"/>
+          <p:nvPr/>
+        </p:nvSpPr>
+        <p:spPr>
+          <a:xfrm>
+            <a:off x="3767328" y="5102352"/>
+            <a:ext cx="1645920" cy="301752"/>
+          </a:xfrm>
+          <a:prstGeom prst="rect">
+            <a:avLst/>
+          </a:prstGeom>
+          <a:noFill/>
+        </p:spPr>
+        <p:txBody>
+          <a:bodyPr wrap="square" anchor="ctr" lIns="0" rIns="0" tIns="0" bIns="0">
+            <a:spAutoFit/>
+          </a:bodyPr>
+          <a:lstStyle/>
+          <a:p>
+            <a:pPr algn="l">
+              <a:lnSpc>
+                <a:spcPct val="112000"/>
+              </a:lnSpc>
+              <a:spcAft>
+                <a:spcPts val="500"/>
+              </a:spcAft>
+            </a:pPr>
+            <a:r>
+              <a:rPr sz="1150" b="0" i="0">
+                <a:solidFill>
+                  <a:srgbClr val="3D4D5A"/>
+                </a:solidFill>
+                <a:latin typeface="Consolas"/>
+                <a:ea typeface="Microsoft JhengHei"/>
+                <a:cs typeface="Consolas"/>
+              </a:rPr>
+              <a:t>MAR-002</a:t>
+            </a:r>
+          </a:p>
+        </p:txBody>
+      </p:sp>
+      <p:sp>
+        <p:nvSpPr>
+          <p:cNvPr id="82" name="TextBox 81"/>
+          <p:cNvSpPr txBox="1"/>
+          <p:nvPr/>
+        </p:nvSpPr>
+        <p:spPr>
+          <a:xfrm>
+            <a:off x="5596128" y="5102352"/>
+            <a:ext cx="1005840" cy="301752"/>
+          </a:xfrm>
+          <a:prstGeom prst="rect">
+            <a:avLst/>
+          </a:prstGeom>
+          <a:noFill/>
+        </p:spPr>
+        <p:txBody>
+          <a:bodyPr wrap="square" anchor="ctr" lIns="0" rIns="0" tIns="0" bIns="0">
+            <a:spAutoFit/>
+          </a:bodyPr>
+          <a:lstStyle/>
+          <a:p>
+            <a:pPr algn="ctr">
+              <a:lnSpc>
+                <a:spcPct val="112000"/>
+              </a:lnSpc>
+              <a:spcAft>
+                <a:spcPts val="500"/>
+              </a:spcAft>
+            </a:pPr>
+            <a:r>
+              <a:rPr sz="1150" b="0" i="0">
+                <a:solidFill>
+                  <a:srgbClr val="3D4D5A"/>
+                </a:solidFill>
+                <a:latin typeface="Microsoft JhengHei"/>
+                <a:ea typeface="Microsoft JhengHei"/>
+                <a:cs typeface="Microsoft JhengHei"/>
+              </a:rPr>
+              <a:t>66</a:t>
+            </a:r>
+          </a:p>
+        </p:txBody>
+      </p:sp>
+      <p:sp>
+        <p:nvSpPr>
+          <p:cNvPr id="83" name="TextBox 82"/>
+          <p:cNvSpPr txBox="1"/>
+          <p:nvPr/>
+        </p:nvSpPr>
+        <p:spPr>
+          <a:xfrm>
+            <a:off x="6784848" y="5102352"/>
+            <a:ext cx="1371600" cy="301752"/>
+          </a:xfrm>
+          <a:prstGeom prst="rect">
+            <a:avLst/>
+          </a:prstGeom>
+          <a:noFill/>
+        </p:spPr>
+        <p:txBody>
+          <a:bodyPr wrap="square" anchor="ctr" lIns="0" rIns="0" tIns="0" bIns="0">
+            <a:spAutoFit/>
+          </a:bodyPr>
+          <a:lstStyle/>
+          <a:p>
+            <a:pPr algn="ctr">
+              <a:lnSpc>
+                <a:spcPct val="112000"/>
+              </a:lnSpc>
+              <a:spcAft>
+                <a:spcPts val="500"/>
+              </a:spcAft>
+            </a:pPr>
+            <a:r>
+              <a:rPr sz="1150" b="0" i="0">
+                <a:solidFill>
+                  <a:srgbClr val="3D4D5A"/>
+                </a:solidFill>
+                <a:latin typeface="Microsoft JhengHei"/>
+                <a:ea typeface="Microsoft JhengHei"/>
+                <a:cs typeface="Microsoft JhengHei"/>
+              </a:rPr>
+              <a:t>12.5%</a:t>
+            </a:r>
+          </a:p>
+        </p:txBody>
+      </p:sp>
+      <p:sp>
+        <p:nvSpPr>
+          <p:cNvPr id="84" name="TextBox 83"/>
+          <p:cNvSpPr txBox="1"/>
+          <p:nvPr/>
+        </p:nvSpPr>
+        <p:spPr>
+          <a:xfrm>
+            <a:off x="8339328" y="5102352"/>
+            <a:ext cx="3139135" cy="301752"/>
+          </a:xfrm>
+          <a:prstGeom prst="rect">
+            <a:avLst/>
+          </a:prstGeom>
+          <a:noFill/>
+        </p:spPr>
+        <p:txBody>
+          <a:bodyPr wrap="square" anchor="ctr" lIns="0" rIns="0" tIns="0" bIns="0">
+            <a:spAutoFit/>
+          </a:bodyPr>
+          <a:lstStyle/>
+          <a:p>
+            <a:pPr algn="l">
+              <a:lnSpc>
+                <a:spcPct val="112000"/>
+              </a:lnSpc>
+              <a:spcAft>
+                <a:spcPts val="500"/>
+              </a:spcAft>
+            </a:pPr>
+            <a:r>
+              <a:rPr sz="1150" b="0" i="0">
+                <a:solidFill>
+                  <a:srgbClr val="7C8B97"/>
+                </a:solidFill>
+                <a:latin typeface="Microsoft JhengHei"/>
+                <a:ea typeface="Microsoft JhengHei"/>
+                <a:cs typeface="Microsoft JhengHei"/>
+              </a:rPr>
+              <a:t>疲勞偏高，配置港口輕負荷</a:t>
+            </a:r>
+          </a:p>
+        </p:txBody>
+      </p:sp>
+      <p:sp>
+        <p:nvSpPr>
+          <p:cNvPr id="85" name="Rectangle 84"/>
+          <p:cNvSpPr/>
+          <p:nvPr/>
+        </p:nvSpPr>
+        <p:spPr>
+          <a:xfrm>
+            <a:off x="640080" y="2907792"/>
+            <a:ext cx="10911535" cy="2496312"/>
           </a:xfrm>
           <a:prstGeom prst="rect">
             <a:avLst/>
@@ -24406,7 +24624,7 @@
       </p:sp>
       <p:sp>
         <p:nvSpPr>
-          <p:cNvPr id="79" name="Rounded Rectangle 78"/>
+          <p:cNvPr id="86" name="Rounded Rectangle 85"/>
           <p:cNvSpPr/>
           <p:nvPr/>
         </p:nvSpPr>
@@ -24451,7 +24669,7 @@
       </p:sp>
       <p:sp>
         <p:nvSpPr>
-          <p:cNvPr id="80" name="Rectangle 79"/>
+          <p:cNvPr id="87" name="Rectangle 86"/>
           <p:cNvSpPr/>
           <p:nvPr/>
         </p:nvSpPr>
@@ -24494,7 +24712,7 @@
       </p:sp>
       <p:sp>
         <p:nvSpPr>
-          <p:cNvPr id="81" name="TextBox 80"/>
+          <p:cNvPr id="88" name="TextBox 87"/>
           <p:cNvSpPr txBox="1"/>
           <p:nvPr/>
         </p:nvSpPr>
@@ -24538,7 +24756,7 @@
       </p:sp>
       <p:sp>
         <p:nvSpPr>
-          <p:cNvPr id="82" name="TextBox 81"/>
+          <p:cNvPr id="89" name="TextBox 88"/>
           <p:cNvSpPr txBox="1"/>
           <p:nvPr/>
         </p:nvSpPr>
@@ -24575,7 +24793,7 @@
                 <a:ea typeface="Microsoft JhengHei"/>
                 <a:cs typeface="Microsoft JhengHei"/>
               </a:rPr>
-              <a:t>系統自動將最低暴露者派外海、把高疲勞的「鄭宇」列入輪休 — 一次完成安全與公平兩個目標。</a:t>
+              <a:t>系統自動將最低暴露者派外海、本次無人達輪休門檻、人力配置均衡 — 一次完成安全與公平兩個目標。</a:t>
             </a:r>
           </a:p>
         </p:txBody>
@@ -26722,7 +26940,7 @@
         </p:nvSpPr>
         <p:spPr>
           <a:xfrm>
-            <a:off x="7360920" y="2395728"/>
+            <a:off x="7360920" y="2432304"/>
             <a:ext cx="4007815" cy="310896"/>
           </a:xfrm>
           <a:prstGeom prst="rect">
@@ -26755,16 +26973,6 @@
               </a:rPr>
               <a:t>users</a:t>
             </a:r>
-          </a:p>
-          <a:p>
-            <a:pPr algn="l">
-              <a:lnSpc>
-                <a:spcPct val="112000"/>
-              </a:lnSpc>
-              <a:spcAft>
-                <a:spcPts val="500"/>
-              </a:spcAft>
-            </a:pPr>
             <a:r>
               <a:rPr sz="1300" b="1" i="0">
                 <a:solidFill>
@@ -26774,7 +26982,7 @@
                 <a:ea typeface="Microsoft JhengHei"/>
                 <a:cs typeface="Microsoft JhengHei"/>
               </a:rPr>
-              <a:t>   13 筆</a:t>
+              <a:t>    13 筆</a:t>
             </a:r>
           </a:p>
         </p:txBody>
@@ -26787,8 +26995,8 @@
         </p:nvSpPr>
         <p:spPr>
           <a:xfrm>
-            <a:off x="7360920" y="2788920"/>
-            <a:ext cx="4007815" cy="411480"/>
+            <a:off x="7360920" y="2852928"/>
+            <a:ext cx="4007815" cy="365760"/>
           </a:xfrm>
           <a:prstGeom prst="rect">
             <a:avLst/>
@@ -26878,7 +27086,7 @@
         </p:nvSpPr>
         <p:spPr>
           <a:xfrm>
-            <a:off x="7360920" y="3584448"/>
+            <a:off x="7360920" y="3621024"/>
             <a:ext cx="4007815" cy="310896"/>
           </a:xfrm>
           <a:prstGeom prst="rect">
@@ -26911,16 +27119,6 @@
               </a:rPr>
               <a:t>leaves</a:t>
             </a:r>
-          </a:p>
-          <a:p>
-            <a:pPr algn="l">
-              <a:lnSpc>
-                <a:spcPct val="112000"/>
-              </a:lnSpc>
-              <a:spcAft>
-                <a:spcPts val="500"/>
-              </a:spcAft>
-            </a:pPr>
             <a:r>
               <a:rPr sz="1300" b="1" i="0">
                 <a:solidFill>
@@ -26930,7 +27128,7 @@
                 <a:ea typeface="Microsoft JhengHei"/>
                 <a:cs typeface="Microsoft JhengHei"/>
               </a:rPr>
-              <a:t>   60 筆</a:t>
+              <a:t>    60 筆</a:t>
             </a:r>
           </a:p>
         </p:txBody>
@@ -26943,8 +27141,8 @@
         </p:nvSpPr>
         <p:spPr>
           <a:xfrm>
-            <a:off x="7360920" y="3977640"/>
-            <a:ext cx="4007815" cy="411480"/>
+            <a:off x="7360920" y="4041648"/>
+            <a:ext cx="4007815" cy="365760"/>
           </a:xfrm>
           <a:prstGeom prst="rect">
             <a:avLst/>
@@ -27034,7 +27232,7 @@
         </p:nvSpPr>
         <p:spPr>
           <a:xfrm>
-            <a:off x="7360920" y="4773168"/>
+            <a:off x="7360920" y="4809744"/>
             <a:ext cx="4007815" cy="310896"/>
           </a:xfrm>
           <a:prstGeom prst="rect">
@@ -27067,16 +27265,6 @@
               </a:rPr>
               <a:t>sea_observations</a:t>
             </a:r>
-          </a:p>
-          <a:p>
-            <a:pPr algn="l">
-              <a:lnSpc>
-                <a:spcPct val="112000"/>
-              </a:lnSpc>
-              <a:spcAft>
-                <a:spcPts val="500"/>
-              </a:spcAft>
-            </a:pPr>
             <a:r>
               <a:rPr sz="1300" b="1" i="0">
                 <a:solidFill>
@@ -27086,7 +27274,7 @@
                 <a:ea typeface="Microsoft JhengHei"/>
                 <a:cs typeface="Microsoft JhengHei"/>
               </a:rPr>
-              <a:t>   736 筆</a:t>
+              <a:t>    736 筆</a:t>
             </a:r>
           </a:p>
         </p:txBody>
@@ -27099,8 +27287,8 @@
         </p:nvSpPr>
         <p:spPr>
           <a:xfrm>
-            <a:off x="7360920" y="5166360"/>
-            <a:ext cx="4007815" cy="411480"/>
+            <a:off x="7360920" y="5230368"/>
+            <a:ext cx="4007815" cy="365760"/>
           </a:xfrm>
           <a:prstGeom prst="rect">
             <a:avLst/>
@@ -27880,7 +28068,7 @@
                 <a:ea typeface="Microsoft JhengHei"/>
                 <a:cs typeface="Microsoft JhengHei"/>
               </a:rPr>
-              <a:t>RandomForest 海況預測 AUC = 0.811（有時序訊號可學習）</a:t>
+              <a:t>RandomForest 海況預測 AUC = 0.703（有時序訊號可學習）</a:t>
             </a:r>
           </a:p>
         </p:txBody>
@@ -34330,7 +34518,7 @@
                 <a:ea typeface="Microsoft JhengHei"/>
                 <a:cs typeface="Consolas"/>
               </a:rPr>
-              <a:t>F = 181.4</a:t>
+              <a:t>F = 249.1</a:t>
             </a:r>
           </a:p>
         </p:txBody>
@@ -34552,7 +34740,7 @@
                 <a:ea typeface="Microsoft JhengHei"/>
                 <a:cs typeface="Consolas"/>
               </a:rPr>
-              <a:t>χ² = 349.6</a:t>
+              <a:t>χ² = 232.8</a:t>
             </a:r>
           </a:p>
         </p:txBody>
@@ -34774,7 +34962,7 @@
                 <a:ea typeface="Microsoft JhengHei"/>
                 <a:cs typeface="Consolas"/>
               </a:rPr>
-              <a:t>R² = 0.784</a:t>
+              <a:t>R² = 0.801</a:t>
             </a:r>
           </a:p>
         </p:txBody>
@@ -34862,7 +35050,7 @@
                 <a:ea typeface="Microsoft JhengHei"/>
                 <a:cs typeface="Microsoft JhengHei"/>
               </a:rPr>
-              <a:t>4 特徵解釋 78.4% 工時變異</a:t>
+              <a:t>4 特徵解釋 80.1% 工時變異</a:t>
             </a:r>
           </a:p>
         </p:txBody>
@@ -34996,7 +35184,7 @@
                 <a:ea typeface="Microsoft JhengHei"/>
                 <a:cs typeface="Consolas"/>
               </a:rPr>
-              <a:t>Gini = 0.042</a:t>
+              <a:t>Gini = 0.031</a:t>
             </a:r>
           </a:p>
         </p:txBody>
@@ -35240,7 +35428,7 @@
                 <a:ea typeface="Microsoft JhengHei"/>
                 <a:cs typeface="Microsoft JhengHei"/>
               </a:rPr>
-              <a:t>工時受海況 / 海域 / 星期 / 打卡時刻共同決定，解釋力 78.4%，遠高於任何單維度模型。</a:t>
+              <a:t>工時受海況 / 海域 / 星期 / 打卡時刻共同決定，解釋力 80.1%，遠高於任何單維度模型。</a:t>
             </a:r>
           </a:p>
         </p:txBody>
@@ -35354,7 +35542,7 @@
                 <a:ea typeface="Microsoft JhengHei"/>
                 <a:cs typeface="Microsoft JhengHei"/>
               </a:rPr>
-              <a:t>海況等級越高，值勤工時越短（F = 181.4, p &lt; 0.0001）</a:t>
+              <a:t>海況等級越高，值勤工時越短（F = 249.1, p &lt; 0.0001）</a:t>
             </a:r>
           </a:p>
         </p:txBody>
@@ -35707,7 +35895,7 @@
                 <a:ea typeface="Microsoft JhengHei"/>
                 <a:cs typeface="Microsoft JhengHei"/>
               </a:rPr>
-              <a:t>檢定量 F = 181.433</a:t>
+              <a:t>檢定量 F = 249.104</a:t>
             </a:r>
           </a:p>
           <a:p>
@@ -36334,7 +36522,7 @@
                 <a:ea typeface="Microsoft JhengHei"/>
                 <a:cs typeface="Microsoft JhengHei"/>
               </a:rPr>
-              <a:t>檢定量 χ² = 349.634，df = 6</a:t>
+              <a:t>檢定量 χ² = 232.811，df = 6</a:t>
             </a:r>
           </a:p>
           <a:p>
@@ -36787,8 +36975,8 @@
         </p:blipFill>
         <p:spPr>
           <a:xfrm>
-            <a:off x="640080" y="2002895"/>
-            <a:ext cx="6766560" cy="3766607"/>
+            <a:off x="640080" y="2010288"/>
+            <a:ext cx="6766560" cy="3751821"/>
           </a:xfrm>
           <a:prstGeom prst="rect">
             <a:avLst/>
@@ -36961,7 +37149,7 @@
                 <a:ea typeface="Microsoft JhengHei"/>
                 <a:cs typeface="Microsoft JhengHei"/>
               </a:rPr>
-              <a:t>R² = 0.784（解釋 78.4% 變異）</a:t>
+              <a:t>R² = 0.801（解釋 80.1% 變異）</a:t>
             </a:r>
           </a:p>
           <a:p>
@@ -36993,7 +37181,7 @@
                 <a:ea typeface="Microsoft JhengHei"/>
                 <a:cs typeface="Microsoft JhengHei"/>
               </a:rPr>
-              <a:t>上工時刻 β = −0.569（最強）</a:t>
+              <a:t>上工時刻 β = −0.554（最強）</a:t>
             </a:r>
           </a:p>
           <a:p>
@@ -37025,7 +37213,7 @@
                 <a:ea typeface="Microsoft JhengHei"/>
                 <a:cs typeface="Microsoft JhengHei"/>
               </a:rPr>
-              <a:t>海況等級 β = −0.435（次強）</a:t>
+              <a:t>海況等級 β = −0.530（次強）</a:t>
             </a:r>
           </a:p>
           <a:p>
@@ -37089,7 +37277,7 @@
                 <a:ea typeface="Microsoft JhengHei"/>
                 <a:cs typeface="Microsoft JhengHei"/>
               </a:rPr>
-              <a:t>星期 β = +0.014（可忽略）</a:t>
+              <a:t>星期 β = −0.018（可忽略）</a:t>
             </a:r>
           </a:p>
           <a:p>
@@ -37652,7 +37840,7 @@
                 <a:ea typeface="Microsoft JhengHei"/>
                 <a:cs typeface="Microsoft JhengHei"/>
               </a:rPr>
-              <a:t>工時 ↔ 上工時刻：r ≈ −0.52</a:t>
+              <a:t>工時 ↔ 上工時刻：r ≈ −0.65</a:t>
             </a:r>
           </a:p>
           <a:p>
@@ -37684,7 +37872,7 @@
                 <a:ea typeface="Microsoft JhengHei"/>
                 <a:cs typeface="Microsoft JhengHei"/>
               </a:rPr>
-              <a:t>工時 ↔ 海況等級：r ≈ −0.44</a:t>
+              <a:t>工時 ↔ 海況等級：r ≈ −0.56</a:t>
             </a:r>
           </a:p>
           <a:p>
@@ -37716,7 +37904,7 @@
                 <a:ea typeface="Microsoft JhengHei"/>
                 <a:cs typeface="Microsoft JhengHei"/>
               </a:rPr>
-              <a:t>海況 ↔ 海域：r ≈ +0.35</a:t>
+              <a:t>海況 ↔ 海域：r ≈ +0.43</a:t>
             </a:r>
           </a:p>
           <a:p>
@@ -39235,7 +39423,7 @@
                 <a:ea typeface="Microsoft JhengHei"/>
                 <a:cs typeface="Microsoft JhengHei"/>
               </a:rPr>
-              <a:t>AUC = 0.811：用 TimeSeriesSplit 避免未來洩漏</a:t>
+              <a:t>AUC = 0.703：用 TimeSeriesSplit 避免未來洩漏</a:t>
             </a:r>
           </a:p>
         </p:txBody>
@@ -39414,8 +39602,8 @@
         </p:blipFill>
         <p:spPr>
           <a:xfrm>
-            <a:off x="640080" y="2008445"/>
-            <a:ext cx="6766560" cy="3755507"/>
+            <a:off x="640080" y="2019447"/>
+            <a:ext cx="6766560" cy="3733502"/>
           </a:xfrm>
           <a:prstGeom prst="rect">
             <a:avLst/>
@@ -39844,7 +40032,7 @@
                 <a:ea typeface="Microsoft JhengHei"/>
                 <a:cs typeface="Microsoft JhengHei"/>
               </a:rPr>
-              <a:t>測試集 acc 0.949 / AUC 0.811</a:t>
+              <a:t>測試集 acc 0.692 / AUC 0.703</a:t>
             </a:r>
           </a:p>
         </p:txBody>
@@ -40321,7 +40509,7 @@
                 <a:ea typeface="Microsoft JhengHei"/>
                 <a:cs typeface="Microsoft JhengHei"/>
               </a:rPr>
-              <a:t>純 NumPy 矩陣連乘外推 7 天；本次大浪期望機率 7.1%，超過 15% 即自動觸發排班預警。</a:t>
+              <a:t>純 NumPy 矩陣連乘外推 7 天；本次大浪期望機率 13.6%，超過 15% 即自動觸發排班預警。</a:t>
             </a:r>
           </a:p>
         </p:txBody>
@@ -43027,7 +43215,7 @@
                 <a:ea typeface="Microsoft JhengHei"/>
                 <a:cs typeface="Microsoft JhengHei"/>
               </a:rPr>
-              <a:t>Gini = 0.042：工時分配近乎完全均等</a:t>
+              <a:t>Gini = 0.031：工時分配近乎完全均等</a:t>
             </a:r>
           </a:p>
         </p:txBody>
@@ -43412,7 +43600,7 @@
                 <a:ea typeface="Microsoft JhengHei"/>
                 <a:cs typeface="Microsoft JhengHei"/>
               </a:rPr>
-              <a:t>本系統 Gini = 0.042 → 高度均等</a:t>
+              <a:t>本系統 Gini = 0.031 → 高度均等</a:t>
             </a:r>
           </a:p>
           <a:p>
@@ -44103,7 +44291,7 @@
                 <a:ea typeface="Microsoft JhengHei"/>
                 <a:cs typeface="Microsoft JhengHei"/>
               </a:rPr>
-              <a:t>可用度 &lt; 30% → 標記「需維護」</a:t>
+              <a:t>可用度 ≤ 15% → 標記「需維護」</a:t>
             </a:r>
           </a:p>
           <a:p>
@@ -45733,7 +45921,7 @@
         <p:spPr>
           <a:xfrm>
             <a:off x="640080" y="1874519"/>
-            <a:ext cx="5669280" cy="749808"/>
+            <a:ext cx="5318607" cy="749808"/>
           </a:xfrm>
           <a:prstGeom prst="roundRect">
             <a:avLst>
@@ -45823,7 +46011,7 @@
         <p:spPr>
           <a:xfrm>
             <a:off x="914400" y="1965959"/>
-            <a:ext cx="5212080" cy="310896"/>
+            <a:ext cx="4861407" cy="310896"/>
           </a:xfrm>
           <a:prstGeom prst="rect">
             <a:avLst/>
@@ -45867,7 +46055,7 @@
         <p:spPr>
           <a:xfrm>
             <a:off x="914400" y="2295143"/>
-            <a:ext cx="5212080" cy="274320"/>
+            <a:ext cx="4861407" cy="274320"/>
           </a:xfrm>
           <a:prstGeom prst="rect">
             <a:avLst/>
@@ -45910,8 +46098,8 @@
         </p:nvSpPr>
         <p:spPr>
           <a:xfrm>
-            <a:off x="6583680" y="1874519"/>
-            <a:ext cx="5669280" cy="749808"/>
+            <a:off x="6233007" y="1874519"/>
+            <a:ext cx="5318607" cy="749808"/>
           </a:xfrm>
           <a:prstGeom prst="roundRect">
             <a:avLst>
@@ -45957,7 +46145,7 @@
         </p:nvSpPr>
         <p:spPr>
           <a:xfrm>
-            <a:off x="6583680" y="1874519"/>
+            <a:off x="6233007" y="1874519"/>
             <a:ext cx="82296" cy="749808"/>
           </a:xfrm>
           <a:prstGeom prst="rect">
@@ -46000,8 +46188,8 @@
         </p:nvSpPr>
         <p:spPr>
           <a:xfrm>
-            <a:off x="6858000" y="1965959"/>
-            <a:ext cx="5212080" cy="310896"/>
+            <a:off x="6507327" y="1965959"/>
+            <a:ext cx="4861407" cy="310896"/>
           </a:xfrm>
           <a:prstGeom prst="rect">
             <a:avLst/>
@@ -46044,8 +46232,8 @@
         </p:nvSpPr>
         <p:spPr>
           <a:xfrm>
-            <a:off x="6858000" y="2295143"/>
-            <a:ext cx="5212080" cy="274320"/>
+            <a:off x="6507327" y="2295143"/>
+            <a:ext cx="4861407" cy="274320"/>
           </a:xfrm>
           <a:prstGeom prst="rect">
             <a:avLst/>
@@ -46089,7 +46277,7 @@
         <p:spPr>
           <a:xfrm>
             <a:off x="640080" y="2770631"/>
-            <a:ext cx="5669280" cy="749808"/>
+            <a:ext cx="5318607" cy="749808"/>
           </a:xfrm>
           <a:prstGeom prst="roundRect">
             <a:avLst>
@@ -46179,7 +46367,7 @@
         <p:spPr>
           <a:xfrm>
             <a:off x="914400" y="2862071"/>
-            <a:ext cx="5212080" cy="310896"/>
+            <a:ext cx="4861407" cy="310896"/>
           </a:xfrm>
           <a:prstGeom prst="rect">
             <a:avLst/>
@@ -46223,7 +46411,7 @@
         <p:spPr>
           <a:xfrm>
             <a:off x="914400" y="3191255"/>
-            <a:ext cx="5212080" cy="274320"/>
+            <a:ext cx="4861407" cy="274320"/>
           </a:xfrm>
           <a:prstGeom prst="rect">
             <a:avLst/>
@@ -46266,8 +46454,8 @@
         </p:nvSpPr>
         <p:spPr>
           <a:xfrm>
-            <a:off x="6583680" y="2770631"/>
-            <a:ext cx="5669280" cy="749808"/>
+            <a:off x="6233007" y="2770631"/>
+            <a:ext cx="5318607" cy="749808"/>
           </a:xfrm>
           <a:prstGeom prst="roundRect">
             <a:avLst>
@@ -46313,7 +46501,7 @@
         </p:nvSpPr>
         <p:spPr>
           <a:xfrm>
-            <a:off x="6583680" y="2770631"/>
+            <a:off x="6233007" y="2770631"/>
             <a:ext cx="82296" cy="749808"/>
           </a:xfrm>
           <a:prstGeom prst="rect">
@@ -46356,8 +46544,8 @@
         </p:nvSpPr>
         <p:spPr>
           <a:xfrm>
-            <a:off x="6858000" y="2862071"/>
-            <a:ext cx="5212080" cy="310896"/>
+            <a:off x="6507327" y="2862071"/>
+            <a:ext cx="4861407" cy="310896"/>
           </a:xfrm>
           <a:prstGeom prst="rect">
             <a:avLst/>
@@ -46400,8 +46588,8 @@
         </p:nvSpPr>
         <p:spPr>
           <a:xfrm>
-            <a:off x="6858000" y="3191255"/>
-            <a:ext cx="5212080" cy="274320"/>
+            <a:off x="6507327" y="3191255"/>
+            <a:ext cx="4861407" cy="274320"/>
           </a:xfrm>
           <a:prstGeom prst="rect">
             <a:avLst/>
@@ -46445,7 +46633,7 @@
         <p:spPr>
           <a:xfrm>
             <a:off x="640080" y="3666743"/>
-            <a:ext cx="5669280" cy="749808"/>
+            <a:ext cx="5318607" cy="749808"/>
           </a:xfrm>
           <a:prstGeom prst="roundRect">
             <a:avLst>
@@ -46535,7 +46723,7 @@
         <p:spPr>
           <a:xfrm>
             <a:off x="914400" y="3758183"/>
-            <a:ext cx="5212080" cy="310896"/>
+            <a:ext cx="4861407" cy="310896"/>
           </a:xfrm>
           <a:prstGeom prst="rect">
             <a:avLst/>
@@ -46579,7 +46767,7 @@
         <p:spPr>
           <a:xfrm>
             <a:off x="914400" y="4087367"/>
-            <a:ext cx="5212080" cy="274320"/>
+            <a:ext cx="4861407" cy="274320"/>
           </a:xfrm>
           <a:prstGeom prst="rect">
             <a:avLst/>
@@ -46622,8 +46810,8 @@
         </p:nvSpPr>
         <p:spPr>
           <a:xfrm>
-            <a:off x="6583680" y="3666743"/>
-            <a:ext cx="5669280" cy="749808"/>
+            <a:off x="6233007" y="3666743"/>
+            <a:ext cx="5318607" cy="749808"/>
           </a:xfrm>
           <a:prstGeom prst="roundRect">
             <a:avLst>
@@ -46669,7 +46857,7 @@
         </p:nvSpPr>
         <p:spPr>
           <a:xfrm>
-            <a:off x="6583680" y="3666743"/>
+            <a:off x="6233007" y="3666743"/>
             <a:ext cx="82296" cy="749808"/>
           </a:xfrm>
           <a:prstGeom prst="rect">
@@ -46712,8 +46900,8 @@
         </p:nvSpPr>
         <p:spPr>
           <a:xfrm>
-            <a:off x="6858000" y="3758183"/>
-            <a:ext cx="5212080" cy="310896"/>
+            <a:off x="6507327" y="3758183"/>
+            <a:ext cx="4861407" cy="310896"/>
           </a:xfrm>
           <a:prstGeom prst="rect">
             <a:avLst/>
@@ -46756,8 +46944,8 @@
         </p:nvSpPr>
         <p:spPr>
           <a:xfrm>
-            <a:off x="6858000" y="4087367"/>
-            <a:ext cx="5212080" cy="274320"/>
+            <a:off x="6507327" y="4087367"/>
+            <a:ext cx="4861407" cy="274320"/>
           </a:xfrm>
           <a:prstGeom prst="rect">
             <a:avLst/>
@@ -51387,7 +51575,7 @@
               </a:spcAft>
             </a:pPr>
             <a:r>
-              <a:rPr sz="1050" b="0" i="0">
+              <a:rPr sz="1100" b="0" i="0">
                 <a:solidFill>
                   <a:srgbClr val="7C8B97"/>
                 </a:solidFill>
@@ -51463,7 +51651,7 @@
               </a:spcAft>
             </a:pPr>
             <a:r>
-              <a:rPr sz="1050" b="0" i="0">
+              <a:rPr sz="1100" b="0" i="0">
                 <a:solidFill>
                   <a:srgbClr val="7C8B97"/>
                 </a:solidFill>
@@ -51539,7 +51727,7 @@
               </a:spcAft>
             </a:pPr>
             <a:r>
-              <a:rPr sz="1050" b="0" i="0">
+              <a:rPr sz="1100" b="0" i="0">
                 <a:solidFill>
                   <a:srgbClr val="7C8B97"/>
                 </a:solidFill>
@@ -51615,7 +51803,7 @@
               </a:spcAft>
             </a:pPr>
             <a:r>
-              <a:rPr sz="1050" b="0" i="0">
+              <a:rPr sz="1100" b="0" i="0">
                 <a:solidFill>
                   <a:srgbClr val="7C8B97"/>
                 </a:solidFill>
@@ -51825,7 +52013,7 @@
               </a:spcAft>
             </a:pPr>
             <a:r>
-              <a:rPr sz="1050" b="0" i="0">
+              <a:rPr sz="1100" b="0" i="0">
                 <a:solidFill>
                   <a:srgbClr val="7C8B97"/>
                 </a:solidFill>
@@ -51901,7 +52089,7 @@
               </a:spcAft>
             </a:pPr>
             <a:r>
-              <a:rPr sz="1050" b="0" i="0">
+              <a:rPr sz="1100" b="0" i="0">
                 <a:solidFill>
                   <a:srgbClr val="7C8B97"/>
                 </a:solidFill>
@@ -51977,7 +52165,7 @@
               </a:spcAft>
             </a:pPr>
             <a:r>
-              <a:rPr sz="1050" b="0" i="0">
+              <a:rPr sz="1100" b="0" i="0">
                 <a:solidFill>
                   <a:srgbClr val="7C8B97"/>
                 </a:solidFill>
@@ -52053,7 +52241,7 @@
               </a:spcAft>
             </a:pPr>
             <a:r>
-              <a:rPr sz="1050" b="0" i="0">
+              <a:rPr sz="1100" b="0" i="0">
                 <a:solidFill>
                   <a:srgbClr val="7C8B97"/>
                 </a:solidFill>
@@ -52129,7 +52317,7 @@
               </a:spcAft>
             </a:pPr>
             <a:r>
-              <a:rPr sz="1050" b="0" i="0">
+              <a:rPr sz="1100" b="0" i="0">
                 <a:solidFill>
                   <a:srgbClr val="7C8B97"/>
                 </a:solidFill>
@@ -52205,7 +52393,7 @@
               </a:spcAft>
             </a:pPr>
             <a:r>
-              <a:rPr sz="1050" b="0" i="0">
+              <a:rPr sz="1100" b="0" i="0">
                 <a:solidFill>
                   <a:srgbClr val="7C8B97"/>
                 </a:solidFill>
@@ -52281,7 +52469,7 @@
               </a:spcAft>
             </a:pPr>
             <a:r>
-              <a:rPr sz="1050" b="0" i="0">
+              <a:rPr sz="1100" b="0" i="0">
                 <a:solidFill>
                   <a:srgbClr val="7C8B97"/>
                 </a:solidFill>
@@ -52491,7 +52679,7 @@
               </a:spcAft>
             </a:pPr>
             <a:r>
-              <a:rPr sz="1050" b="0" i="0">
+              <a:rPr sz="1100" b="0" i="0">
                 <a:solidFill>
                   <a:srgbClr val="7C8B97"/>
                 </a:solidFill>
@@ -52567,7 +52755,7 @@
               </a:spcAft>
             </a:pPr>
             <a:r>
-              <a:rPr sz="1050" b="0" i="0">
+              <a:rPr sz="1100" b="0" i="0">
                 <a:solidFill>
                   <a:srgbClr val="7C8B97"/>
                 </a:solidFill>
@@ -52643,7 +52831,7 @@
               </a:spcAft>
             </a:pPr>
             <a:r>
-              <a:rPr sz="1050" b="0" i="0">
+              <a:rPr sz="1100" b="0" i="0">
                 <a:solidFill>
                   <a:srgbClr val="7C8B97"/>
                 </a:solidFill>
@@ -52719,7 +52907,7 @@
               </a:spcAft>
             </a:pPr>
             <a:r>
-              <a:rPr sz="1050" b="0" i="0">
+              <a:rPr sz="1100" b="0" i="0">
                 <a:solidFill>
                   <a:srgbClr val="7C8B97"/>
                 </a:solidFill>
@@ -52760,6 +52948,1632 @@
       <p:grpSpPr/>
       <p:sp>
         <p:nvSpPr>
+          <p:cNvPr id="2" name="TextBox 1"/>
+          <p:cNvSpPr txBox="1"/>
+          <p:nvPr/>
+        </p:nvSpPr>
+        <p:spPr>
+          <a:xfrm>
+            <a:off x="640080" y="420624"/>
+            <a:ext cx="10911535" cy="274320"/>
+          </a:xfrm>
+          <a:prstGeom prst="rect">
+            <a:avLst/>
+          </a:prstGeom>
+          <a:noFill/>
+        </p:spPr>
+        <p:txBody>
+          <a:bodyPr wrap="square" anchor="t" lIns="0" rIns="0" tIns="0" bIns="0">
+            <a:spAutoFit/>
+          </a:bodyPr>
+          <a:lstStyle/>
+          <a:p>
+            <a:pPr algn="l">
+              <a:lnSpc>
+                <a:spcPct val="112000"/>
+              </a:lnSpc>
+              <a:spcAft>
+                <a:spcPts val="500"/>
+              </a:spcAft>
+            </a:pPr>
+            <a:r>
+              <a:rPr sz="1200" b="1" i="0">
+                <a:solidFill>
+                  <a:srgbClr val="C8922E"/>
+                </a:solidFill>
+                <a:latin typeface="Microsoft JhengHei"/>
+                <a:ea typeface="Microsoft JhengHei"/>
+                <a:cs typeface="Microsoft JhengHei"/>
+              </a:rPr>
+              <a:t>專題管理 · 團隊分工</a:t>
+            </a:r>
+          </a:p>
+        </p:txBody>
+      </p:sp>
+      <p:sp>
+        <p:nvSpPr>
+          <p:cNvPr id="3" name="TextBox 2"/>
+          <p:cNvSpPr txBox="1"/>
+          <p:nvPr/>
+        </p:nvSpPr>
+        <p:spPr>
+          <a:xfrm>
+            <a:off x="640080" y="676656"/>
+            <a:ext cx="10911535" cy="658368"/>
+          </a:xfrm>
+          <a:prstGeom prst="rect">
+            <a:avLst/>
+          </a:prstGeom>
+          <a:noFill/>
+        </p:spPr>
+        <p:txBody>
+          <a:bodyPr wrap="square" anchor="t" lIns="0" rIns="0" tIns="0" bIns="0">
+            <a:spAutoFit/>
+          </a:bodyPr>
+          <a:lstStyle/>
+          <a:p>
+            <a:pPr algn="l">
+              <a:lnSpc>
+                <a:spcPct val="112000"/>
+              </a:lnSpc>
+              <a:spcAft>
+                <a:spcPts val="500"/>
+              </a:spcAft>
+            </a:pPr>
+            <a:r>
+              <a:rPr sz="2500" b="1" i="0">
+                <a:solidFill>
+                  <a:srgbClr val="1C3D5A"/>
+                </a:solidFill>
+                <a:latin typeface="Microsoft JhengHei"/>
+                <a:ea typeface="Microsoft JhengHei"/>
+                <a:cs typeface="Microsoft JhengHei"/>
+              </a:rPr>
+              <a:t>技術實作集中於組長，組員各司支援角色</a:t>
+            </a:r>
+          </a:p>
+        </p:txBody>
+      </p:sp>
+      <p:cxnSp>
+        <p:nvCxnSpPr>
+          <p:cNvPr id="4" name="Connector 3"/>
+          <p:cNvCxnSpPr/>
+          <p:nvPr/>
+        </p:nvCxnSpPr>
+        <p:spPr>
+          <a:xfrm>
+            <a:off x="640080" y="1417320"/>
+            <a:ext cx="566928" cy="0"/>
+          </a:xfrm>
+          <a:prstGeom prst="bentConnector3">
+            <a:avLst/>
+          </a:prstGeom>
+          <a:ln w="30480">
+            <a:solidFill>
+              <a:srgbClr val="C8922E"/>
+            </a:solidFill>
+          </a:ln>
+        </p:spPr>
+        <p:style>
+          <a:lnRef idx="2">
+            <a:schemeClr val="accent1"/>
+          </a:lnRef>
+          <a:fillRef idx="0">
+            <a:schemeClr val="accent1"/>
+          </a:fillRef>
+          <a:effectRef idx="1">
+            <a:schemeClr val="accent1"/>
+          </a:effectRef>
+          <a:fontRef idx="minor">
+            <a:schemeClr val="tx1"/>
+          </a:fontRef>
+        </p:style>
+      </p:cxnSp>
+      <p:cxnSp>
+        <p:nvCxnSpPr>
+          <p:cNvPr id="5" name="Connector 4"/>
+          <p:cNvCxnSpPr/>
+          <p:nvPr/>
+        </p:nvCxnSpPr>
+        <p:spPr>
+          <a:xfrm>
+            <a:off x="640080" y="6455664"/>
+            <a:ext cx="10911535" cy="0"/>
+          </a:xfrm>
+          <a:prstGeom prst="bentConnector3">
+            <a:avLst/>
+          </a:prstGeom>
+          <a:ln w="9525">
+            <a:solidFill>
+              <a:srgbClr val="D7E0E6"/>
+            </a:solidFill>
+          </a:ln>
+        </p:spPr>
+        <p:style>
+          <a:lnRef idx="2">
+            <a:schemeClr val="accent1"/>
+          </a:lnRef>
+          <a:fillRef idx="0">
+            <a:schemeClr val="accent1"/>
+          </a:fillRef>
+          <a:effectRef idx="1">
+            <a:schemeClr val="accent1"/>
+          </a:effectRef>
+          <a:fontRef idx="minor">
+            <a:schemeClr val="tx1"/>
+          </a:fontRef>
+        </p:style>
+      </p:cxnSp>
+      <p:sp>
+        <p:nvSpPr>
+          <p:cNvPr id="6" name="TextBox 5"/>
+          <p:cNvSpPr txBox="1"/>
+          <p:nvPr/>
+        </p:nvSpPr>
+        <p:spPr>
+          <a:xfrm>
+            <a:off x="640080" y="6510528"/>
+            <a:ext cx="8229600" cy="274320"/>
+          </a:xfrm>
+          <a:prstGeom prst="rect">
+            <a:avLst/>
+          </a:prstGeom>
+          <a:noFill/>
+        </p:spPr>
+        <p:txBody>
+          <a:bodyPr wrap="square" anchor="t" lIns="0" rIns="0" tIns="0" bIns="0">
+            <a:spAutoFit/>
+          </a:bodyPr>
+          <a:lstStyle/>
+          <a:p>
+            <a:pPr algn="l">
+              <a:lnSpc>
+                <a:spcPct val="112000"/>
+              </a:lnSpc>
+              <a:spcAft>
+                <a:spcPts val="500"/>
+              </a:spcAft>
+            </a:pPr>
+            <a:r>
+              <a:rPr sz="1000" b="0" i="0">
+                <a:solidFill>
+                  <a:srgbClr val="7C8B97"/>
+                </a:solidFill>
+                <a:latin typeface="Microsoft JhengHei"/>
+                <a:ea typeface="Microsoft JhengHei"/>
+                <a:cs typeface="Microsoft JhengHei"/>
+              </a:rPr>
+              <a:t>海勤人力資源與作業安全決策系統  ·  114-2 巨量資料與雲端運算  第 2 組</a:t>
+            </a:r>
+          </a:p>
+        </p:txBody>
+      </p:sp>
+      <p:sp>
+        <p:nvSpPr>
+          <p:cNvPr id="7" name="TextBox 6"/>
+          <p:cNvSpPr txBox="1"/>
+          <p:nvPr/>
+        </p:nvSpPr>
+        <p:spPr>
+          <a:xfrm>
+            <a:off x="10454335" y="6510528"/>
+            <a:ext cx="1097280" cy="274320"/>
+          </a:xfrm>
+          <a:prstGeom prst="rect">
+            <a:avLst/>
+          </a:prstGeom>
+          <a:noFill/>
+        </p:spPr>
+        <p:txBody>
+          <a:bodyPr wrap="square" anchor="t" lIns="0" rIns="0" tIns="0" bIns="0">
+            <a:spAutoFit/>
+          </a:bodyPr>
+          <a:lstStyle/>
+          <a:p>
+            <a:pPr algn="r">
+              <a:lnSpc>
+                <a:spcPct val="112000"/>
+              </a:lnSpc>
+              <a:spcAft>
+                <a:spcPts val="500"/>
+              </a:spcAft>
+            </a:pPr>
+            <a:r>
+              <a:rPr sz="1000" b="0" i="0">
+                <a:solidFill>
+                  <a:srgbClr val="7C8B97"/>
+                </a:solidFill>
+                <a:latin typeface="Consolas"/>
+                <a:ea typeface="Microsoft JhengHei"/>
+                <a:cs typeface="Consolas"/>
+              </a:rPr>
+              <a:t>41</a:t>
+            </a:r>
+          </a:p>
+        </p:txBody>
+      </p:sp>
+      <p:sp>
+        <p:nvSpPr>
+          <p:cNvPr id="8" name="Rounded Rectangle 7"/>
+          <p:cNvSpPr/>
+          <p:nvPr/>
+        </p:nvSpPr>
+        <p:spPr>
+          <a:xfrm>
+            <a:off x="640080" y="1874519"/>
+            <a:ext cx="10911535" cy="1965960"/>
+          </a:xfrm>
+          <a:prstGeom prst="roundRect">
+            <a:avLst>
+              <a:gd name="adj" fmla="val 5000"/>
+            </a:avLst>
+          </a:prstGeom>
+          <a:solidFill>
+            <a:srgbClr val="FBF4E6"/>
+          </a:solidFill>
+          <a:ln w="9525">
+            <a:solidFill>
+              <a:srgbClr val="C8922E"/>
+            </a:solidFill>
+          </a:ln>
+        </p:spPr>
+        <p:style>
+          <a:lnRef idx="1">
+            <a:schemeClr val="accent1"/>
+          </a:lnRef>
+          <a:fillRef idx="3">
+            <a:schemeClr val="accent1"/>
+          </a:fillRef>
+          <a:effectRef idx="2">
+            <a:schemeClr val="accent1"/>
+          </a:effectRef>
+          <a:fontRef idx="minor">
+            <a:schemeClr val="lt1"/>
+          </a:fontRef>
+        </p:style>
+        <p:txBody>
+          <a:bodyPr rtlCol="0" anchor="ctr"/>
+          <a:lstStyle/>
+          <a:p>
+            <a:pPr algn="ctr"/>
+          </a:p>
+        </p:txBody>
+      </p:sp>
+      <p:sp>
+        <p:nvSpPr>
+          <p:cNvPr id="9" name="Rectangle 8"/>
+          <p:cNvSpPr/>
+          <p:nvPr/>
+        </p:nvSpPr>
+        <p:spPr>
+          <a:xfrm>
+            <a:off x="640080" y="1874519"/>
+            <a:ext cx="91440" cy="1965960"/>
+          </a:xfrm>
+          <a:prstGeom prst="rect">
+            <a:avLst/>
+          </a:prstGeom>
+          <a:solidFill>
+            <a:srgbClr val="C8922E"/>
+          </a:solidFill>
+          <a:ln>
+            <a:noFill/>
+          </a:ln>
+        </p:spPr>
+        <p:style>
+          <a:lnRef idx="1">
+            <a:schemeClr val="accent1"/>
+          </a:lnRef>
+          <a:fillRef idx="3">
+            <a:schemeClr val="accent1"/>
+          </a:fillRef>
+          <a:effectRef idx="2">
+            <a:schemeClr val="accent1"/>
+          </a:effectRef>
+          <a:fontRef idx="minor">
+            <a:schemeClr val="lt1"/>
+          </a:fontRef>
+        </p:style>
+        <p:txBody>
+          <a:bodyPr rtlCol="0" anchor="ctr"/>
+          <a:lstStyle/>
+          <a:p>
+            <a:pPr algn="ctr"/>
+          </a:p>
+        </p:txBody>
+      </p:sp>
+      <p:sp>
+        <p:nvSpPr>
+          <p:cNvPr id="10" name="TextBox 9"/>
+          <p:cNvSpPr txBox="1"/>
+          <p:nvPr/>
+        </p:nvSpPr>
+        <p:spPr>
+          <a:xfrm>
+            <a:off x="932688" y="2011680"/>
+            <a:ext cx="10362895" cy="365760"/>
+          </a:xfrm>
+          <a:prstGeom prst="rect">
+            <a:avLst/>
+          </a:prstGeom>
+          <a:noFill/>
+        </p:spPr>
+        <p:txBody>
+          <a:bodyPr wrap="square" anchor="t" lIns="0" rIns="0" tIns="0" bIns="0">
+            <a:spAutoFit/>
+          </a:bodyPr>
+          <a:lstStyle/>
+          <a:p>
+            <a:pPr algn="l">
+              <a:lnSpc>
+                <a:spcPct val="112000"/>
+              </a:lnSpc>
+              <a:spcAft>
+                <a:spcPts val="500"/>
+              </a:spcAft>
+            </a:pPr>
+            <a:r>
+              <a:rPr sz="1600" b="1" i="0">
+                <a:solidFill>
+                  <a:srgbClr val="1C3D5A"/>
+                </a:solidFill>
+                <a:latin typeface="Microsoft JhengHei"/>
+                <a:ea typeface="Microsoft JhengHei"/>
+                <a:cs typeface="Microsoft JhengHei"/>
+              </a:rPr>
+              <a:t>黃宇平（組長）</a:t>
+            </a:r>
+            <a:r>
+              <a:rPr sz="1300" b="1" i="0">
+                <a:solidFill>
+                  <a:srgbClr val="C8922E"/>
+                </a:solidFill>
+                <a:latin typeface="Microsoft JhengHei"/>
+                <a:ea typeface="Microsoft JhengHei"/>
+                <a:cs typeface="Microsoft JhengHei"/>
+              </a:rPr>
+              <a:t>　·　系統全棧技術實作</a:t>
+            </a:r>
+          </a:p>
+        </p:txBody>
+      </p:sp>
+      <p:cxnSp>
+        <p:nvCxnSpPr>
+          <p:cNvPr id="11" name="Connector 10"/>
+          <p:cNvCxnSpPr/>
+          <p:nvPr/>
+        </p:nvCxnSpPr>
+        <p:spPr>
+          <a:xfrm>
+            <a:off x="932688" y="2432304"/>
+            <a:ext cx="10326319" cy="0"/>
+          </a:xfrm>
+          <a:prstGeom prst="bentConnector3">
+            <a:avLst/>
+          </a:prstGeom>
+          <a:ln w="12700">
+            <a:solidFill>
+              <a:srgbClr val="D4A24E"/>
+            </a:solidFill>
+          </a:ln>
+        </p:spPr>
+        <p:style>
+          <a:lnRef idx="2">
+            <a:schemeClr val="accent1"/>
+          </a:lnRef>
+          <a:fillRef idx="0">
+            <a:schemeClr val="accent1"/>
+          </a:fillRef>
+          <a:effectRef idx="1">
+            <a:schemeClr val="accent1"/>
+          </a:effectRef>
+          <a:fontRef idx="minor">
+            <a:schemeClr val="tx1"/>
+          </a:fontRef>
+        </p:style>
+      </p:cxnSp>
+      <p:sp>
+        <p:nvSpPr>
+          <p:cNvPr id="12" name="TextBox 11"/>
+          <p:cNvSpPr txBox="1"/>
+          <p:nvPr/>
+        </p:nvSpPr>
+        <p:spPr>
+          <a:xfrm>
+            <a:off x="987552" y="2578608"/>
+            <a:ext cx="4952847" cy="1371600"/>
+          </a:xfrm>
+          <a:prstGeom prst="rect">
+            <a:avLst/>
+          </a:prstGeom>
+          <a:noFill/>
+        </p:spPr>
+        <p:txBody>
+          <a:bodyPr wrap="square" anchor="t" lIns="0" rIns="0" tIns="0" bIns="0">
+            <a:spAutoFit/>
+          </a:bodyPr>
+          <a:lstStyle/>
+          <a:p>
+            <a:pPr algn="l">
+              <a:lnSpc>
+                <a:spcPct val="112000"/>
+              </a:lnSpc>
+              <a:spcAft>
+                <a:spcPts val="800"/>
+              </a:spcAft>
+            </a:pPr>
+            <a:r>
+              <a:rPr sz="1200" b="1" i="0">
+                <a:solidFill>
+                  <a:srgbClr val="C8922E"/>
+                </a:solidFill>
+                <a:latin typeface="Microsoft JhengHei"/>
+                <a:ea typeface="Microsoft JhengHei"/>
+                <a:cs typeface="Microsoft JhengHei"/>
+              </a:rPr>
+              <a:t>▪  </a:t>
+            </a:r>
+            <a:r>
+              <a:rPr sz="1200" b="0" i="0">
+                <a:solidFill>
+                  <a:srgbClr val="3D4D5A"/>
+                </a:solidFill>
+                <a:latin typeface="Microsoft JhengHei"/>
+                <a:ea typeface="Microsoft JhengHei"/>
+                <a:cs typeface="Microsoft JhengHei"/>
+              </a:rPr>
+              <a:t>Docker 三容器建置與一鍵部署</a:t>
+            </a:r>
+          </a:p>
+          <a:p>
+            <a:pPr algn="l">
+              <a:lnSpc>
+                <a:spcPct val="112000"/>
+              </a:lnSpc>
+              <a:spcAft>
+                <a:spcPts val="800"/>
+              </a:spcAft>
+            </a:pPr>
+            <a:r>
+              <a:rPr sz="1200" b="1" i="0">
+                <a:solidFill>
+                  <a:srgbClr val="C8922E"/>
+                </a:solidFill>
+                <a:latin typeface="Microsoft JhengHei"/>
+                <a:ea typeface="Microsoft JhengHei"/>
+                <a:cs typeface="Microsoft JhengHei"/>
+              </a:rPr>
+              <a:t>▪  </a:t>
+            </a:r>
+            <a:r>
+              <a:rPr sz="1200" b="0" i="0">
+                <a:solidFill>
+                  <a:srgbClr val="3D4D5A"/>
+                </a:solidFill>
+                <a:latin typeface="Microsoft JhengHei"/>
+                <a:ea typeface="Microsoft JhengHei"/>
+                <a:cs typeface="Microsoft JhengHei"/>
+              </a:rPr>
+              <a:t>PHP 22 檔 Linux 化 + 排班決策頁</a:t>
+            </a:r>
+          </a:p>
+          <a:p>
+            <a:pPr algn="l">
+              <a:lnSpc>
+                <a:spcPct val="112000"/>
+              </a:lnSpc>
+              <a:spcAft>
+                <a:spcPts val="800"/>
+              </a:spcAft>
+            </a:pPr>
+            <a:r>
+              <a:rPr sz="1200" b="1" i="0">
+                <a:solidFill>
+                  <a:srgbClr val="C8922E"/>
+                </a:solidFill>
+                <a:latin typeface="Microsoft JhengHei"/>
+                <a:ea typeface="Microsoft JhengHei"/>
+                <a:cs typeface="Microsoft JhengHei"/>
+              </a:rPr>
+              <a:t>▪  </a:t>
+            </a:r>
+            <a:r>
+              <a:rPr sz="1200" b="0" i="0">
+                <a:solidFill>
+                  <a:srgbClr val="3D4D5A"/>
+                </a:solidFill>
+                <a:latin typeface="Microsoft JhengHei"/>
+                <a:ea typeface="Microsoft JhengHei"/>
+                <a:cs typeface="Microsoft JhengHei"/>
+              </a:rPr>
+              <a:t>MySQL Schema 擴充 + 1,200 筆模擬資料</a:t>
+            </a:r>
+          </a:p>
+          <a:p>
+            <a:pPr algn="l">
+              <a:lnSpc>
+                <a:spcPct val="112000"/>
+              </a:lnSpc>
+              <a:spcAft>
+                <a:spcPts val="800"/>
+              </a:spcAft>
+            </a:pPr>
+            <a:r>
+              <a:rPr sz="1200" b="1" i="0">
+                <a:solidFill>
+                  <a:srgbClr val="C8922E"/>
+                </a:solidFill>
+                <a:latin typeface="Microsoft JhengHei"/>
+                <a:ea typeface="Microsoft JhengHei"/>
+                <a:cs typeface="Microsoft JhengHei"/>
+              </a:rPr>
+              <a:t>▪  </a:t>
+            </a:r>
+            <a:r>
+              <a:rPr sz="1200" b="0" i="0">
+                <a:solidFill>
+                  <a:srgbClr val="3D4D5A"/>
+                </a:solidFill>
+                <a:latin typeface="Microsoft JhengHei"/>
+                <a:ea typeface="Microsoft JhengHei"/>
+                <a:cs typeface="Microsoft JhengHei"/>
+              </a:rPr>
+              <a:t>CWA 浮標海象資料管線整合</a:t>
+            </a:r>
+          </a:p>
+        </p:txBody>
+      </p:sp>
+      <p:sp>
+        <p:nvSpPr>
+          <p:cNvPr id="13" name="TextBox 12"/>
+          <p:cNvSpPr txBox="1"/>
+          <p:nvPr/>
+        </p:nvSpPr>
+        <p:spPr>
+          <a:xfrm>
+            <a:off x="6123279" y="2578608"/>
+            <a:ext cx="4952847" cy="1371600"/>
+          </a:xfrm>
+          <a:prstGeom prst="rect">
+            <a:avLst/>
+          </a:prstGeom>
+          <a:noFill/>
+        </p:spPr>
+        <p:txBody>
+          <a:bodyPr wrap="square" anchor="t" lIns="0" rIns="0" tIns="0" bIns="0">
+            <a:spAutoFit/>
+          </a:bodyPr>
+          <a:lstStyle/>
+          <a:p>
+            <a:pPr algn="l">
+              <a:lnSpc>
+                <a:spcPct val="112000"/>
+              </a:lnSpc>
+              <a:spcAft>
+                <a:spcPts val="800"/>
+              </a:spcAft>
+            </a:pPr>
+            <a:r>
+              <a:rPr sz="1200" b="1" i="0">
+                <a:solidFill>
+                  <a:srgbClr val="C8922E"/>
+                </a:solidFill>
+                <a:latin typeface="Microsoft JhengHei"/>
+                <a:ea typeface="Microsoft JhengHei"/>
+                <a:cs typeface="Microsoft JhengHei"/>
+              </a:rPr>
+              <a:t>▪  </a:t>
+            </a:r>
+            <a:r>
+              <a:rPr sz="1200" b="0" i="0">
+                <a:solidFill>
+                  <a:srgbClr val="3D4D5A"/>
+                </a:solidFill>
+                <a:latin typeface="Microsoft JhengHei"/>
+                <a:ea typeface="Microsoft JhengHei"/>
+                <a:cs typeface="Microsoft JhengHei"/>
+              </a:rPr>
+              <a:t>Pandas 清洗 + 統計檢定 + 25 張圖表</a:t>
+            </a:r>
+          </a:p>
+          <a:p>
+            <a:pPr algn="l">
+              <a:lnSpc>
+                <a:spcPct val="112000"/>
+              </a:lnSpc>
+              <a:spcAft>
+                <a:spcPts val="800"/>
+              </a:spcAft>
+            </a:pPr>
+            <a:r>
+              <a:rPr sz="1200" b="1" i="0">
+                <a:solidFill>
+                  <a:srgbClr val="C8922E"/>
+                </a:solidFill>
+                <a:latin typeface="Microsoft JhengHei"/>
+                <a:ea typeface="Microsoft JhengHei"/>
+                <a:cs typeface="Microsoft JhengHei"/>
+              </a:rPr>
+              <a:t>▪  </a:t>
+            </a:r>
+            <a:r>
+              <a:rPr sz="1200" b="0" i="0">
+                <a:solidFill>
+                  <a:srgbClr val="3D4D5A"/>
+                </a:solidFill>
+                <a:latin typeface="Microsoft JhengHei"/>
+                <a:ea typeface="Microsoft JhengHei"/>
+                <a:cs typeface="Microsoft JhengHei"/>
+              </a:rPr>
+              <a:t>RandomForest 預測 + MILP 排班引擎</a:t>
+            </a:r>
+          </a:p>
+          <a:p>
+            <a:pPr algn="l">
+              <a:lnSpc>
+                <a:spcPct val="112000"/>
+              </a:lnSpc>
+              <a:spcAft>
+                <a:spcPts val="800"/>
+              </a:spcAft>
+            </a:pPr>
+            <a:r>
+              <a:rPr sz="1200" b="1" i="0">
+                <a:solidFill>
+                  <a:srgbClr val="C8922E"/>
+                </a:solidFill>
+                <a:latin typeface="Microsoft JhengHei"/>
+                <a:ea typeface="Microsoft JhengHei"/>
+                <a:cs typeface="Microsoft JhengHei"/>
+              </a:rPr>
+              <a:t>▪  </a:t>
+            </a:r>
+            <a:r>
+              <a:rPr sz="1200" b="0" i="0">
+                <a:solidFill>
+                  <a:srgbClr val="3D4D5A"/>
+                </a:solidFill>
+                <a:latin typeface="Microsoft JhengHei"/>
+                <a:ea typeface="Microsoft JhengHei"/>
+                <a:cs typeface="Microsoft JhengHei"/>
+              </a:rPr>
+              <a:t>Gradio 儀表板 + Folium 互動地圖</a:t>
+            </a:r>
+          </a:p>
+          <a:p>
+            <a:pPr algn="l">
+              <a:lnSpc>
+                <a:spcPct val="112000"/>
+              </a:lnSpc>
+              <a:spcAft>
+                <a:spcPts val="800"/>
+              </a:spcAft>
+            </a:pPr>
+            <a:r>
+              <a:rPr sz="1200" b="1" i="0">
+                <a:solidFill>
+                  <a:srgbClr val="C8922E"/>
+                </a:solidFill>
+                <a:latin typeface="Microsoft JhengHei"/>
+                <a:ea typeface="Microsoft JhengHei"/>
+                <a:cs typeface="Microsoft JhengHei"/>
+              </a:rPr>
+              <a:t>▪  </a:t>
+            </a:r>
+            <a:r>
+              <a:rPr sz="1200" b="0" i="0">
+                <a:solidFill>
+                  <a:srgbClr val="3D4D5A"/>
+                </a:solidFill>
+                <a:latin typeface="Microsoft JhengHei"/>
+                <a:ea typeface="Microsoft JhengHei"/>
+                <a:cs typeface="Microsoft JhengHei"/>
+              </a:rPr>
+              <a:t>GitHub Actions CI + 期末報告與簡報製作</a:t>
+            </a:r>
+          </a:p>
+        </p:txBody>
+      </p:sp>
+      <p:sp>
+        <p:nvSpPr>
+          <p:cNvPr id="14" name="Rectangle 13"/>
+          <p:cNvSpPr/>
+          <p:nvPr/>
+        </p:nvSpPr>
+        <p:spPr>
+          <a:xfrm>
+            <a:off x="640080" y="4114800"/>
+            <a:ext cx="2011680" cy="384048"/>
+          </a:xfrm>
+          <a:prstGeom prst="rect">
+            <a:avLst/>
+          </a:prstGeom>
+          <a:solidFill>
+            <a:srgbClr val="1C3D5A"/>
+          </a:solidFill>
+          <a:ln>
+            <a:noFill/>
+          </a:ln>
+        </p:spPr>
+        <p:style>
+          <a:lnRef idx="1">
+            <a:schemeClr val="accent1"/>
+          </a:lnRef>
+          <a:fillRef idx="3">
+            <a:schemeClr val="accent1"/>
+          </a:fillRef>
+          <a:effectRef idx="2">
+            <a:schemeClr val="accent1"/>
+          </a:effectRef>
+          <a:fontRef idx="minor">
+            <a:schemeClr val="lt1"/>
+          </a:fontRef>
+        </p:style>
+        <p:txBody>
+          <a:bodyPr rtlCol="0" anchor="ctr"/>
+          <a:lstStyle/>
+          <a:p>
+            <a:pPr algn="ctr"/>
+          </a:p>
+        </p:txBody>
+      </p:sp>
+      <p:sp>
+        <p:nvSpPr>
+          <p:cNvPr id="15" name="TextBox 14"/>
+          <p:cNvSpPr txBox="1"/>
+          <p:nvPr/>
+        </p:nvSpPr>
+        <p:spPr>
+          <a:xfrm>
+            <a:off x="749808" y="4114800"/>
+            <a:ext cx="1828800" cy="384048"/>
+          </a:xfrm>
+          <a:prstGeom prst="rect">
+            <a:avLst/>
+          </a:prstGeom>
+          <a:noFill/>
+        </p:spPr>
+        <p:txBody>
+          <a:bodyPr wrap="square" anchor="ctr" lIns="0" rIns="0" tIns="0" bIns="0">
+            <a:spAutoFit/>
+          </a:bodyPr>
+          <a:lstStyle/>
+          <a:p>
+            <a:pPr algn="l">
+              <a:lnSpc>
+                <a:spcPct val="112000"/>
+              </a:lnSpc>
+              <a:spcAft>
+                <a:spcPts val="500"/>
+              </a:spcAft>
+            </a:pPr>
+            <a:r>
+              <a:rPr sz="1250" b="1" i="0">
+                <a:solidFill>
+                  <a:srgbClr val="FFFFFF"/>
+                </a:solidFill>
+                <a:latin typeface="Microsoft JhengHei"/>
+                <a:ea typeface="Microsoft JhengHei"/>
+                <a:cs typeface="Microsoft JhengHei"/>
+              </a:rPr>
+              <a:t>組員</a:t>
+            </a:r>
+          </a:p>
+        </p:txBody>
+      </p:sp>
+      <p:sp>
+        <p:nvSpPr>
+          <p:cNvPr id="16" name="Rectangle 15"/>
+          <p:cNvSpPr/>
+          <p:nvPr/>
+        </p:nvSpPr>
+        <p:spPr>
+          <a:xfrm>
+            <a:off x="2651760" y="4114800"/>
+            <a:ext cx="8899855" cy="384048"/>
+          </a:xfrm>
+          <a:prstGeom prst="rect">
+            <a:avLst/>
+          </a:prstGeom>
+          <a:solidFill>
+            <a:srgbClr val="1C3D5A"/>
+          </a:solidFill>
+          <a:ln>
+            <a:noFill/>
+          </a:ln>
+        </p:spPr>
+        <p:style>
+          <a:lnRef idx="1">
+            <a:schemeClr val="accent1"/>
+          </a:lnRef>
+          <a:fillRef idx="3">
+            <a:schemeClr val="accent1"/>
+          </a:fillRef>
+          <a:effectRef idx="2">
+            <a:schemeClr val="accent1"/>
+          </a:effectRef>
+          <a:fontRef idx="minor">
+            <a:schemeClr val="lt1"/>
+          </a:fontRef>
+        </p:style>
+        <p:txBody>
+          <a:bodyPr rtlCol="0" anchor="ctr"/>
+          <a:lstStyle/>
+          <a:p>
+            <a:pPr algn="ctr"/>
+          </a:p>
+        </p:txBody>
+      </p:sp>
+      <p:sp>
+        <p:nvSpPr>
+          <p:cNvPr id="17" name="TextBox 16"/>
+          <p:cNvSpPr txBox="1"/>
+          <p:nvPr/>
+        </p:nvSpPr>
+        <p:spPr>
+          <a:xfrm>
+            <a:off x="2761488" y="4114800"/>
+            <a:ext cx="8716975" cy="384048"/>
+          </a:xfrm>
+          <a:prstGeom prst="rect">
+            <a:avLst/>
+          </a:prstGeom>
+          <a:noFill/>
+        </p:spPr>
+        <p:txBody>
+          <a:bodyPr wrap="square" anchor="ctr" lIns="0" rIns="0" tIns="0" bIns="0">
+            <a:spAutoFit/>
+          </a:bodyPr>
+          <a:lstStyle/>
+          <a:p>
+            <a:pPr algn="l">
+              <a:lnSpc>
+                <a:spcPct val="112000"/>
+              </a:lnSpc>
+              <a:spcAft>
+                <a:spcPts val="500"/>
+              </a:spcAft>
+            </a:pPr>
+            <a:r>
+              <a:rPr sz="1250" b="1" i="0">
+                <a:solidFill>
+                  <a:srgbClr val="FFFFFF"/>
+                </a:solidFill>
+                <a:latin typeface="Microsoft JhengHei"/>
+                <a:ea typeface="Microsoft JhengHei"/>
+                <a:cs typeface="Microsoft JhengHei"/>
+              </a:rPr>
+              <a:t>負責項目</a:t>
+            </a:r>
+          </a:p>
+        </p:txBody>
+      </p:sp>
+      <p:sp>
+        <p:nvSpPr>
+          <p:cNvPr id="18" name="Rectangle 17"/>
+          <p:cNvSpPr/>
+          <p:nvPr/>
+        </p:nvSpPr>
+        <p:spPr>
+          <a:xfrm>
+            <a:off x="640080" y="4498848"/>
+            <a:ext cx="10911535" cy="365760"/>
+          </a:xfrm>
+          <a:prstGeom prst="rect">
+            <a:avLst/>
+          </a:prstGeom>
+          <a:solidFill>
+            <a:srgbClr val="FFFFFF"/>
+          </a:solidFill>
+          <a:ln>
+            <a:noFill/>
+          </a:ln>
+        </p:spPr>
+        <p:style>
+          <a:lnRef idx="1">
+            <a:schemeClr val="accent1"/>
+          </a:lnRef>
+          <a:fillRef idx="3">
+            <a:schemeClr val="accent1"/>
+          </a:fillRef>
+          <a:effectRef idx="2">
+            <a:schemeClr val="accent1"/>
+          </a:effectRef>
+          <a:fontRef idx="minor">
+            <a:schemeClr val="lt1"/>
+          </a:fontRef>
+        </p:style>
+        <p:txBody>
+          <a:bodyPr rtlCol="0" anchor="ctr"/>
+          <a:lstStyle/>
+          <a:p>
+            <a:pPr algn="ctr"/>
+          </a:p>
+        </p:txBody>
+      </p:sp>
+      <p:sp>
+        <p:nvSpPr>
+          <p:cNvPr id="19" name="TextBox 18"/>
+          <p:cNvSpPr txBox="1"/>
+          <p:nvPr/>
+        </p:nvSpPr>
+        <p:spPr>
+          <a:xfrm>
+            <a:off x="749808" y="4498848"/>
+            <a:ext cx="1828800" cy="365760"/>
+          </a:xfrm>
+          <a:prstGeom prst="rect">
+            <a:avLst/>
+          </a:prstGeom>
+          <a:noFill/>
+        </p:spPr>
+        <p:txBody>
+          <a:bodyPr wrap="square" anchor="ctr" lIns="0" rIns="0" tIns="0" bIns="0">
+            <a:spAutoFit/>
+          </a:bodyPr>
+          <a:lstStyle/>
+          <a:p>
+            <a:pPr algn="l">
+              <a:lnSpc>
+                <a:spcPct val="112000"/>
+              </a:lnSpc>
+              <a:spcAft>
+                <a:spcPts val="500"/>
+              </a:spcAft>
+            </a:pPr>
+            <a:r>
+              <a:rPr sz="1250" b="1" i="0">
+                <a:solidFill>
+                  <a:srgbClr val="1C3D5A"/>
+                </a:solidFill>
+                <a:latin typeface="Microsoft JhengHei"/>
+                <a:ea typeface="Microsoft JhengHei"/>
+                <a:cs typeface="Microsoft JhengHei"/>
+              </a:rPr>
+              <a:t>傅瀚鋌</a:t>
+            </a:r>
+          </a:p>
+        </p:txBody>
+      </p:sp>
+      <p:sp>
+        <p:nvSpPr>
+          <p:cNvPr id="20" name="TextBox 19"/>
+          <p:cNvSpPr txBox="1"/>
+          <p:nvPr/>
+        </p:nvSpPr>
+        <p:spPr>
+          <a:xfrm>
+            <a:off x="2761488" y="4498848"/>
+            <a:ext cx="8716975" cy="365760"/>
+          </a:xfrm>
+          <a:prstGeom prst="rect">
+            <a:avLst/>
+          </a:prstGeom>
+          <a:noFill/>
+        </p:spPr>
+        <p:txBody>
+          <a:bodyPr wrap="square" anchor="ctr" lIns="0" rIns="0" tIns="0" bIns="0">
+            <a:spAutoFit/>
+          </a:bodyPr>
+          <a:lstStyle/>
+          <a:p>
+            <a:pPr algn="l">
+              <a:lnSpc>
+                <a:spcPct val="112000"/>
+              </a:lnSpc>
+              <a:spcAft>
+                <a:spcPts val="500"/>
+              </a:spcAft>
+            </a:pPr>
+            <a:r>
+              <a:rPr sz="1250" b="0" i="0">
+                <a:solidFill>
+                  <a:srgbClr val="3D4D5A"/>
+                </a:solidFill>
+                <a:latin typeface="Microsoft JhengHei"/>
+                <a:ea typeface="Microsoft JhengHei"/>
+                <a:cs typeface="Microsoft JhengHei"/>
+              </a:rPr>
+              <a:t>作業工具支援</a:t>
+            </a:r>
+          </a:p>
+        </p:txBody>
+      </p:sp>
+      <p:sp>
+        <p:nvSpPr>
+          <p:cNvPr id="21" name="Rectangle 20"/>
+          <p:cNvSpPr/>
+          <p:nvPr/>
+        </p:nvSpPr>
+        <p:spPr>
+          <a:xfrm>
+            <a:off x="640080" y="4864608"/>
+            <a:ext cx="10911535" cy="365760"/>
+          </a:xfrm>
+          <a:prstGeom prst="rect">
+            <a:avLst/>
+          </a:prstGeom>
+          <a:solidFill>
+            <a:srgbClr val="F3F7F9"/>
+          </a:solidFill>
+          <a:ln>
+            <a:noFill/>
+          </a:ln>
+        </p:spPr>
+        <p:style>
+          <a:lnRef idx="1">
+            <a:schemeClr val="accent1"/>
+          </a:lnRef>
+          <a:fillRef idx="3">
+            <a:schemeClr val="accent1"/>
+          </a:fillRef>
+          <a:effectRef idx="2">
+            <a:schemeClr val="accent1"/>
+          </a:effectRef>
+          <a:fontRef idx="minor">
+            <a:schemeClr val="lt1"/>
+          </a:fontRef>
+        </p:style>
+        <p:txBody>
+          <a:bodyPr rtlCol="0" anchor="ctr"/>
+          <a:lstStyle/>
+          <a:p>
+            <a:pPr algn="ctr"/>
+          </a:p>
+        </p:txBody>
+      </p:sp>
+      <p:sp>
+        <p:nvSpPr>
+          <p:cNvPr id="22" name="TextBox 21"/>
+          <p:cNvSpPr txBox="1"/>
+          <p:nvPr/>
+        </p:nvSpPr>
+        <p:spPr>
+          <a:xfrm>
+            <a:off x="749808" y="4864608"/>
+            <a:ext cx="1828800" cy="365760"/>
+          </a:xfrm>
+          <a:prstGeom prst="rect">
+            <a:avLst/>
+          </a:prstGeom>
+          <a:noFill/>
+        </p:spPr>
+        <p:txBody>
+          <a:bodyPr wrap="square" anchor="ctr" lIns="0" rIns="0" tIns="0" bIns="0">
+            <a:spAutoFit/>
+          </a:bodyPr>
+          <a:lstStyle/>
+          <a:p>
+            <a:pPr algn="l">
+              <a:lnSpc>
+                <a:spcPct val="112000"/>
+              </a:lnSpc>
+              <a:spcAft>
+                <a:spcPts val="500"/>
+              </a:spcAft>
+            </a:pPr>
+            <a:r>
+              <a:rPr sz="1250" b="1" i="0">
+                <a:solidFill>
+                  <a:srgbClr val="1C3D5A"/>
+                </a:solidFill>
+                <a:latin typeface="Microsoft JhengHei"/>
+                <a:ea typeface="Microsoft JhengHei"/>
+                <a:cs typeface="Microsoft JhengHei"/>
+              </a:rPr>
+              <a:t>曾紹喆</a:t>
+            </a:r>
+          </a:p>
+        </p:txBody>
+      </p:sp>
+      <p:sp>
+        <p:nvSpPr>
+          <p:cNvPr id="23" name="TextBox 22"/>
+          <p:cNvSpPr txBox="1"/>
+          <p:nvPr/>
+        </p:nvSpPr>
+        <p:spPr>
+          <a:xfrm>
+            <a:off x="2761488" y="4864608"/>
+            <a:ext cx="8716975" cy="365760"/>
+          </a:xfrm>
+          <a:prstGeom prst="rect">
+            <a:avLst/>
+          </a:prstGeom>
+          <a:noFill/>
+        </p:spPr>
+        <p:txBody>
+          <a:bodyPr wrap="square" anchor="ctr" lIns="0" rIns="0" tIns="0" bIns="0">
+            <a:spAutoFit/>
+          </a:bodyPr>
+          <a:lstStyle/>
+          <a:p>
+            <a:pPr algn="l">
+              <a:lnSpc>
+                <a:spcPct val="112000"/>
+              </a:lnSpc>
+              <a:spcAft>
+                <a:spcPts val="500"/>
+              </a:spcAft>
+            </a:pPr>
+            <a:r>
+              <a:rPr sz="1250" b="0" i="0">
+                <a:solidFill>
+                  <a:srgbClr val="3D4D5A"/>
+                </a:solidFill>
+                <a:latin typeface="Microsoft JhengHei"/>
+                <a:ea typeface="Microsoft JhengHei"/>
+                <a:cs typeface="Microsoft JhengHei"/>
+              </a:rPr>
+              <a:t>題目設定討論</a:t>
+            </a:r>
+          </a:p>
+        </p:txBody>
+      </p:sp>
+      <p:sp>
+        <p:nvSpPr>
+          <p:cNvPr id="24" name="Rectangle 23"/>
+          <p:cNvSpPr/>
+          <p:nvPr/>
+        </p:nvSpPr>
+        <p:spPr>
+          <a:xfrm>
+            <a:off x="640080" y="5230368"/>
+            <a:ext cx="10911535" cy="365760"/>
+          </a:xfrm>
+          <a:prstGeom prst="rect">
+            <a:avLst/>
+          </a:prstGeom>
+          <a:solidFill>
+            <a:srgbClr val="FFFFFF"/>
+          </a:solidFill>
+          <a:ln>
+            <a:noFill/>
+          </a:ln>
+        </p:spPr>
+        <p:style>
+          <a:lnRef idx="1">
+            <a:schemeClr val="accent1"/>
+          </a:lnRef>
+          <a:fillRef idx="3">
+            <a:schemeClr val="accent1"/>
+          </a:fillRef>
+          <a:effectRef idx="2">
+            <a:schemeClr val="accent1"/>
+          </a:effectRef>
+          <a:fontRef idx="minor">
+            <a:schemeClr val="lt1"/>
+          </a:fontRef>
+        </p:style>
+        <p:txBody>
+          <a:bodyPr rtlCol="0" anchor="ctr"/>
+          <a:lstStyle/>
+          <a:p>
+            <a:pPr algn="ctr"/>
+          </a:p>
+        </p:txBody>
+      </p:sp>
+      <p:sp>
+        <p:nvSpPr>
+          <p:cNvPr id="25" name="TextBox 24"/>
+          <p:cNvSpPr txBox="1"/>
+          <p:nvPr/>
+        </p:nvSpPr>
+        <p:spPr>
+          <a:xfrm>
+            <a:off x="749808" y="5230368"/>
+            <a:ext cx="1828800" cy="365760"/>
+          </a:xfrm>
+          <a:prstGeom prst="rect">
+            <a:avLst/>
+          </a:prstGeom>
+          <a:noFill/>
+        </p:spPr>
+        <p:txBody>
+          <a:bodyPr wrap="square" anchor="ctr" lIns="0" rIns="0" tIns="0" bIns="0">
+            <a:spAutoFit/>
+          </a:bodyPr>
+          <a:lstStyle/>
+          <a:p>
+            <a:pPr algn="l">
+              <a:lnSpc>
+                <a:spcPct val="112000"/>
+              </a:lnSpc>
+              <a:spcAft>
+                <a:spcPts val="500"/>
+              </a:spcAft>
+            </a:pPr>
+            <a:r>
+              <a:rPr sz="1250" b="1" i="0">
+                <a:solidFill>
+                  <a:srgbClr val="1C3D5A"/>
+                </a:solidFill>
+                <a:latin typeface="Microsoft JhengHei"/>
+                <a:ea typeface="Microsoft JhengHei"/>
+                <a:cs typeface="Microsoft JhengHei"/>
+              </a:rPr>
+              <a:t>劉家样</a:t>
+            </a:r>
+          </a:p>
+        </p:txBody>
+      </p:sp>
+      <p:sp>
+        <p:nvSpPr>
+          <p:cNvPr id="26" name="TextBox 25"/>
+          <p:cNvSpPr txBox="1"/>
+          <p:nvPr/>
+        </p:nvSpPr>
+        <p:spPr>
+          <a:xfrm>
+            <a:off x="2761488" y="5230368"/>
+            <a:ext cx="8716975" cy="365760"/>
+          </a:xfrm>
+          <a:prstGeom prst="rect">
+            <a:avLst/>
+          </a:prstGeom>
+          <a:noFill/>
+        </p:spPr>
+        <p:txBody>
+          <a:bodyPr wrap="square" anchor="ctr" lIns="0" rIns="0" tIns="0" bIns="0">
+            <a:spAutoFit/>
+          </a:bodyPr>
+          <a:lstStyle/>
+          <a:p>
+            <a:pPr algn="l">
+              <a:lnSpc>
+                <a:spcPct val="112000"/>
+              </a:lnSpc>
+              <a:spcAft>
+                <a:spcPts val="500"/>
+              </a:spcAft>
+            </a:pPr>
+            <a:r>
+              <a:rPr sz="1250" b="0" i="0">
+                <a:solidFill>
+                  <a:srgbClr val="3D4D5A"/>
+                </a:solidFill>
+                <a:latin typeface="Microsoft JhengHei"/>
+                <a:ea typeface="Microsoft JhengHei"/>
+                <a:cs typeface="Microsoft JhengHei"/>
+              </a:rPr>
+              <a:t>輔助驗收功能</a:t>
+            </a:r>
+          </a:p>
+        </p:txBody>
+      </p:sp>
+      <p:sp>
+        <p:nvSpPr>
+          <p:cNvPr id="27" name="Rectangle 26"/>
+          <p:cNvSpPr/>
+          <p:nvPr/>
+        </p:nvSpPr>
+        <p:spPr>
+          <a:xfrm>
+            <a:off x="640080" y="5596128"/>
+            <a:ext cx="10911535" cy="365760"/>
+          </a:xfrm>
+          <a:prstGeom prst="rect">
+            <a:avLst/>
+          </a:prstGeom>
+          <a:solidFill>
+            <a:srgbClr val="F3F7F9"/>
+          </a:solidFill>
+          <a:ln>
+            <a:noFill/>
+          </a:ln>
+        </p:spPr>
+        <p:style>
+          <a:lnRef idx="1">
+            <a:schemeClr val="accent1"/>
+          </a:lnRef>
+          <a:fillRef idx="3">
+            <a:schemeClr val="accent1"/>
+          </a:fillRef>
+          <a:effectRef idx="2">
+            <a:schemeClr val="accent1"/>
+          </a:effectRef>
+          <a:fontRef idx="minor">
+            <a:schemeClr val="lt1"/>
+          </a:fontRef>
+        </p:style>
+        <p:txBody>
+          <a:bodyPr rtlCol="0" anchor="ctr"/>
+          <a:lstStyle/>
+          <a:p>
+            <a:pPr algn="ctr"/>
+          </a:p>
+        </p:txBody>
+      </p:sp>
+      <p:sp>
+        <p:nvSpPr>
+          <p:cNvPr id="28" name="TextBox 27"/>
+          <p:cNvSpPr txBox="1"/>
+          <p:nvPr/>
+        </p:nvSpPr>
+        <p:spPr>
+          <a:xfrm>
+            <a:off x="749808" y="5596128"/>
+            <a:ext cx="1828800" cy="365760"/>
+          </a:xfrm>
+          <a:prstGeom prst="rect">
+            <a:avLst/>
+          </a:prstGeom>
+          <a:noFill/>
+        </p:spPr>
+        <p:txBody>
+          <a:bodyPr wrap="square" anchor="ctr" lIns="0" rIns="0" tIns="0" bIns="0">
+            <a:spAutoFit/>
+          </a:bodyPr>
+          <a:lstStyle/>
+          <a:p>
+            <a:pPr algn="l">
+              <a:lnSpc>
+                <a:spcPct val="112000"/>
+              </a:lnSpc>
+              <a:spcAft>
+                <a:spcPts val="500"/>
+              </a:spcAft>
+            </a:pPr>
+            <a:r>
+              <a:rPr sz="1250" b="1" i="0">
+                <a:solidFill>
+                  <a:srgbClr val="1C3D5A"/>
+                </a:solidFill>
+                <a:latin typeface="Microsoft JhengHei"/>
+                <a:ea typeface="Microsoft JhengHei"/>
+                <a:cs typeface="Microsoft JhengHei"/>
+              </a:rPr>
+              <a:t>李翊丞</a:t>
+            </a:r>
+          </a:p>
+        </p:txBody>
+      </p:sp>
+      <p:sp>
+        <p:nvSpPr>
+          <p:cNvPr id="29" name="TextBox 28"/>
+          <p:cNvSpPr txBox="1"/>
+          <p:nvPr/>
+        </p:nvSpPr>
+        <p:spPr>
+          <a:xfrm>
+            <a:off x="2761488" y="5596128"/>
+            <a:ext cx="8716975" cy="365760"/>
+          </a:xfrm>
+          <a:prstGeom prst="rect">
+            <a:avLst/>
+          </a:prstGeom>
+          <a:noFill/>
+        </p:spPr>
+        <p:txBody>
+          <a:bodyPr wrap="square" anchor="ctr" lIns="0" rIns="0" tIns="0" bIns="0">
+            <a:spAutoFit/>
+          </a:bodyPr>
+          <a:lstStyle/>
+          <a:p>
+            <a:pPr algn="l">
+              <a:lnSpc>
+                <a:spcPct val="112000"/>
+              </a:lnSpc>
+              <a:spcAft>
+                <a:spcPts val="500"/>
+              </a:spcAft>
+            </a:pPr>
+            <a:r>
+              <a:rPr sz="1250" b="0" i="0">
+                <a:solidFill>
+                  <a:srgbClr val="3D4D5A"/>
+                </a:solidFill>
+                <a:latin typeface="Microsoft JhengHei"/>
+                <a:ea typeface="Microsoft JhengHei"/>
+                <a:cs typeface="Microsoft JhengHei"/>
+              </a:rPr>
+              <a:t>題目程式碼解決輔助</a:t>
+            </a:r>
+          </a:p>
+        </p:txBody>
+      </p:sp>
+      <p:sp>
+        <p:nvSpPr>
+          <p:cNvPr id="30" name="Rectangle 29"/>
+          <p:cNvSpPr/>
+          <p:nvPr/>
+        </p:nvSpPr>
+        <p:spPr>
+          <a:xfrm>
+            <a:off x="640080" y="5961888"/>
+            <a:ext cx="10911535" cy="365760"/>
+          </a:xfrm>
+          <a:prstGeom prst="rect">
+            <a:avLst/>
+          </a:prstGeom>
+          <a:solidFill>
+            <a:srgbClr val="FFFFFF"/>
+          </a:solidFill>
+          <a:ln>
+            <a:noFill/>
+          </a:ln>
+        </p:spPr>
+        <p:style>
+          <a:lnRef idx="1">
+            <a:schemeClr val="accent1"/>
+          </a:lnRef>
+          <a:fillRef idx="3">
+            <a:schemeClr val="accent1"/>
+          </a:fillRef>
+          <a:effectRef idx="2">
+            <a:schemeClr val="accent1"/>
+          </a:effectRef>
+          <a:fontRef idx="minor">
+            <a:schemeClr val="lt1"/>
+          </a:fontRef>
+        </p:style>
+        <p:txBody>
+          <a:bodyPr rtlCol="0" anchor="ctr"/>
+          <a:lstStyle/>
+          <a:p>
+            <a:pPr algn="ctr"/>
+          </a:p>
+        </p:txBody>
+      </p:sp>
+      <p:sp>
+        <p:nvSpPr>
+          <p:cNvPr id="31" name="TextBox 30"/>
+          <p:cNvSpPr txBox="1"/>
+          <p:nvPr/>
+        </p:nvSpPr>
+        <p:spPr>
+          <a:xfrm>
+            <a:off x="749808" y="5961888"/>
+            <a:ext cx="1828800" cy="365760"/>
+          </a:xfrm>
+          <a:prstGeom prst="rect">
+            <a:avLst/>
+          </a:prstGeom>
+          <a:noFill/>
+        </p:spPr>
+        <p:txBody>
+          <a:bodyPr wrap="square" anchor="ctr" lIns="0" rIns="0" tIns="0" bIns="0">
+            <a:spAutoFit/>
+          </a:bodyPr>
+          <a:lstStyle/>
+          <a:p>
+            <a:pPr algn="l">
+              <a:lnSpc>
+                <a:spcPct val="112000"/>
+              </a:lnSpc>
+              <a:spcAft>
+                <a:spcPts val="500"/>
+              </a:spcAft>
+            </a:pPr>
+            <a:r>
+              <a:rPr sz="1250" b="1" i="0">
+                <a:solidFill>
+                  <a:srgbClr val="1C3D5A"/>
+                </a:solidFill>
+                <a:latin typeface="Microsoft JhengHei"/>
+                <a:ea typeface="Microsoft JhengHei"/>
+                <a:cs typeface="Microsoft JhengHei"/>
+              </a:rPr>
+              <a:t>林秉賢</a:t>
+            </a:r>
+          </a:p>
+        </p:txBody>
+      </p:sp>
+      <p:sp>
+        <p:nvSpPr>
+          <p:cNvPr id="32" name="TextBox 31"/>
+          <p:cNvSpPr txBox="1"/>
+          <p:nvPr/>
+        </p:nvSpPr>
+        <p:spPr>
+          <a:xfrm>
+            <a:off x="2761488" y="5961888"/>
+            <a:ext cx="8716975" cy="365760"/>
+          </a:xfrm>
+          <a:prstGeom prst="rect">
+            <a:avLst/>
+          </a:prstGeom>
+          <a:noFill/>
+        </p:spPr>
+        <p:txBody>
+          <a:bodyPr wrap="square" anchor="ctr" lIns="0" rIns="0" tIns="0" bIns="0">
+            <a:spAutoFit/>
+          </a:bodyPr>
+          <a:lstStyle/>
+          <a:p>
+            <a:pPr algn="l">
+              <a:lnSpc>
+                <a:spcPct val="112000"/>
+              </a:lnSpc>
+              <a:spcAft>
+                <a:spcPts val="500"/>
+              </a:spcAft>
+            </a:pPr>
+            <a:r>
+              <a:rPr sz="1250" b="0" i="0">
+                <a:solidFill>
+                  <a:srgbClr val="3D4D5A"/>
+                </a:solidFill>
+                <a:latin typeface="Microsoft JhengHei"/>
+                <a:ea typeface="Microsoft JhengHei"/>
+                <a:cs typeface="Microsoft JhengHei"/>
+              </a:rPr>
+              <a:t>專題虛擬環境程式碼解決輔助</a:t>
+            </a:r>
+          </a:p>
+        </p:txBody>
+      </p:sp>
+      <p:sp>
+        <p:nvSpPr>
+          <p:cNvPr id="33" name="Rectangle 32"/>
+          <p:cNvSpPr/>
+          <p:nvPr/>
+        </p:nvSpPr>
+        <p:spPr>
+          <a:xfrm>
+            <a:off x="640080" y="4114800"/>
+            <a:ext cx="10911535" cy="2212848"/>
+          </a:xfrm>
+          <a:prstGeom prst="rect">
+            <a:avLst/>
+          </a:prstGeom>
+          <a:noFill/>
+          <a:ln w="9525">
+            <a:solidFill>
+              <a:srgbClr val="D7E0E6"/>
+            </a:solidFill>
+          </a:ln>
+        </p:spPr>
+        <p:style>
+          <a:lnRef idx="1">
+            <a:schemeClr val="accent1"/>
+          </a:lnRef>
+          <a:fillRef idx="3">
+            <a:schemeClr val="accent1"/>
+          </a:fillRef>
+          <a:effectRef idx="2">
+            <a:schemeClr val="accent1"/>
+          </a:effectRef>
+          <a:fontRef idx="minor">
+            <a:schemeClr val="lt1"/>
+          </a:fontRef>
+        </p:style>
+        <p:txBody>
+          <a:bodyPr rtlCol="0" anchor="ctr"/>
+          <a:lstStyle/>
+          <a:p>
+            <a:pPr algn="ctr"/>
+          </a:p>
+        </p:txBody>
+      </p:sp>
+    </p:spTree>
+  </p:cSld>
+  <p:clrMapOvr>
+    <a:masterClrMapping/>
+  </p:clrMapOvr>
+</p:sld>
+</file>
+
+<file path=ppt/slides/slide52.xml><?xml version="1.0" encoding="utf-8"?>
+<p:sld xmlns:a="http://schemas.openxmlformats.org/drawingml/2006/main" xmlns:p="http://schemas.openxmlformats.org/presentationml/2006/main" xmlns:r="http://schemas.openxmlformats.org/officeDocument/2006/relationships">
+  <p:cSld>
+    <p:bg>
+      <p:bgPr>
+        <a:solidFill>
+          <a:srgbClr val="FFFFFF"/>
+        </a:solidFill>
+        <a:effectLst/>
+      </p:bgPr>
+    </p:bg>
+    <p:spTree>
+      <p:nvGrpSpPr>
+        <p:cNvPr id="1" name=""/>
+        <p:cNvGrpSpPr/>
+        <p:nvPr/>
+      </p:nvGrpSpPr>
+      <p:grpSpPr/>
+      <p:sp>
+        <p:nvSpPr>
           <p:cNvPr id="2" name="Rectangle 1"/>
           <p:cNvSpPr/>
           <p:nvPr/>
@@ -53375,7 +55189,7 @@
                 <a:ea typeface="Microsoft JhengHei"/>
                 <a:cs typeface="Microsoft JhengHei"/>
               </a:rPr>
-              <a:t>RandomForest（acc 0.949 / AUC 0.811）+ Markov 雙模型海況預測</a:t>
+              <a:t>RandomForest（acc 0.692 / AUC 0.703）+ Markov 雙模型海況預測</a:t>
             </a:r>
           </a:p>
         </p:txBody>
@@ -53780,7 +55594,7 @@
                 <a:ea typeface="Microsoft JhengHei"/>
                 <a:cs typeface="Microsoft JhengHei"/>
               </a:rPr>
-              <a:t>人員雷達圖 · 疲勞指數 · Gini 0.042 · 船艦可用性四項人力決策</a:t>
+              <a:t>人員雷達圖 · 疲勞指數 · Gini 0.031 · 船艦可用性四項人力決策</a:t>
             </a:r>
           </a:p>
         </p:txBody>
@@ -53915,7 +55729,7 @@
                 <a:ea typeface="Microsoft JhengHei"/>
                 <a:cs typeface="Microsoft JhengHei"/>
               </a:rPr>
-              <a:t>25 張圖表 · 45 項 CI 全綠 · F=181.4 · χ²=349.6 · R²=0.784</a:t>
+              <a:t>25 張圖表 · 45 項 CI 全綠 · F=249.1 · χ²=232.8 · R²=0.801</a:t>
             </a:r>
           </a:p>
         </p:txBody>
